--- a/docs/business_analyst/PRESENTASI_BUSINESS_ANALYST_CIDP.pptx
+++ b/docs/business_analyst/PRESENTASI_BUSINESS_ANALYST_CIDP.pptx
@@ -17,6 +17,10 @@
     <p:sldId id="265" r:id="rId16"/>
     <p:sldId id="266" r:id="rId17"/>
     <p:sldId id="267" r:id="rId18"/>
+    <p:sldId id="268" r:id="rId19"/>
+    <p:sldId id="269" r:id="rId20"/>
+    <p:sldId id="270" r:id="rId21"/>
+    <p:sldId id="271" r:id="rId22"/>
   </p:sldIdLst>
   <p:sldSz cx="12191695" cy="6858000" type="screen4x3"/>
   <p:notesSz cx="6858000" cy="9144000"/>
@@ -3202,7 +3206,7 @@
           <a:noFill/>
         </p:spPr>
         <p:txBody>
-          <a:bodyPr wrap="square" lIns="0" tIns="0" rIns="0" bIns="0">
+          <a:bodyPr wrap="square">
             <a:spAutoFit/>
           </a:bodyPr>
           <a:lstStyle/>
@@ -3215,7 +3219,7 @@
               </a:defRPr>
             </a:pPr>
             <a:r>
-              <a:t>CONCLUSION SUPPLY CHAIN CONSULTANT — STRATEGIC ADVISORY REPORT</a:t>
+              <a:t>CONCLUSION SUPPLY CHAIN CONSULTANT — STRATEGIC BUSINESS BLUEPRINT</a:t>
             </a:r>
           </a:p>
           <a:p>
@@ -3249,7 +3253,7 @@
               </a:defRPr>
             </a:pPr>
             <a:r>
-              <a:t>STANDAR SILABUS: ALUR KEPUTUSAN (JIKA YA / JIKA TIDAK), ALAT &amp; HARDWARE, VALIDASI BISNIS, SERTA FEASIBILITY</a:t>
+              <a:t>STANDAR SILABUS LENGKAP: 14 BAB PEMETAAN FITUR, BUSINESS RULES, EQUIPMENT ASSIGNMENT, FLOWCHART RESMI, &amp; FSD</a:t>
             </a:r>
           </a:p>
         </p:txBody>
@@ -3322,7 +3326,7 @@
             </a:r>
             <a:br/>
             <a:r>
-              <a:t>  Fokus: End-to-End Decision Flows, Business Rules Mapping, Exception Handling, Validasi 3D Bay-Row-Tier, Standar GS1 SSCC-18, &amp; Feasibility Study.</a:t>
+              <a:t>  Fokus: End-to-End Decision Flowcharts, Business Rules Timbangan, Equipment Allocation Matrix, Stacking Rules 40ft/20ft, &amp; Spesifikasi FSD.</a:t>
             </a:r>
             <a:br/>
             <a:br/>
@@ -3331,7 +3335,7 @@
             </a:r>
             <a:br/>
             <a:r>
-              <a:t>  Fokus: Arsitektur Eksekutif Web YMS, Database MySQL, &amp; Integrasi 5 Modul.</a:t>
+              <a:t>  Fokus: Arsitektur Eksekutif Web YMS, Integrasi 5 Modul (WMS, TMS, WCS, YMS, ERP), &amp; Database MySQL.</a:t>
             </a:r>
           </a:p>
         </p:txBody>
@@ -3404,7 +3408,7 @@
             </a:r>
             <a:br/>
             <a:r>
-              <a:t>  (Spesifikasi 26 Sensor Lapangan, Jembatan Timbang &amp; Otomasi Gate)</a:t>
+              <a:t>  (Load Cell Timbangan 80T, Kamera ANPR/OCR, Palang Otomatis, &amp; Sensor Telemetri)</a:t>
             </a:r>
             <a:br/>
             <a:br/>
@@ -3413,7 +3417,7 @@
             </a:r>
             <a:br/>
             <a:r>
-              <a:t>  (Logika Penanganan Peti Kemas &amp; Terminal Tariff Engine Odoo)</a:t>
+              <a:t>  (CFS Stripping/Stuffing WMS, Terminal Tariff Engine Odoo, &amp; Billing)</a:t>
             </a:r>
             <a:br/>
             <a:br/>
@@ -3422,7 +3426,7 @@
             </a:r>
             <a:br/>
             <a:r>
-              <a:t>  (REST API Gateway, Payload JSON &amp; Stacking Rules Matrix)</a:t>
+              <a:t>  (REST API Gateway, Stacking Hierarchy 4D, &amp; Exception Handling Engine)</a:t>
             </a:r>
           </a:p>
         </p:txBody>
@@ -3444,7 +3448,7 @@
           <a:noFill/>
         </p:spPr>
         <p:txBody>
-          <a:bodyPr wrap="square" lIns="0" tIns="0" rIns="0" bIns="0">
+          <a:bodyPr wrap="square">
             <a:spAutoFit/>
           </a:bodyPr>
           <a:lstStyle/>
@@ -3462,9 +3466,6 @@
           </a:p>
           <a:p>
             <a:pPr>
-              <a:spcBef>
-                <a:spcPts val="100"/>
-              </a:spcBef>
               <a:defRPr sz="900">
                 <a:solidFill>
                   <a:srgbClr val="94A3B8"/>
@@ -3477,9 +3478,6 @@
           </a:p>
           <a:p>
             <a:pPr>
-              <a:spcBef>
-                <a:spcPts val="200"/>
-              </a:spcBef>
               <a:defRPr sz="900" b="1">
                 <a:solidFill>
                   <a:srgbClr val="38BDF8"/>
@@ -3519,7 +3517,7 @@
         <p:spPr>
           <a:xfrm>
             <a:off x="731520" y="256032"/>
-            <a:ext cx="7498079" cy="1051560"/>
+            <a:ext cx="7772400" cy="1051560"/>
           </a:xfrm>
           <a:prstGeom prst="rect">
             <a:avLst/>
@@ -3555,7 +3553,7 @@
               </a:defRPr>
             </a:pPr>
             <a:r>
-              <a:t>Dashboard Intelligence: Executive Command Center (C-Level DSS)</a:t>
+              <a:t>Fitur WMS Outbound &amp; Kontrol Hardware WCS / WES Otomasi (Bab 4 &amp; 5)</a:t>
             </a:r>
           </a:p>
         </p:txBody>
@@ -3568,8 +3566,8 @@
         </p:nvSpPr>
         <p:spPr>
           <a:xfrm>
-            <a:off x="8321040" y="237744"/>
-            <a:ext cx="3108960" cy="932688"/>
+            <a:off x="8412480" y="237744"/>
+            <a:ext cx="3017520" cy="932688"/>
           </a:xfrm>
           <a:prstGeom prst="roundRect">
             <a:avLst/>
@@ -3624,7 +3622,7 @@
               </a:defRPr>
             </a:pPr>
             <a:r>
-              <a:t>dashboard.php?page=beranda</a:t>
+              <a:t>dashboard.php?page=scanner</a:t>
             </a:r>
           </a:p>
           <a:p>
@@ -3639,7 +3637,7 @@
               </a:defRPr>
             </a:pPr>
             <a:r>
-              <a:t>http://localhost/.../dashboard.php</a:t>
+              <a:t>http://localhost/.../scanner.php</a:t>
             </a:r>
           </a:p>
         </p:txBody>
@@ -3674,7 +3672,7 @@
               </a:defRPr>
             </a:pPr>
             <a:r>
-              <a:t>Conclusion Supply Chain Consultant  •  Naufal Andika Heditya &amp; Zulfikar J. Fatah  •  Topik 7: CIDP 35 Ha                    Slide 10 of 12</a:t>
+              <a:t>Conclusion Supply Chain Consultant  •  Naufal Andika Heditya &amp; Zulfikar J. Fatah  •  Topik 7: CIDP 35 Ha                    Slide 10 of 16</a:t>
             </a:r>
           </a:p>
         </p:txBody>
@@ -3688,7 +3686,7 @@
         <p:spPr>
           <a:xfrm>
             <a:off x="731520" y="1508760"/>
-            <a:ext cx="5212080" cy="2926080"/>
+            <a:ext cx="5212080" cy="4160520"/>
           </a:xfrm>
           <a:prstGeom prst="roundRect">
             <a:avLst/>
@@ -3733,7 +3731,7 @@
         <p:spPr>
           <a:xfrm>
             <a:off x="914400" y="1691640"/>
-            <a:ext cx="4846320" cy="2560320"/>
+            <a:ext cx="4846320" cy="3794760"/>
           </a:xfrm>
           <a:prstGeom prst="rect">
             <a:avLst/>
@@ -3747,29 +3745,14 @@
           <a:lstStyle/>
           <a:p>
             <a:pPr>
-              <a:defRPr sz="950" b="1">
+              <a:defRPr sz="1100" b="1">
                 <a:solidFill>
                   <a:srgbClr val="0170B9"/>
                 </a:solidFill>
               </a:defRPr>
             </a:pPr>
             <a:r>
-              <a:t>4 METRIK KEPUTUSAN DIREKSI (C-LEVEL DSS)</a:t>
-            </a:r>
-          </a:p>
-          <a:p>
-            <a:pPr>
-              <a:spcBef>
-                <a:spcPts val="200"/>
-              </a:spcBef>
-              <a:defRPr sz="1300" b="1">
-                <a:solidFill>
-                  <a:srgbClr val="002F5E"/>
-                </a:solidFill>
-              </a:defRPr>
-            </a:pPr>
-            <a:r>
-              <a:t>Visibilitas Waktu-Nyata Kinerja Terminal</a:t>
+              <a:t>1. FITUR WMS OUTBOUND (BAB 4)</a:t>
             </a:r>
           </a:p>
           <a:p>
@@ -3777,45 +3760,48 @@
               <a:spcBef>
                 <a:spcPts val="600"/>
               </a:spcBef>
-              <a:defRPr sz="850">
+              <a:defRPr sz="880">
                 <a:solidFill>
                   <a:srgbClr val="1E293B"/>
                 </a:solidFill>
               </a:defRPr>
             </a:pPr>
             <a:r>
-              <a:t>1. Yard Occupancy Rate (YOR) — 68,4%:</a:t>
-            </a:r>
-            <a:br/>
-            <a:r>
-              <a:t>   Ambang batas aman (&lt;80%). Mencegah kemacetan penumpukan dan denda port congestion surcharge ($50/TEU).</a:t>
-            </a:r>
-            <a:br/>
-            <a:br/>
-            <a:r>
-              <a:t>2. Throughput Harian — 482 TEU:</a:t>
-            </a:r>
-            <a:br/>
-            <a:r>
-              <a:t>   Mencapai 96,4% dari target harian (500 TEU). Mengukur kecepatan intermodal gate truk dan rail siding KA.</a:t>
-            </a:r>
-            <a:br/>
-            <a:br/>
-            <a:r>
-              <a:t>3. Average Dwell Time — 2,3 Hari:</a:t>
-            </a:r>
-            <a:br/>
-            <a:r>
-              <a:t>   Sangat produktif dibanding rata-rata nasional pelabuhan laut (4 - 5 hari), mempercepat perputaran kargo.</a:t>
-            </a:r>
-            <a:br/>
-            <a:br/>
-            <a:r>
-              <a:t>4. Gross Daily Revenue — Rp 184,5 Juta:</a:t>
-            </a:r>
-            <a:br/>
-            <a:r>
-              <a:t>   Arus kas harian tertagih real-time dengan Collection Rate 98,2%.</a:t>
+              <a:t>• 4.1 Slotting Optimization (Analisis ABC):</a:t>
+            </a:r>
+            <a:br/>
+            <a:r>
+              <a:t>  Penataan ulang lokasi simpan secara berkala berdasarkan frekuensi perputaran transaksi barang:</a:t>
+            </a:r>
+            <a:br/>
+            <a:r>
+              <a:t>  - Fast Moving (A): Di rak lantai bawah dekat pintu loading.</a:t>
+            </a:r>
+            <a:br/>
+            <a:r>
+              <a:t>  - Slow Moving (C): Di rak tingkat atas lorong belakang.</a:t>
+            </a:r>
+            <a:br/>
+            <a:r>
+              <a:t>  Dampak: Memangkas waktu putaway &amp; retrieval hingga 35%.</a:t>
+            </a:r>
+            <a:br/>
+            <a:br/>
+            <a:r>
+              <a:t>• 4.2 Picking Strategy Engine (Wave, Batch, Zone):</a:t>
+            </a:r>
+            <a:br/>
+            <a:r>
+              <a:t>  Penggabungan beberapa Sales Order menjadi satu jalur unduh (Wave) untuk memangkas jarak tempuh operator forklift.</a:t>
+            </a:r>
+            <a:br/>
+            <a:br/>
+            <a:r>
+              <a:t>• 4.3 Packing &amp; Weight Verification:</a:t>
+            </a:r>
+            <a:br/>
+            <a:r>
+              <a:t>  Pengecekan toleransi selisih berat (± 2%) pada timbangan otomatis sebelum pencetakan resi / shipping manifest.</a:t>
             </a:r>
           </a:p>
         </p:txBody>
@@ -3829,17 +3815,17 @@
         <p:spPr>
           <a:xfrm>
             <a:off x="6217920" y="1508760"/>
-            <a:ext cx="5212080" cy="2926080"/>
+            <a:ext cx="5212080" cy="4160520"/>
           </a:xfrm>
           <a:prstGeom prst="roundRect">
             <a:avLst/>
           </a:prstGeom>
           <a:solidFill>
-            <a:srgbClr val="ECFDF5"/>
+            <a:srgbClr val="FFFFFF"/>
           </a:solidFill>
           <a:ln w="12700">
             <a:solidFill>
-              <a:srgbClr val="10B981"/>
+              <a:srgbClr val="E2E8F0"/>
             </a:solidFill>
           </a:ln>
         </p:spPr>
@@ -3874,7 +3860,7 @@
         <p:spPr>
           <a:xfrm>
             <a:off x="6400800" y="1691640"/>
-            <a:ext cx="4846320" cy="2560320"/>
+            <a:ext cx="4846320" cy="3794760"/>
           </a:xfrm>
           <a:prstGeom prst="rect">
             <a:avLst/>
@@ -3888,29 +3874,14 @@
           <a:lstStyle/>
           <a:p>
             <a:pPr>
-              <a:defRPr sz="950" b="1">
-                <a:solidFill>
-                  <a:srgbClr val="10B981"/>
-                </a:solidFill>
-              </a:defRPr>
-            </a:pPr>
-            <a:r>
-              <a:t>BUSINESS INTELLIGENCE &amp; ANALITIK DATA</a:t>
-            </a:r>
-          </a:p>
-          <a:p>
-            <a:pPr>
-              <a:spcBef>
-                <a:spcPts val="200"/>
-              </a:spcBef>
-              <a:defRPr sz="1300" b="1">
+              <a:defRPr sz="1100" b="1">
                 <a:solidFill>
                   <a:srgbClr val="002F5E"/>
                 </a:solidFill>
               </a:defRPr>
             </a:pPr>
             <a:r>
-              <a:t>Visualisasi Chart.js &amp; Heatmap Dwell Time</a:t>
+              <a:t>2. WCS HARDWARE CONTROL &amp; ANOMALI (BAB 5)</a:t>
             </a:r>
           </a:p>
           <a:p>
@@ -3918,36 +3889,49 @@
               <a:spcBef>
                 <a:spcPts val="600"/>
               </a:spcBef>
-              <a:defRPr sz="850">
+              <a:defRPr sz="880">
                 <a:solidFill>
                   <a:srgbClr val="1E293B"/>
                 </a:solidFill>
               </a:defRPr>
             </a:pPr>
             <a:r>
-              <a:t>• Hourly Traffic Flow Chart:</a:t>
-            </a:r>
-            <a:br/>
-            <a:r>
-              <a:t>  Grafik fluktuasi arus truk per jam untuk perencanaan penugasan operator gate &amp; Reach Stacker (peak hour 10:00 - 15:00).</a:t>
-            </a:r>
-            <a:br/>
-            <a:br/>
-            <a:r>
-              <a:t>• Dwell Time Heatmap Blok Yard:</a:t>
-            </a:r>
-            <a:br/>
-            <a:r>
-              <a:t>  Peta warna mendeteksi kontainer yang menginap kritis (&gt;7 hari) di Blok A-E untuk pemicu denda Masa III otomatis.</a:t>
-            </a:r>
-            <a:br/>
-            <a:br/>
-            <a:r>
-              <a:t>• Live Event Stream &amp; Consignment Tracking:</a:t>
-            </a:r>
-            <a:br/>
-            <a:r>
-              <a:t>  Memonitor 5 event operasional terakhir (gate-in, timbang, lift-off, rilis SPPB) secara detik-per-detik untuk transparansi audit.</a:t>
+              <a:t>• 5.1 Conveyor Diverter Control:</a:t>
+            </a:r>
+            <a:br/>
+            <a:r>
+              <a:t>  Penerjemahan sinyal scan barcode menjadi perintah fisik pusher/diverter untuk membelokkan paket ke jalur rute yang benar.</a:t>
+            </a:r>
+            <a:br/>
+            <a:br/>
+            <a:r>
+              <a:t>• 5.2 Tunnel / Mass Scanner Integration (DWS):</a:t>
+            </a:r>
+            <a:br/>
+            <a:r>
+              <a:t>  Pencatatan data dimensi, berat (scale), dan GS1 scanner secara bersamaan dalam tempo &lt; 500 ms.</a:t>
+            </a:r>
+            <a:br/>
+            <a:br/>
+            <a:r>
+              <a:t>• 5.3 AMR / Crane Fleet Routing &amp; Anti-Deadlock:</a:t>
+            </a:r>
+            <a:br/>
+            <a:r>
+              <a:t>  Manajemen jalur armada robotik &amp; crane untuk mencegah tabrakan dan kondisi macet total (deadlock).</a:t>
+            </a:r>
+            <a:br/>
+            <a:br/>
+            <a:r>
+              <a:t>• PENANGANAN ANOMALI WCS (EXCEPTION HANDLING):</a:t>
+            </a:r>
+            <a:br/>
+            <a:r>
+              <a:t>  - Kasus: Barcode rusak / No-Read Barcode pada conveyor.</a:t>
+            </a:r>
+            <a:br/>
+            <a:r>
+              <a:t>  - Aksi Sistem: WCS memerintahkan diverter membelokkan paket ke REJECT LANE, memicu Alert ke PDA operator untuk pindaian manual.</a:t>
             </a:r>
           </a:p>
         </p:txBody>
@@ -3960,7 +3944,7 @@
         </p:nvSpPr>
         <p:spPr>
           <a:xfrm>
-            <a:off x="731520" y="5779008"/>
+            <a:off x="731520" y="5852160"/>
             <a:ext cx="10698480" cy="438912"/>
           </a:xfrm>
           <a:prstGeom prst="roundRect">
@@ -4001,7 +3985,7 @@
               </a:defRPr>
             </a:pPr>
             <a:r>
-              <a:t>👉  [LIVE DEMO]: Buka Halaman 'Dashboard' (dashboard.php?page=beranda) -&gt; Gauge YOR 68.4%, Chart.js, &amp; Heatmap</a:t>
+              <a:t>👉  [LIVE DEMO]: Buka Halaman Scanner (pages/scanner.php) untuk melihat integrasi DWS Mass Scanner &amp; Diverter.</a:t>
             </a:r>
           </a:p>
         </p:txBody>
@@ -4033,7 +4017,7 @@
         <p:spPr>
           <a:xfrm>
             <a:off x="731520" y="256032"/>
-            <a:ext cx="7498079" cy="1051560"/>
+            <a:ext cx="7772400" cy="1051560"/>
           </a:xfrm>
           <a:prstGeom prst="rect">
             <a:avLst/>
@@ -4069,7 +4053,7 @@
               </a:defRPr>
             </a:pPr>
             <a:r>
-              <a:t>Matriks Penanganan Anomali &amp; QA Testing Matrix (PASS 100%)</a:t>
+              <a:t>Fitur YMS: Dock Scheduling, 3D Yard Tracking, &amp; Demurrage Alert (Bab 7)</a:t>
             </a:r>
           </a:p>
         </p:txBody>
@@ -4082,8 +4066,8 @@
         </p:nvSpPr>
         <p:spPr>
           <a:xfrm>
-            <a:off x="8321040" y="237744"/>
-            <a:ext cx="3108960" cy="932688"/>
+            <a:off x="8412480" y="237744"/>
+            <a:ext cx="3017520" cy="932688"/>
           </a:xfrm>
           <a:prstGeom prst="roundRect">
             <a:avLst/>
@@ -4138,7 +4122,7 @@
               </a:defRPr>
             </a:pPr>
             <a:r>
-              <a:t>pages/simulator.php</a:t>
+              <a:t>dashboard.php?page=yard</a:t>
             </a:r>
           </a:p>
           <a:p>
@@ -4153,7 +4137,7 @@
               </a:defRPr>
             </a:pPr>
             <a:r>
-              <a:t>http://localhost/.../pages/simulator.php</a:t>
+              <a:t>http://localhost/.../yard.php</a:t>
             </a:r>
           </a:p>
         </p:txBody>
@@ -4188,811 +4172,31 @@
               </a:defRPr>
             </a:pPr>
             <a:r>
-              <a:t>Conclusion Supply Chain Consultant  •  Naufal Andika Heditya &amp; Zulfikar J. Fatah  •  Topik 7: CIDP 35 Ha                    Slide 11 of 12</a:t>
-            </a:r>
-          </a:p>
-        </p:txBody>
-      </p:sp>
-      <p:graphicFrame>
-        <p:nvGraphicFramePr>
-          <p:cNvPr id="5" name="Table 4"/>
-          <p:cNvGraphicFramePr>
-            <a:graphicFrameLocks noGrp="1"/>
-          </p:cNvGraphicFramePr>
-          <p:nvPr/>
-        </p:nvGraphicFramePr>
-        <p:xfrm>
-          <a:off x="731520" y="1508760"/>
-          <a:ext cx="10698480" cy="3931920"/>
-        </p:xfrm>
-        <a:graphic>
-          <a:graphicData uri="http://schemas.openxmlformats.org/drawingml/2006/table">
-            <a:tbl>
-              <a:tblPr firstRow="1" bandRow="1">
-                <a:tableStyleId>{5C22544A-7EE6-4342-B048-85BDC9FD1C3A}</a:tableStyleId>
-              </a:tblPr>
-              <a:tblGrid>
-                <a:gridCol w="1645920"/>
-                <a:gridCol w="2011680"/>
-                <a:gridCol w="5486400"/>
-                <a:gridCol w="1554480"/>
-              </a:tblGrid>
-              <a:tr h="491490">
-                <a:tc>
-                  <a:txBody>
-                    <a:bodyPr/>
-                    <a:lstStyle/>
-                    <a:p>
-                      <a:pPr>
-                        <a:defRPr sz="900" b="1">
-                          <a:solidFill>
-                            <a:srgbClr val="FFFFFF"/>
-                          </a:solidFill>
-                        </a:defRPr>
-                      </a:pPr>
-                      <a:r>
-                        <a:t>Kondisi Uji / Anomali</a:t>
-                      </a:r>
-                    </a:p>
-                  </a:txBody>
-                  <a:tcPr>
-                    <a:solidFill>
-                      <a:srgbClr val="002F5E"/>
-                    </a:solidFill>
-                  </a:tcPr>
-                </a:tc>
-                <a:tc>
-                  <a:txBody>
-                    <a:bodyPr/>
-                    <a:lstStyle/>
-                    <a:p>
-                      <a:pPr>
-                        <a:defRPr sz="900" b="1">
-                          <a:solidFill>
-                            <a:srgbClr val="FFFFFF"/>
-                          </a:solidFill>
-                        </a:defRPr>
-                      </a:pPr>
-                      <a:r>
-                        <a:t>Decision Logika BA</a:t>
-                      </a:r>
-                    </a:p>
-                  </a:txBody>
-                  <a:tcPr>
-                    <a:solidFill>
-                      <a:srgbClr val="002F5E"/>
-                    </a:solidFill>
-                  </a:tcPr>
-                </a:tc>
-                <a:tc>
-                  <a:txBody>
-                    <a:bodyPr/>
-                    <a:lstStyle/>
-                    <a:p>
-                      <a:pPr>
-                        <a:defRPr sz="900" b="1">
-                          <a:solidFill>
-                            <a:srgbClr val="FFFFFF"/>
-                          </a:solidFill>
-                        </a:defRPr>
-                      </a:pPr>
-                      <a:r>
-                        <a:t>Perilaku Sistem yang Diharapkan &amp; Penanganan Sistem</a:t>
-                      </a:r>
-                    </a:p>
-                  </a:txBody>
-                  <a:tcPr>
-                    <a:solidFill>
-                      <a:srgbClr val="002F5E"/>
-                    </a:solidFill>
-                  </a:tcPr>
-                </a:tc>
-                <a:tc>
-                  <a:txBody>
-                    <a:bodyPr/>
-                    <a:lstStyle/>
-                    <a:p>
-                      <a:pPr>
-                        <a:defRPr sz="900" b="1">
-                          <a:solidFill>
-                            <a:srgbClr val="FFFFFF"/>
-                          </a:solidFill>
-                        </a:defRPr>
-                      </a:pPr>
-                      <a:r>
-                        <a:t>Status Hasil</a:t>
-                      </a:r>
-                    </a:p>
-                  </a:txBody>
-                  <a:tcPr>
-                    <a:solidFill>
-                      <a:srgbClr val="002F5E"/>
-                    </a:solidFill>
-                  </a:tcPr>
-                </a:tc>
-              </a:tr>
-              <a:tr h="491490">
-                <a:tc>
-                  <a:txBody>
-                    <a:bodyPr/>
-                    <a:lstStyle/>
-                    <a:p>
-                      <a:pPr>
-                        <a:defRPr sz="819">
-                          <a:solidFill>
-                            <a:srgbClr val="1E293B"/>
-                          </a:solidFill>
-                        </a:defRPr>
-                      </a:pPr>
-                      <a:r>
-                        <a:t>Truk Gate-In Normal (&lt;34t)</a:t>
-                      </a:r>
-                    </a:p>
-                  </a:txBody>
-                  <a:tcPr>
-                    <a:solidFill>
-                      <a:srgbClr val="FFFFFF"/>
-                    </a:solidFill>
-                  </a:tcPr>
-                </a:tc>
-                <a:tc>
-                  <a:txBody>
-                    <a:bodyPr/>
-                    <a:lstStyle/>
-                    <a:p>
-                      <a:pPr>
-                        <a:defRPr sz="819">
-                          <a:solidFill>
-                            <a:srgbClr val="1E293B"/>
-                          </a:solidFill>
-                        </a:defRPr>
-                      </a:pPr>
-                      <a:r>
-                        <a:t>Berat &lt;= 34t &amp; ISO Sah</a:t>
-                      </a:r>
-                    </a:p>
-                  </a:txBody>
-                  <a:tcPr>
-                    <a:solidFill>
-                      <a:srgbClr val="FFFFFF"/>
-                    </a:solidFill>
-                  </a:tcPr>
-                </a:tc>
-                <a:tc>
-                  <a:txBody>
-                    <a:bodyPr/>
-                    <a:lstStyle/>
-                    <a:p>
-                      <a:pPr>
-                        <a:defRPr sz="819">
-                          <a:solidFill>
-                            <a:srgbClr val="1E293B"/>
-                          </a:solidFill>
-                        </a:defRPr>
-                      </a:pPr>
-                      <a:r>
-                        <a:t>Palang buka &lt;30s, e-Pass cetak, arahkan truk ke blok yard/reefer/CFS</a:t>
-                      </a:r>
-                    </a:p>
-                  </a:txBody>
-                  <a:tcPr>
-                    <a:solidFill>
-                      <a:srgbClr val="FFFFFF"/>
-                    </a:solidFill>
-                  </a:tcPr>
-                </a:tc>
-                <a:tc>
-                  <a:txBody>
-                    <a:bodyPr/>
-                    <a:lstStyle/>
-                    <a:p>
-                      <a:pPr>
-                        <a:defRPr sz="819" b="1">
-                          <a:solidFill>
-                            <a:srgbClr val="10B981"/>
-                          </a:solidFill>
-                        </a:defRPr>
-                      </a:pPr>
-                      <a:r>
-                        <a:t>PASS (100%)</a:t>
-                      </a:r>
-                    </a:p>
-                  </a:txBody>
-                  <a:tcPr>
-                    <a:solidFill>
-                      <a:srgbClr val="FFFFFF"/>
-                    </a:solidFill>
-                  </a:tcPr>
-                </a:tc>
-              </a:tr>
-              <a:tr h="491490">
-                <a:tc>
-                  <a:txBody>
-                    <a:bodyPr/>
-                    <a:lstStyle/>
-                    <a:p>
-                      <a:pPr>
-                        <a:defRPr sz="819">
-                          <a:solidFill>
-                            <a:srgbClr val="1E293B"/>
-                          </a:solidFill>
-                        </a:defRPr>
-                      </a:pPr>
-                      <a:r>
-                        <a:t>Truk Overload SOLAS (&gt;34t)</a:t>
-                      </a:r>
-                    </a:p>
-                  </a:txBody>
-                  <a:tcPr>
-                    <a:solidFill>
-                      <a:srgbClr val="F8FAFC"/>
-                    </a:solidFill>
-                  </a:tcPr>
-                </a:tc>
-                <a:tc>
-                  <a:txBody>
-                    <a:bodyPr/>
-                    <a:lstStyle/>
-                    <a:p>
-                      <a:pPr>
-                        <a:defRPr sz="819">
-                          <a:solidFill>
-                            <a:srgbClr val="1E293B"/>
-                          </a:solidFill>
-                        </a:defRPr>
-                      </a:pPr>
-                      <a:r>
-                        <a:t>Berat &gt; 34.000 kg</a:t>
-                      </a:r>
-                    </a:p>
-                  </a:txBody>
-                  <a:tcPr>
-                    <a:solidFill>
-                      <a:srgbClr val="F8FAFC"/>
-                    </a:solidFill>
-                  </a:tcPr>
-                </a:tc>
-                <a:tc>
-                  <a:txBody>
-                    <a:bodyPr/>
-                    <a:lstStyle/>
-                    <a:p>
-                      <a:pPr>
-                        <a:defRPr sz="819">
-                          <a:solidFill>
-                            <a:srgbClr val="1E293B"/>
-                          </a:solidFill>
-                        </a:defRPr>
-                      </a:pPr>
-                      <a:r>
-                        <a:t>Palang kunci permanen, sirine bunyi, tolak masuk &amp; arahkan ke Jalur U-Turn</a:t>
-                      </a:r>
-                    </a:p>
-                  </a:txBody>
-                  <a:tcPr>
-                    <a:solidFill>
-                      <a:srgbClr val="F8FAFC"/>
-                    </a:solidFill>
-                  </a:tcPr>
-                </a:tc>
-                <a:tc>
-                  <a:txBody>
-                    <a:bodyPr/>
-                    <a:lstStyle/>
-                    <a:p>
-                      <a:pPr>
-                        <a:defRPr sz="819" b="1">
-                          <a:solidFill>
-                            <a:srgbClr val="10B981"/>
-                          </a:solidFill>
-                        </a:defRPr>
-                      </a:pPr>
-                      <a:r>
-                        <a:t>PASS (100%)</a:t>
-                      </a:r>
-                    </a:p>
-                  </a:txBody>
-                  <a:tcPr>
-                    <a:solidFill>
-                      <a:srgbClr val="F8FAFC"/>
-                    </a:solidFill>
-                  </a:tcPr>
-                </a:tc>
-              </a:tr>
-              <a:tr h="491490">
-                <a:tc>
-                  <a:txBody>
-                    <a:bodyPr/>
-                    <a:lstStyle/>
-                    <a:p>
-                      <a:pPr>
-                        <a:defRPr sz="819">
-                          <a:solidFill>
-                            <a:srgbClr val="1E293B"/>
-                          </a:solidFill>
-                        </a:defRPr>
-                      </a:pPr>
-                      <a:r>
-                        <a:t>Check Digit ISO Salah</a:t>
-                      </a:r>
-                    </a:p>
-                  </a:txBody>
-                  <a:tcPr>
-                    <a:solidFill>
-                      <a:srgbClr val="FFFFFF"/>
-                    </a:solidFill>
-                  </a:tcPr>
-                </a:tc>
-                <a:tc>
-                  <a:txBody>
-                    <a:bodyPr/>
-                    <a:lstStyle/>
-                    <a:p>
-                      <a:pPr>
-                        <a:defRPr sz="819">
-                          <a:solidFill>
-                            <a:srgbClr val="1E293B"/>
-                          </a:solidFill>
-                        </a:defRPr>
-                      </a:pPr>
-                      <a:r>
-                        <a:t>Modulo 11 Gagal</a:t>
-                      </a:r>
-                    </a:p>
-                  </a:txBody>
-                  <a:tcPr>
-                    <a:solidFill>
-                      <a:srgbClr val="FFFFFF"/>
-                    </a:solidFill>
-                  </a:tcPr>
-                </a:tc>
-                <a:tc>
-                  <a:txBody>
-                    <a:bodyPr/>
-                    <a:lstStyle/>
-                    <a:p>
-                      <a:pPr>
-                        <a:defRPr sz="819">
-                          <a:solidFill>
-                            <a:srgbClr val="1E293B"/>
-                          </a:solidFill>
-                        </a:defRPr>
-                      </a:pPr>
-                      <a:r>
-                        <a:t>Operator salah ketik digit kontainer; pendaftaran diblokir otomatis oleh sistem</a:t>
-                      </a:r>
-                    </a:p>
-                  </a:txBody>
-                  <a:tcPr>
-                    <a:solidFill>
-                      <a:srgbClr val="FFFFFF"/>
-                    </a:solidFill>
-                  </a:tcPr>
-                </a:tc>
-                <a:tc>
-                  <a:txBody>
-                    <a:bodyPr/>
-                    <a:lstStyle/>
-                    <a:p>
-                      <a:pPr>
-                        <a:defRPr sz="819" b="1">
-                          <a:solidFill>
-                            <a:srgbClr val="10B981"/>
-                          </a:solidFill>
-                        </a:defRPr>
-                      </a:pPr>
-                      <a:r>
-                        <a:t>PASS (100%)</a:t>
-                      </a:r>
-                    </a:p>
-                  </a:txBody>
-                  <a:tcPr>
-                    <a:solidFill>
-                      <a:srgbClr val="FFFFFF"/>
-                    </a:solidFill>
-                  </a:tcPr>
-                </a:tc>
-              </a:tr>
-              <a:tr h="491490">
-                <a:tc>
-                  <a:txBody>
-                    <a:bodyPr/>
-                    <a:lstStyle/>
-                    <a:p>
-                      <a:pPr>
-                        <a:defRPr sz="819">
-                          <a:solidFill>
-                            <a:srgbClr val="1E293B"/>
-                          </a:solidFill>
-                        </a:defRPr>
-                      </a:pPr>
-                      <a:r>
-                        <a:t>Barcode Palet Cacat di CFS</a:t>
-                      </a:r>
-                    </a:p>
-                  </a:txBody>
-                  <a:tcPr>
-                    <a:solidFill>
-                      <a:srgbClr val="F8FAFC"/>
-                    </a:solidFill>
-                  </a:tcPr>
-                </a:tc>
-                <a:tc>
-                  <a:txBody>
-                    <a:bodyPr/>
-                    <a:lstStyle/>
-                    <a:p>
-                      <a:pPr>
-                        <a:defRPr sz="819">
-                          <a:solidFill>
-                            <a:srgbClr val="1E293B"/>
-                          </a:solidFill>
-                        </a:defRPr>
-                      </a:pPr>
-                      <a:r>
-                        <a:t>GS1 SSCC Gagal Baca</a:t>
-                      </a:r>
-                    </a:p>
-                  </a:txBody>
-                  <a:tcPr>
-                    <a:solidFill>
-                      <a:srgbClr val="F8FAFC"/>
-                    </a:solidFill>
-                  </a:tcPr>
-                </a:tc>
-                <a:tc>
-                  <a:txBody>
-                    <a:bodyPr/>
-                    <a:lstStyle/>
-                    <a:p>
-                      <a:pPr>
-                        <a:defRPr sz="819">
-                          <a:solidFill>
-                            <a:srgbClr val="1E293B"/>
-                          </a:solidFill>
-                        </a:defRPr>
-                      </a:pPr>
-                      <a:r>
-                        <a:t>Scanner gagal -&gt; Trigger tombol Emergency Relabeling &amp; cetak barcode baru</a:t>
-                      </a:r>
-                    </a:p>
-                  </a:txBody>
-                  <a:tcPr>
-                    <a:solidFill>
-                      <a:srgbClr val="F8FAFC"/>
-                    </a:solidFill>
-                  </a:tcPr>
-                </a:tc>
-                <a:tc>
-                  <a:txBody>
-                    <a:bodyPr/>
-                    <a:lstStyle/>
-                    <a:p>
-                      <a:pPr>
-                        <a:defRPr sz="819" b="1">
-                          <a:solidFill>
-                            <a:srgbClr val="10B981"/>
-                          </a:solidFill>
-                        </a:defRPr>
-                      </a:pPr>
-                      <a:r>
-                        <a:t>PASS (100%)</a:t>
-                      </a:r>
-                    </a:p>
-                  </a:txBody>
-                  <a:tcPr>
-                    <a:solidFill>
-                      <a:srgbClr val="F8FAFC"/>
-                    </a:solidFill>
-                  </a:tcPr>
-                </a:tc>
-              </a:tr>
-              <a:tr h="491490">
-                <a:tc>
-                  <a:txBody>
-                    <a:bodyPr/>
-                    <a:lstStyle/>
-                    <a:p>
-                      <a:pPr>
-                        <a:defRPr sz="819">
-                          <a:solidFill>
-                            <a:srgbClr val="1E293B"/>
-                          </a:solidFill>
-                        </a:defRPr>
-                      </a:pPr>
-                      <a:r>
-                        <a:t>Pencegahan Tabrakan Yard</a:t>
-                      </a:r>
-                    </a:p>
-                  </a:txBody>
-                  <a:tcPr>
-                    <a:solidFill>
-                      <a:srgbClr val="FFFFFF"/>
-                    </a:solidFill>
-                  </a:tcPr>
-                </a:tc>
-                <a:tc>
-                  <a:txBody>
-                    <a:bodyPr/>
-                    <a:lstStyle/>
-                    <a:p>
-                      <a:pPr>
-                        <a:defRPr sz="819">
-                          <a:solidFill>
-                            <a:srgbClr val="1E293B"/>
-                          </a:solidFill>
-                        </a:defRPr>
-                      </a:pPr>
-                      <a:r>
-                        <a:t>Anti-Floating Violation</a:t>
-                      </a:r>
-                    </a:p>
-                  </a:txBody>
-                  <a:tcPr>
-                    <a:solidFill>
-                      <a:srgbClr val="FFFFFF"/>
-                    </a:solidFill>
-                  </a:tcPr>
-                </a:tc>
-                <a:tc>
-                  <a:txBody>
-                    <a:bodyPr/>
-                    <a:lstStyle/>
-                    <a:p>
-                      <a:pPr>
-                        <a:defRPr sz="819">
-                          <a:solidFill>
-                            <a:srgbClr val="1E293B"/>
-                          </a:solidFill>
-                        </a:defRPr>
-                      </a:pPr>
-                      <a:r>
-                        <a:t>Sistem tolak perintah taruh boks di Tier 3 tanpa adanya Tier 2 di bawahnya</a:t>
-                      </a:r>
-                    </a:p>
-                  </a:txBody>
-                  <a:tcPr>
-                    <a:solidFill>
-                      <a:srgbClr val="FFFFFF"/>
-                    </a:solidFill>
-                  </a:tcPr>
-                </a:tc>
-                <a:tc>
-                  <a:txBody>
-                    <a:bodyPr/>
-                    <a:lstStyle/>
-                    <a:p>
-                      <a:pPr>
-                        <a:defRPr sz="819" b="1">
-                          <a:solidFill>
-                            <a:srgbClr val="10B981"/>
-                          </a:solidFill>
-                        </a:defRPr>
-                      </a:pPr>
-                      <a:r>
-                        <a:t>PASS (100%)</a:t>
-                      </a:r>
-                    </a:p>
-                  </a:txBody>
-                  <a:tcPr>
-                    <a:solidFill>
-                      <a:srgbClr val="FFFFFF"/>
-                    </a:solidFill>
-                  </a:tcPr>
-                </a:tc>
-              </a:tr>
-              <a:tr h="491490">
-                <a:tc>
-                  <a:txBody>
-                    <a:bodyPr/>
-                    <a:lstStyle/>
-                    <a:p>
-                      <a:pPr>
-                        <a:defRPr sz="819">
-                          <a:solidFill>
-                            <a:srgbClr val="1E293B"/>
-                          </a:solidFill>
-                        </a:defRPr>
-                      </a:pPr>
-                      <a:r>
-                        <a:t>Kontainer Jalur Merah</a:t>
-                      </a:r>
-                    </a:p>
-                  </a:txBody>
-                  <a:tcPr>
-                    <a:solidFill>
-                      <a:srgbClr val="F8FAFC"/>
-                    </a:solidFill>
-                  </a:tcPr>
-                </a:tc>
-                <a:tc>
-                  <a:txBody>
-                    <a:bodyPr/>
-                    <a:lstStyle/>
-                    <a:p>
-                      <a:pPr>
-                        <a:defRPr sz="819">
-                          <a:solidFill>
-                            <a:srgbClr val="1E293B"/>
-                          </a:solidFill>
-                        </a:defRPr>
-                      </a:pPr>
-                      <a:r>
-                        <a:t>Customs Hold Active</a:t>
-                      </a:r>
-                    </a:p>
-                  </a:txBody>
-                  <a:tcPr>
-                    <a:solidFill>
-                      <a:srgbClr val="F8FAFC"/>
-                    </a:solidFill>
-                  </a:tcPr>
-                </a:tc>
-                <a:tc>
-                  <a:txBody>
-                    <a:bodyPr/>
-                    <a:lstStyle/>
-                    <a:p>
-                      <a:pPr>
-                        <a:defRPr sz="819">
-                          <a:solidFill>
-                            <a:srgbClr val="1E293B"/>
-                          </a:solidFill>
-                        </a:defRPr>
-                      </a:pPr>
-                      <a:r>
-                        <a:t>Kontainer dilarang keras Gate-Out sebelum ada rilis resmi SPPB Bea Cukai</a:t>
-                      </a:r>
-                    </a:p>
-                  </a:txBody>
-                  <a:tcPr>
-                    <a:solidFill>
-                      <a:srgbClr val="F8FAFC"/>
-                    </a:solidFill>
-                  </a:tcPr>
-                </a:tc>
-                <a:tc>
-                  <a:txBody>
-                    <a:bodyPr/>
-                    <a:lstStyle/>
-                    <a:p>
-                      <a:pPr>
-                        <a:defRPr sz="819" b="1">
-                          <a:solidFill>
-                            <a:srgbClr val="10B981"/>
-                          </a:solidFill>
-                        </a:defRPr>
-                      </a:pPr>
-                      <a:r>
-                        <a:t>PASS (100%)</a:t>
-                      </a:r>
-                    </a:p>
-                  </a:txBody>
-                  <a:tcPr>
-                    <a:solidFill>
-                      <a:srgbClr val="F8FAFC"/>
-                    </a:solidFill>
-                  </a:tcPr>
-                </a:tc>
-              </a:tr>
-              <a:tr h="491490">
-                <a:tc>
-                  <a:txBody>
-                    <a:bodyPr/>
-                    <a:lstStyle/>
-                    <a:p>
-                      <a:pPr>
-                        <a:defRPr sz="819">
-                          <a:solidFill>
-                            <a:srgbClr val="1E293B"/>
-                          </a:solidFill>
-                        </a:defRPr>
-                      </a:pPr>
-                      <a:r>
-                        <a:t>Kalkulasi Denda Inap</a:t>
-                      </a:r>
-                    </a:p>
-                  </a:txBody>
-                  <a:tcPr>
-                    <a:solidFill>
-                      <a:srgbClr val="FFFFFF"/>
-                    </a:solidFill>
-                  </a:tcPr>
-                </a:tc>
-                <a:tc>
-                  <a:txBody>
-                    <a:bodyPr/>
-                    <a:lstStyle/>
-                    <a:p>
-                      <a:pPr>
-                        <a:defRPr sz="819">
-                          <a:solidFill>
-                            <a:srgbClr val="1E293B"/>
-                          </a:solidFill>
-                        </a:defRPr>
-                      </a:pPr>
-                      <a:r>
-                        <a:t>Event-Driven Billing</a:t>
-                      </a:r>
-                    </a:p>
-                  </a:txBody>
-                  <a:tcPr>
-                    <a:solidFill>
-                      <a:srgbClr val="FFFFFF"/>
-                    </a:solidFill>
-                  </a:tcPr>
-                </a:tc>
-                <a:tc>
-                  <a:txBody>
-                    <a:bodyPr/>
-                    <a:lstStyle/>
-                    <a:p>
-                      <a:pPr>
-                        <a:defRPr sz="819">
-                          <a:solidFill>
-                            <a:srgbClr val="1E293B"/>
-                          </a:solidFill>
-                        </a:defRPr>
-                      </a:pPr>
-                      <a:r>
-                        <a:t>Masa I (Rp 0), Masa II (Rp 45rb), Masa III (Rp 90rb) tertagih tanpa kebocoran</a:t>
-                      </a:r>
-                    </a:p>
-                  </a:txBody>
-                  <a:tcPr>
-                    <a:solidFill>
-                      <a:srgbClr val="FFFFFF"/>
-                    </a:solidFill>
-                  </a:tcPr>
-                </a:tc>
-                <a:tc>
-                  <a:txBody>
-                    <a:bodyPr/>
-                    <a:lstStyle/>
-                    <a:p>
-                      <a:pPr>
-                        <a:defRPr sz="819" b="1">
-                          <a:solidFill>
-                            <a:srgbClr val="10B981"/>
-                          </a:solidFill>
-                        </a:defRPr>
-                      </a:pPr>
-                      <a:r>
-                        <a:t>PASS (100%)</a:t>
-                      </a:r>
-                    </a:p>
-                  </a:txBody>
-                  <a:tcPr>
-                    <a:solidFill>
-                      <a:srgbClr val="FFFFFF"/>
-                    </a:solidFill>
-                  </a:tcPr>
-                </a:tc>
-              </a:tr>
-            </a:tbl>
-          </a:graphicData>
-        </a:graphic>
-      </p:graphicFrame>
-      <p:sp>
-        <p:nvSpPr>
-          <p:cNvPr id="6" name="Rounded Rectangle 5"/>
+              <a:t>Conclusion Supply Chain Consultant  •  Naufal Andika Heditya &amp; Zulfikar J. Fatah  •  Topik 7: CIDP 35 Ha                    Slide 11 of 16</a:t>
+            </a:r>
+          </a:p>
+        </p:txBody>
+      </p:sp>
+      <p:sp>
+        <p:nvSpPr>
+          <p:cNvPr id="5" name="Rounded Rectangle 4"/>
           <p:cNvSpPr/>
           <p:nvPr/>
         </p:nvSpPr>
         <p:spPr>
           <a:xfrm>
-            <a:off x="731520" y="5596128"/>
-            <a:ext cx="10698480" cy="621792"/>
+            <a:off x="731520" y="1508760"/>
+            <a:ext cx="3383280" cy="4160520"/>
           </a:xfrm>
           <a:prstGeom prst="roundRect">
             <a:avLst/>
           </a:prstGeom>
           <a:solidFill>
-            <a:srgbClr val="ECFDF5"/>
+            <a:srgbClr val="FFFFFF"/>
           </a:solidFill>
           <a:ln w="12700">
             <a:solidFill>
-              <a:srgbClr val="10B981"/>
+              <a:srgbClr val="E2E8F0"/>
             </a:solidFill>
           </a:ln>
         </p:spPr>
@@ -5014,15 +4218,386 @@
           <a:bodyPr rtlCol="0" anchor="ctr"/>
           <a:lstStyle/>
           <a:p>
-            <a:pPr algn="ctr">
-              <a:defRPr sz="900" b="1">
-                <a:solidFill>
-                  <a:srgbClr val="065F46"/>
-                </a:solidFill>
-              </a:defRPr>
-            </a:pPr>
-            <a:r>
-              <a:t>PENJAMINAN MUTU NON-FUNGSIONAL: Respon API 85 ms (&lt;150 ms)  •  Siklus Gate 90s (&lt;120s)  •  Zero Revenue Leakage (0% Bocor)  •  QA PASS 100%</a:t>
+            <a:pPr algn="ctr"/>
+          </a:p>
+        </p:txBody>
+      </p:sp>
+      <p:sp>
+        <p:nvSpPr>
+          <p:cNvPr id="6" name="TextBox 5"/>
+          <p:cNvSpPr txBox="1"/>
+          <p:nvPr/>
+        </p:nvSpPr>
+        <p:spPr>
+          <a:xfrm>
+            <a:off x="914400" y="1691640"/>
+            <a:ext cx="3017520" cy="3794760"/>
+          </a:xfrm>
+          <a:prstGeom prst="rect">
+            <a:avLst/>
+          </a:prstGeom>
+          <a:noFill/>
+        </p:spPr>
+        <p:txBody>
+          <a:bodyPr wrap="square">
+            <a:spAutoFit/>
+          </a:bodyPr>
+          <a:lstStyle/>
+          <a:p>
+            <a:pPr>
+              <a:defRPr sz="1100" b="1">
+                <a:solidFill>
+                  <a:srgbClr val="0170B9"/>
+                </a:solidFill>
+              </a:defRPr>
+            </a:pPr>
+            <a:r>
+              <a:t>7.1 DOCK DOOR SCHEDULING</a:t>
+            </a:r>
+          </a:p>
+          <a:p>
+            <a:pPr>
+              <a:spcBef>
+                <a:spcPts val="600"/>
+              </a:spcBef>
+              <a:defRPr sz="880">
+                <a:solidFill>
+                  <a:srgbClr val="1E293B"/>
+                </a:solidFill>
+              </a:defRPr>
+            </a:pPr>
+            <a:r>
+              <a:t>• Penjadwalan Time-Slot Armada:</a:t>
+            </a:r>
+            <a:br/>
+            <a:r>
+              <a:t>  Sistem menjadwalkan kedatangan truk eksternal berdasarkan slot waktu 30 menit (Appointment Window).</a:t>
+            </a:r>
+            <a:br/>
+            <a:br/>
+            <a:r>
+              <a:t>• Tujuan Bisnis:</a:t>
+            </a:r>
+            <a:br/>
+            <a:r>
+              <a:t>  Mencegah penumpukan antrean truk trailer di jalan akses utama dry port.</a:t>
+            </a:r>
+            <a:br/>
+            <a:br/>
+            <a:r>
+              <a:t>• Integrasi Cold Dock Seal:</a:t>
+            </a:r>
+            <a:br/>
+            <a:r>
+              <a:t>  Mengalokasikan dock door khusus yang memiliki kantong kedap udara (inflatable seal) agar hawa dingin gudang tidak terbuang saat truk loading.</a:t>
+            </a:r>
+          </a:p>
+        </p:txBody>
+      </p:sp>
+      <p:sp>
+        <p:nvSpPr>
+          <p:cNvPr id="7" name="Rounded Rectangle 6"/>
+          <p:cNvSpPr/>
+          <p:nvPr/>
+        </p:nvSpPr>
+        <p:spPr>
+          <a:xfrm>
+            <a:off x="4389120" y="1508760"/>
+            <a:ext cx="3383280" cy="4160520"/>
+          </a:xfrm>
+          <a:prstGeom prst="roundRect">
+            <a:avLst/>
+          </a:prstGeom>
+          <a:solidFill>
+            <a:srgbClr val="FFFFFF"/>
+          </a:solidFill>
+          <a:ln w="12700">
+            <a:solidFill>
+              <a:srgbClr val="E2E8F0"/>
+            </a:solidFill>
+          </a:ln>
+        </p:spPr>
+        <p:style>
+          <a:lnRef idx="1">
+            <a:schemeClr val="accent1"/>
+          </a:lnRef>
+          <a:fillRef idx="3">
+            <a:schemeClr val="accent1"/>
+          </a:fillRef>
+          <a:effectRef idx="2">
+            <a:schemeClr val="accent1"/>
+          </a:effectRef>
+          <a:fontRef idx="minor">
+            <a:schemeClr val="lt1"/>
+          </a:fontRef>
+        </p:style>
+        <p:txBody>
+          <a:bodyPr rtlCol="0" anchor="ctr"/>
+          <a:lstStyle/>
+          <a:p>
+            <a:pPr algn="ctr"/>
+          </a:p>
+        </p:txBody>
+      </p:sp>
+      <p:sp>
+        <p:nvSpPr>
+          <p:cNvPr id="8" name="TextBox 7"/>
+          <p:cNvSpPr txBox="1"/>
+          <p:nvPr/>
+        </p:nvSpPr>
+        <p:spPr>
+          <a:xfrm>
+            <a:off x="4572000" y="1691640"/>
+            <a:ext cx="3017520" cy="3794760"/>
+          </a:xfrm>
+          <a:prstGeom prst="rect">
+            <a:avLst/>
+          </a:prstGeom>
+          <a:noFill/>
+        </p:spPr>
+        <p:txBody>
+          <a:bodyPr wrap="square">
+            <a:spAutoFit/>
+          </a:bodyPr>
+          <a:lstStyle/>
+          <a:p>
+            <a:pPr>
+              <a:defRPr sz="1100" b="1">
+                <a:solidFill>
+                  <a:srgbClr val="002F5E"/>
+                </a:solidFill>
+              </a:defRPr>
+            </a:pPr>
+            <a:r>
+              <a:t>7.2 TRAILER POSITION TRACKING</a:t>
+            </a:r>
+          </a:p>
+          <a:p>
+            <a:pPr>
+              <a:spcBef>
+                <a:spcPts val="600"/>
+              </a:spcBef>
+              <a:defRPr sz="880">
+                <a:solidFill>
+                  <a:srgbClr val="1E293B"/>
+                </a:solidFill>
+              </a:defRPr>
+            </a:pPr>
+            <a:r>
+              <a:t>• Visual Yard Map Real-Time:</a:t>
+            </a:r>
+            <a:br/>
+            <a:r>
+              <a:t>  Pemetaan grafis seluruh blok lapangan penumpukan 35 Ha.</a:t>
+            </a:r>
+            <a:br/>
+            <a:br/>
+            <a:r>
+              <a:t>• Status Peti Kemas:</a:t>
+            </a:r>
+            <a:br/>
+            <a:r>
+              <a:t>  - EMPTY (Kosong)</a:t>
+            </a:r>
+            <a:br/>
+            <a:r>
+              <a:t>  - LADEN (Terisi Penuh)</a:t>
+            </a:r>
+            <a:br/>
+            <a:r>
+              <a:t>  - IN_STRIPPING (Bongkar Muat)</a:t>
+            </a:r>
+            <a:br/>
+            <a:r>
+              <a:t>  - CUSTOMS_HOLD (Karantina Bea Cukai)</a:t>
+            </a:r>
+            <a:br/>
+            <a:br/>
+            <a:r>
+              <a:t>• Keterlacakan Posisi:</a:t>
+            </a:r>
+            <a:br/>
+            <a:r>
+              <a:t>  Setiap pergerakan oleh RTG Crane atau Reach Stacker langsung memperbarui database YMS via integrasi VMT WiFi 6 terminal.</a:t>
+            </a:r>
+          </a:p>
+        </p:txBody>
+      </p:sp>
+      <p:sp>
+        <p:nvSpPr>
+          <p:cNvPr id="9" name="Rounded Rectangle 8"/>
+          <p:cNvSpPr/>
+          <p:nvPr/>
+        </p:nvSpPr>
+        <p:spPr>
+          <a:xfrm>
+            <a:off x="8046720" y="1508760"/>
+            <a:ext cx="3383280" cy="4160520"/>
+          </a:xfrm>
+          <a:prstGeom prst="roundRect">
+            <a:avLst/>
+          </a:prstGeom>
+          <a:solidFill>
+            <a:srgbClr val="FFFFFF"/>
+          </a:solidFill>
+          <a:ln w="12700">
+            <a:solidFill>
+              <a:srgbClr val="E2E8F0"/>
+            </a:solidFill>
+          </a:ln>
+        </p:spPr>
+        <p:style>
+          <a:lnRef idx="1">
+            <a:schemeClr val="accent1"/>
+          </a:lnRef>
+          <a:fillRef idx="3">
+            <a:schemeClr val="accent1"/>
+          </a:fillRef>
+          <a:effectRef idx="2">
+            <a:schemeClr val="accent1"/>
+          </a:effectRef>
+          <a:fontRef idx="minor">
+            <a:schemeClr val="lt1"/>
+          </a:fontRef>
+        </p:style>
+        <p:txBody>
+          <a:bodyPr rtlCol="0" anchor="ctr"/>
+          <a:lstStyle/>
+          <a:p>
+            <a:pPr algn="ctr"/>
+          </a:p>
+        </p:txBody>
+      </p:sp>
+      <p:sp>
+        <p:nvSpPr>
+          <p:cNvPr id="10" name="TextBox 9"/>
+          <p:cNvSpPr txBox="1"/>
+          <p:nvPr/>
+        </p:nvSpPr>
+        <p:spPr>
+          <a:xfrm>
+            <a:off x="8229600" y="1691640"/>
+            <a:ext cx="3017520" cy="3794760"/>
+          </a:xfrm>
+          <a:prstGeom prst="rect">
+            <a:avLst/>
+          </a:prstGeom>
+          <a:noFill/>
+        </p:spPr>
+        <p:txBody>
+          <a:bodyPr wrap="square">
+            <a:spAutoFit/>
+          </a:bodyPr>
+          <a:lstStyle/>
+          <a:p>
+            <a:pPr>
+              <a:defRPr sz="1100" b="1">
+                <a:solidFill>
+                  <a:srgbClr val="10B981"/>
+                </a:solidFill>
+              </a:defRPr>
+            </a:pPr>
+            <a:r>
+              <a:t>7.3 GATE &amp; DEMURRAGE ALERT</a:t>
+            </a:r>
+          </a:p>
+          <a:p>
+            <a:pPr>
+              <a:spcBef>
+                <a:spcPts val="600"/>
+              </a:spcBef>
+              <a:defRPr sz="880">
+                <a:solidFill>
+                  <a:srgbClr val="1E293B"/>
+                </a:solidFill>
+              </a:defRPr>
+            </a:pPr>
+            <a:r>
+              <a:t>• Otomasi Pencatatan Gate:</a:t>
+            </a:r>
+            <a:br/>
+            <a:r>
+              <a:t>  Timestamp gate-in dan gate-out tercatat otomatis presisi ke milidetik.</a:t>
+            </a:r>
+            <a:br/>
+            <a:br/>
+            <a:r>
+              <a:t>• Dwelling Time Rule:</a:t>
+            </a:r>
+            <a:br/>
+            <a:r>
+              <a:t>  - Batas Bebas (Free Time) = 3 Hari.</a:t>
+            </a:r>
+            <a:br/>
+            <a:r>
+              <a:t>  - Hari ke-4 s/d 7 = Rp 250.000/hari.</a:t>
+            </a:r>
+            <a:br/>
+            <a:r>
+              <a:t>  - Hari ke-8 ke atas = Rp 500.000/hari.</a:t>
+            </a:r>
+            <a:br/>
+            <a:br/>
+            <a:r>
+              <a:t>• Alert Notifikasi Otomatis:</a:t>
+            </a:r>
+            <a:br/>
+            <a:r>
+              <a:t>  Sistem mengirim peringatan dini (Early Warning) ke Shipper pada Hari ke-2 bahwa free time akan berakhir, mendorong percepatan pengambilan barang.</a:t>
+            </a:r>
+          </a:p>
+        </p:txBody>
+      </p:sp>
+      <p:sp>
+        <p:nvSpPr>
+          <p:cNvPr id="11" name="Rounded Rectangle 10"/>
+          <p:cNvSpPr/>
+          <p:nvPr/>
+        </p:nvSpPr>
+        <p:spPr>
+          <a:xfrm>
+            <a:off x="731520" y="5852160"/>
+            <a:ext cx="10698480" cy="438912"/>
+          </a:xfrm>
+          <a:prstGeom prst="roundRect">
+            <a:avLst/>
+          </a:prstGeom>
+          <a:solidFill>
+            <a:srgbClr val="FEF3C7"/>
+          </a:solidFill>
+          <a:ln w="12700">
+            <a:solidFill>
+              <a:srgbClr val="F59E0B"/>
+            </a:solidFill>
+          </a:ln>
+        </p:spPr>
+        <p:style>
+          <a:lnRef idx="1">
+            <a:schemeClr val="accent1"/>
+          </a:lnRef>
+          <a:fillRef idx="3">
+            <a:schemeClr val="accent1"/>
+          </a:fillRef>
+          <a:effectRef idx="2">
+            <a:schemeClr val="accent1"/>
+          </a:effectRef>
+          <a:fontRef idx="minor">
+            <a:schemeClr val="lt1"/>
+          </a:fontRef>
+        </p:style>
+        <p:txBody>
+          <a:bodyPr rtlCol="0" anchor="ctr" wrap="square"/>
+          <a:lstStyle/>
+          <a:p>
+            <a:pPr algn="l">
+              <a:defRPr sz="950" b="1">
+                <a:solidFill>
+                  <a:srgbClr val="B45309"/>
+                </a:solidFill>
+              </a:defRPr>
+            </a:pPr>
+            <a:r>
+              <a:t>👉  [LIVE DEMO]: Buka Halaman Billing (pages/billing.php) untuk melihat simulasi kalkulasi demurrage progresif.</a:t>
             </a:r>
           </a:p>
         </p:txBody>
@@ -5054,7 +4629,7 @@
         <p:spPr>
           <a:xfrm>
             <a:off x="731520" y="256032"/>
-            <a:ext cx="7498079" cy="1051560"/>
+            <a:ext cx="7772400" cy="1051560"/>
           </a:xfrm>
           <a:prstGeom prst="rect">
             <a:avLst/>
@@ -5090,7 +4665,7 @@
               </a:defRPr>
             </a:pPr>
             <a:r>
-              <a:t>Kesimpulan Eksekutif Business Analyst &amp; Rekomendasi Konsultan</a:t>
+              <a:t>Fitur TMS Transportation &amp; Rel Siding Kereta Api Intermodal 600M (Bab 6 &amp; 8)</a:t>
             </a:r>
           </a:p>
         </p:txBody>
@@ -5103,8 +4678,8 @@
         </p:nvSpPr>
         <p:spPr>
           <a:xfrm>
-            <a:off x="8321040" y="237744"/>
-            <a:ext cx="3108960" cy="932688"/>
+            <a:off x="8412480" y="237744"/>
+            <a:ext cx="3017520" cy="932688"/>
           </a:xfrm>
           <a:prstGeom prst="roundRect">
             <a:avLst/>
@@ -5159,7 +4734,7 @@
               </a:defRPr>
             </a:pPr>
             <a:r>
-              <a:t>dashboard.php (Integrated Portal)</a:t>
+              <a:t>dashboard.php?page=trucking</a:t>
             </a:r>
           </a:p>
           <a:p>
@@ -5174,7 +4749,7 @@
               </a:defRPr>
             </a:pPr>
             <a:r>
-              <a:t>http://localhost/Conclusion_Intermodal_Dry_Port/</a:t>
+              <a:t>http://localhost/.../trucking.php</a:t>
             </a:r>
           </a:p>
         </p:txBody>
@@ -5209,7 +4784,7 @@
               </a:defRPr>
             </a:pPr>
             <a:r>
-              <a:t>Conclusion Supply Chain Consultant  •  Naufal Andika Heditya &amp; Zulfikar J. Fatah  •  Topik 7: CIDP 35 Ha                    Slide 12 of 12</a:t>
+              <a:t>Conclusion Supply Chain Consultant  •  Naufal Andika Heditya &amp; Zulfikar J. Fatah  •  Topik 7: CIDP 35 Ha                    Slide 12 of 16</a:t>
             </a:r>
           </a:p>
         </p:txBody>
@@ -5223,7 +4798,7 @@
         <p:spPr>
           <a:xfrm>
             <a:off x="731520" y="1508760"/>
-            <a:ext cx="2514600" cy="3108960"/>
+            <a:ext cx="5212080" cy="4160520"/>
           </a:xfrm>
           <a:prstGeom prst="roundRect">
             <a:avLst/>
@@ -5267,8 +4842,8 @@
         </p:nvSpPr>
         <p:spPr>
           <a:xfrm>
-            <a:off x="841248" y="1691640"/>
-            <a:ext cx="2295144" cy="2743200"/>
+            <a:off x="914400" y="1691640"/>
+            <a:ext cx="4846320" cy="3794760"/>
           </a:xfrm>
           <a:prstGeom prst="rect">
             <a:avLst/>
@@ -5282,56 +4857,69 @@
           <a:lstStyle/>
           <a:p>
             <a:pPr>
-              <a:defRPr sz="850" b="1">
+              <a:defRPr sz="1100" b="1">
                 <a:solidFill>
                   <a:srgbClr val="0170B9"/>
                 </a:solidFill>
               </a:defRPr>
             </a:pPr>
             <a:r>
-              <a:t>1. KELAYAKAN FINANSIAL</a:t>
+              <a:t>1. FITUR TMS PLANNING &amp; EXECUTION</a:t>
             </a:r>
           </a:p>
           <a:p>
             <a:pPr>
               <a:spcBef>
-                <a:spcPts val="200"/>
+                <a:spcPts val="600"/>
               </a:spcBef>
-              <a:defRPr sz="1300" b="1">
-                <a:solidFill>
-                  <a:srgbClr val="002F5E"/>
-                </a:solidFill>
-              </a:defRPr>
-            </a:pPr>
-            <a:r>
-              <a:t>Balik Modal 5.8 Tahun</a:t>
-            </a:r>
-          </a:p>
-          <a:p>
-            <a:pPr>
-              <a:spcBef>
-                <a:spcPts val="400"/>
-              </a:spcBef>
-              <a:defRPr sz="800">
+              <a:defRPr sz="880">
                 <a:solidFill>
                   <a:srgbClr val="1E293B"/>
                 </a:solidFill>
               </a:defRPr>
             </a:pPr>
             <a:r>
-              <a:t>• CAPEX Rp 250 M lunas dalam 5,84 tahun.</a:t>
-            </a:r>
-            <a:br/>
-            <a:r>
-              <a:t>• Net Profit Rp 30,2 M/thn.</a:t>
-            </a:r>
-            <a:br/>
-            <a:r>
-              <a:t>• NPV Positif +Rp 22,9 Miliar.</a:t>
-            </a:r>
-            <a:br/>
-            <a:r>
-              <a:t>• IRR 11,90% di atas bunga bank 8,5%.</a:t>
+              <a:t>• 6.1 Dynamic Route Optimization Engine:</a:t>
+            </a:r>
+            <a:br/>
+            <a:r>
+              <a:t>  Algoritma rute terpendek dengan memperhitungkan kemacetan, jam operasional ganjil-genap, dan kelas jalan tonase.</a:t>
+            </a:r>
+            <a:br/>
+            <a:br/>
+            <a:r>
+              <a:t>• 6.2 3D Load Planning &amp; Consolidation:</a:t>
+            </a:r>
+            <a:br/>
+            <a:r>
+              <a:t>  Simulasi tata letak kubikasi kargo di bak truk untuk memaksimalkan Cubic Utilization hingga 92%.</a:t>
+            </a:r>
+            <a:br/>
+            <a:br/>
+            <a:r>
+              <a:t>• 6.3 Carrier Rate Audit &amp; Settlement:</a:t>
+            </a:r>
+            <a:br/>
+            <a:r>
+              <a:t>  Audit otomatis biaya pengiriman vendor pihak ketiga berdasarkan matriks tarif jarak dan zona wilayah.</a:t>
+            </a:r>
+            <a:br/>
+            <a:br/>
+            <a:r>
+              <a:t>• 8.1 Real-Time GPS Tracking &amp; Geofencing:</a:t>
+            </a:r>
+            <a:br/>
+            <a:r>
+              <a:t>  Pemantauan rute armada truk. Notifikasi instan jika supir keluar rute resmi atau berhenti &gt; 45 menit tanpa izin.</a:t>
+            </a:r>
+            <a:br/>
+            <a:br/>
+            <a:r>
+              <a:t>• 8.2 Driver Mobile App &amp; e-POD:</a:t>
+            </a:r>
+            <a:br/>
+            <a:r>
+              <a:t>  Bukti serah terima digital: Foto barang, TTD digital, &amp; GPS timestamp.</a:t>
             </a:r>
           </a:p>
         </p:txBody>
@@ -5344,8 +4932,8 @@
         </p:nvSpPr>
         <p:spPr>
           <a:xfrm>
-            <a:off x="3456432" y="1508760"/>
-            <a:ext cx="2514600" cy="3108960"/>
+            <a:off x="6217920" y="1508760"/>
+            <a:ext cx="5212080" cy="4160520"/>
           </a:xfrm>
           <a:prstGeom prst="roundRect">
             <a:avLst/>
@@ -5389,8 +4977,8 @@
         </p:nvSpPr>
         <p:spPr>
           <a:xfrm>
-            <a:off x="3566160" y="1691640"/>
-            <a:ext cx="2295144" cy="2743200"/>
+            <a:off x="6400800" y="1691640"/>
+            <a:ext cx="4846320" cy="3794760"/>
           </a:xfrm>
           <a:prstGeom prst="rect">
             <a:avLst/>
@@ -5404,14 +4992,174 @@
           <a:lstStyle/>
           <a:p>
             <a:pPr>
+              <a:defRPr sz="1100" b="1">
+                <a:solidFill>
+                  <a:srgbClr val="002F5E"/>
+                </a:solidFill>
+              </a:defRPr>
+            </a:pPr>
+            <a:r>
+              <a:t>2. REL SIDING KERETA API 600M (INTERMODAL)</a:t>
+            </a:r>
+          </a:p>
+          <a:p>
+            <a:pPr>
+              <a:spcBef>
+                <a:spcPts val="600"/>
+              </a:spcBef>
+              <a:defRPr sz="880">
+                <a:solidFill>
+                  <a:srgbClr val="1E293B"/>
+                </a:solidFill>
+              </a:defRPr>
+            </a:pPr>
+            <a:r>
+              <a:t>• Kapasitas Rel Siding CIDP:</a:t>
+            </a:r>
+            <a:br/>
+            <a:r>
+              <a:t>  Panjang jalur 600 meter melayani 1 rangkaian lokomotif KAI Logistik bermuatan 30 gerbong datar (flatcar) atau 60 TEUs.</a:t>
+            </a:r>
+            <a:br/>
+            <a:br/>
+            <a:r>
+              <a:t>• Sinkronisasi Transshipment Kereta Api:</a:t>
+            </a:r>
+            <a:br/>
+            <a:r>
+              <a:t>  - TMS &amp; YMS bertukar data manifest KA sebelum kedatangan.</a:t>
+            </a:r>
+            <a:br/>
+            <a:r>
+              <a:t>  - Crane Pengangkat: RMG Crane 45 Ton / Reach Stacker Intermodal.</a:t>
+            </a:r>
+            <a:br/>
+            <a:r>
+              <a:t>  - Waktu Bongkar Muat: Target &lt; 4 menit per peti kemas.</a:t>
+            </a:r>
+            <a:br/>
+            <a:br/>
+            <a:r>
+              <a:t>• Keunggulan Moda Kereta Api vs Truk Jalan Raya:</a:t>
+            </a:r>
+            <a:br/>
+            <a:r>
+              <a:t>  - Efisiensi Biaya Bahan Bakar: Menghemat hingga 40% vs trucking jalan raya.</a:t>
+            </a:r>
+            <a:br/>
+            <a:r>
+              <a:t>  - Bebas Macet Tol Cikampek / Pantura: Kepastian waktu tiba (On-Time Delivery &gt; 98%).</a:t>
+            </a:r>
+            <a:br/>
+            <a:r>
+              <a:t>  - Ramah Lingkungan (Green Logistics): Menurunkan jejak karbon terminal hingga 65%.</a:t>
+            </a:r>
+          </a:p>
+        </p:txBody>
+      </p:sp>
+      <p:sp>
+        <p:nvSpPr>
+          <p:cNvPr id="9" name="Rounded Rectangle 8"/>
+          <p:cNvSpPr/>
+          <p:nvPr/>
+        </p:nvSpPr>
+        <p:spPr>
+          <a:xfrm>
+            <a:off x="731520" y="5852160"/>
+            <a:ext cx="10698480" cy="438912"/>
+          </a:xfrm>
+          <a:prstGeom prst="roundRect">
+            <a:avLst/>
+          </a:prstGeom>
+          <a:solidFill>
+            <a:srgbClr val="FEF3C7"/>
+          </a:solidFill>
+          <a:ln w="12700">
+            <a:solidFill>
+              <a:srgbClr val="F59E0B"/>
+            </a:solidFill>
+          </a:ln>
+        </p:spPr>
+        <p:style>
+          <a:lnRef idx="1">
+            <a:schemeClr val="accent1"/>
+          </a:lnRef>
+          <a:fillRef idx="3">
+            <a:schemeClr val="accent1"/>
+          </a:fillRef>
+          <a:effectRef idx="2">
+            <a:schemeClr val="accent1"/>
+          </a:effectRef>
+          <a:fontRef idx="minor">
+            <a:schemeClr val="lt1"/>
+          </a:fontRef>
+        </p:style>
+        <p:txBody>
+          <a:bodyPr rtlCol="0" anchor="ctr" wrap="square"/>
+          <a:lstStyle/>
+          <a:p>
+            <a:pPr algn="l">
+              <a:defRPr sz="950" b="1">
+                <a:solidFill>
+                  <a:srgbClr val="B45309"/>
+                </a:solidFill>
+              </a:defRPr>
+            </a:pPr>
+            <a:r>
+              <a:t>👉  [LIVE DEMO]: Buka Halaman Intermodal (pages/intermodal.php) &amp; Trucking (pages/trucking.php).</a:t>
+            </a:r>
+          </a:p>
+        </p:txBody>
+      </p:sp>
+    </p:spTree>
+  </p:cSld>
+  <p:clrMapOvr>
+    <a:masterClrMapping/>
+  </p:clrMapOvr>
+</p:sld>
+</file>
+
+<file path=ppt/slides/slide13.xml><?xml version="1.0" encoding="utf-8"?>
+<p:sld xmlns:a="http://schemas.openxmlformats.org/drawingml/2006/main" xmlns:p="http://schemas.openxmlformats.org/presentationml/2006/main" xmlns:r="http://schemas.openxmlformats.org/officeDocument/2006/relationships">
+  <p:cSld>
+    <p:spTree>
+      <p:nvGrpSpPr>
+        <p:cNvPr id="1" name=""/>
+        <p:cNvGrpSpPr/>
+        <p:nvPr/>
+      </p:nvGrpSpPr>
+      <p:grpSpPr/>
+      <p:sp>
+        <p:nvSpPr>
+          <p:cNvPr id="2" name="TextBox 1"/>
+          <p:cNvSpPr txBox="1"/>
+          <p:nvPr/>
+        </p:nvSpPr>
+        <p:spPr>
+          <a:xfrm>
+            <a:off x="731520" y="256032"/>
+            <a:ext cx="7772400" cy="1051560"/>
+          </a:xfrm>
+          <a:prstGeom prst="rect">
+            <a:avLst/>
+          </a:prstGeom>
+          <a:noFill/>
+        </p:spPr>
+        <p:txBody>
+          <a:bodyPr wrap="square" lIns="0" tIns="0" rIns="0" bIns="0">
+            <a:spAutoFit/>
+          </a:bodyPr>
+          <a:lstStyle/>
+          <a:p>
+            <a:pPr>
               <a:defRPr sz="850" b="1">
                 <a:solidFill>
-                  <a:srgbClr val="6366F1"/>
-                </a:solidFill>
-              </a:defRPr>
-            </a:pPr>
-            <a:r>
-              <a:t>2. EFISIENSI PROSES (BPR)</a:t>
+                  <a:srgbClr val="0170B9"/>
+                </a:solidFill>
+              </a:defRPr>
+            </a:pPr>
+            <a:r>
+              <a:t>CONCLUSION SUPPLY CHAIN CONSULTANT — STRATEGIC BUSINESS BLUEPRINT</a:t>
             </a:r>
           </a:p>
           <a:p>
@@ -5419,51 +5167,1223 @@
               <a:spcBef>
                 <a:spcPts val="200"/>
               </a:spcBef>
-              <a:defRPr sz="1300" b="1">
+              <a:defRPr sz="1650" b="1">
                 <a:solidFill>
                   <a:srgbClr val="002F5E"/>
                 </a:solidFill>
               </a:defRPr>
             </a:pPr>
             <a:r>
-              <a:t>Dwell Time Pangkas 66%</a:t>
-            </a:r>
-          </a:p>
-          <a:p>
-            <a:pPr>
-              <a:spcBef>
-                <a:spcPts val="400"/>
-              </a:spcBef>
-              <a:defRPr sz="800">
-                <a:solidFill>
-                  <a:srgbClr val="1E293B"/>
-                </a:solidFill>
-              </a:defRPr>
-            </a:pPr>
-            <a:r>
-              <a:t>• Waktu gate turun 15 mnt -&gt; 90 detik.</a:t>
-            </a:r>
-            <a:br/>
-            <a:r>
-              <a:t>• Dwell time turun 6,8 -&gt; 2,3 hari.</a:t>
-            </a:r>
-            <a:br/>
-            <a:r>
-              <a:t>• Eliminasi 100% box terselip via alokasi 3D Bay-Row-Tier.</a:t>
-            </a:r>
-          </a:p>
-        </p:txBody>
-      </p:sp>
-      <p:sp>
-        <p:nvSpPr>
-          <p:cNvPr id="9" name="Rounded Rectangle 8"/>
+              <a:t>Flowchart 4: Alur Integrasi 5 Modul Logistik Terpadu (Bab 12, 13, &amp; 14)</a:t>
+            </a:r>
+          </a:p>
+        </p:txBody>
+      </p:sp>
+      <p:sp>
+        <p:nvSpPr>
+          <p:cNvPr id="3" name="Rounded Rectangle 2"/>
           <p:cNvSpPr/>
           <p:nvPr/>
         </p:nvSpPr>
         <p:spPr>
           <a:xfrm>
-            <a:off x="6181344" y="1508760"/>
-            <a:ext cx="2514600" cy="3108960"/>
+            <a:off x="8412480" y="237744"/>
+            <a:ext cx="3017520" cy="932688"/>
+          </a:xfrm>
+          <a:prstGeom prst="roundRect">
+            <a:avLst/>
+          </a:prstGeom>
+          <a:solidFill>
+            <a:srgbClr val="EFF6FF"/>
+          </a:solidFill>
+          <a:ln w="12700">
+            <a:solidFill>
+              <a:srgbClr val="0170B9"/>
+            </a:solidFill>
+          </a:ln>
+        </p:spPr>
+        <p:style>
+          <a:lnRef idx="1">
+            <a:schemeClr val="accent1"/>
+          </a:lnRef>
+          <a:fillRef idx="3">
+            <a:schemeClr val="accent1"/>
+          </a:fillRef>
+          <a:effectRef idx="2">
+            <a:schemeClr val="accent1"/>
+          </a:effectRef>
+          <a:fontRef idx="minor">
+            <a:schemeClr val="lt1"/>
+          </a:fontRef>
+        </p:style>
+        <p:txBody>
+          <a:bodyPr rtlCol="0" anchor="ctr" wrap="square" lIns="109728" rIns="109728" tIns="73152" bIns="73152"/>
+          <a:lstStyle/>
+          <a:p>
+            <a:pPr algn="ctr">
+              <a:defRPr sz="750" b="1">
+                <a:solidFill>
+                  <a:srgbClr val="0170B9"/>
+                </a:solidFill>
+              </a:defRPr>
+            </a:pPr>
+            <a:r>
+              <a:t>🌐 HALAMAN WEB / LIVE DEMO</a:t>
+            </a:r>
+          </a:p>
+          <a:p>
+            <a:pPr>
+              <a:spcBef>
+                <a:spcPts val="100"/>
+              </a:spcBef>
+              <a:defRPr sz="950" b="1">
+                <a:solidFill>
+                  <a:srgbClr val="002F5E"/>
+                </a:solidFill>
+              </a:defRPr>
+            </a:pPr>
+            <a:r>
+              <a:t>dashboard.php</a:t>
+            </a:r>
+          </a:p>
+          <a:p>
+            <a:pPr>
+              <a:spcBef>
+                <a:spcPts val="100"/>
+              </a:spcBef>
+              <a:defRPr sz="700" i="1">
+                <a:solidFill>
+                  <a:srgbClr val="64748B"/>
+                </a:solidFill>
+              </a:defRPr>
+            </a:pPr>
+            <a:r>
+              <a:t>http://localhost/.../dashboard.php</a:t>
+            </a:r>
+          </a:p>
+        </p:txBody>
+      </p:sp>
+      <p:sp>
+        <p:nvSpPr>
+          <p:cNvPr id="4" name="TextBox 3"/>
+          <p:cNvSpPr txBox="1"/>
+          <p:nvPr/>
+        </p:nvSpPr>
+        <p:spPr>
+          <a:xfrm>
+            <a:off x="731520" y="6446520"/>
+            <a:ext cx="10698480" cy="320040"/>
+          </a:xfrm>
+          <a:prstGeom prst="rect">
+            <a:avLst/>
+          </a:prstGeom>
+          <a:noFill/>
+        </p:spPr>
+        <p:txBody>
+          <a:bodyPr wrap="square" lIns="0" tIns="0" rIns="0" bIns="0">
+            <a:spAutoFit/>
+          </a:bodyPr>
+          <a:lstStyle/>
+          <a:p>
+            <a:pPr>
+              <a:defRPr sz="850">
+                <a:solidFill>
+                  <a:srgbClr val="64748B"/>
+                </a:solidFill>
+              </a:defRPr>
+            </a:pPr>
+            <a:r>
+              <a:t>Conclusion Supply Chain Consultant  •  Naufal Andika Heditya &amp; Zulfikar J. Fatah  •  Topik 7: CIDP 35 Ha                    Slide 13 of 16</a:t>
+            </a:r>
+          </a:p>
+        </p:txBody>
+      </p:sp>
+      <p:pic>
+        <p:nvPicPr>
+          <p:cNvPr id="5" name="Picture 4" descr="FLOWCHART_INTEGRASI_5_MODUL_LOGISTIK.jpg"/>
+          <p:cNvPicPr>
+            <a:picLocks noChangeAspect="1"/>
+          </p:cNvPicPr>
+          <p:nvPr/>
+        </p:nvPicPr>
+        <p:blipFill>
+          <a:blip r:embed="rId2"/>
+          <a:stretch>
+            <a:fillRect/>
+          </a:stretch>
+        </p:blipFill>
+        <p:spPr>
+          <a:xfrm>
+            <a:off x="731520" y="1417320"/>
+            <a:ext cx="10698480" cy="4343400"/>
+          </a:xfrm>
+          <a:prstGeom prst="rect">
+            <a:avLst/>
+          </a:prstGeom>
+        </p:spPr>
+      </p:pic>
+      <p:sp>
+        <p:nvSpPr>
+          <p:cNvPr id="6" name="Rounded Rectangle 5"/>
+          <p:cNvSpPr/>
+          <p:nvPr/>
+        </p:nvSpPr>
+        <p:spPr>
+          <a:xfrm>
+            <a:off x="731520" y="5852160"/>
+            <a:ext cx="10698480" cy="438912"/>
+          </a:xfrm>
+          <a:prstGeom prst="roundRect">
+            <a:avLst/>
+          </a:prstGeom>
+          <a:solidFill>
+            <a:srgbClr val="FEF3C7"/>
+          </a:solidFill>
+          <a:ln w="12700">
+            <a:solidFill>
+              <a:srgbClr val="F59E0B"/>
+            </a:solidFill>
+          </a:ln>
+        </p:spPr>
+        <p:style>
+          <a:lnRef idx="1">
+            <a:schemeClr val="accent1"/>
+          </a:lnRef>
+          <a:fillRef idx="3">
+            <a:schemeClr val="accent1"/>
+          </a:fillRef>
+          <a:effectRef idx="2">
+            <a:schemeClr val="accent1"/>
+          </a:effectRef>
+          <a:fontRef idx="minor">
+            <a:schemeClr val="lt1"/>
+          </a:fontRef>
+        </p:style>
+        <p:txBody>
+          <a:bodyPr rtlCol="0" anchor="ctr" wrap="square"/>
+          <a:lstStyle/>
+          <a:p>
+            <a:pPr algn="l">
+              <a:defRPr sz="950" b="1">
+                <a:solidFill>
+                  <a:srgbClr val="B45309"/>
+                </a:solidFill>
+              </a:defRPr>
+            </a:pPr>
+            <a:r>
+              <a:t>👉  Standar Silabus Bab 12 &amp; 13: ERP (SO) -&gt; WMS (Cold Zone) -&gt; WCS (AS/RS Scale) -&gt; YMS (Dock) -&gt; TMS (Fleet) -&gt; Invoicing.</a:t>
+            </a:r>
+          </a:p>
+        </p:txBody>
+      </p:sp>
+    </p:spTree>
+  </p:cSld>
+  <p:clrMapOvr>
+    <a:masterClrMapping/>
+  </p:clrMapOvr>
+</p:sld>
+</file>
+
+<file path=ppt/slides/slide14.xml><?xml version="1.0" encoding="utf-8"?>
+<p:sld xmlns:a="http://schemas.openxmlformats.org/drawingml/2006/main" xmlns:p="http://schemas.openxmlformats.org/presentationml/2006/main" xmlns:r="http://schemas.openxmlformats.org/officeDocument/2006/relationships">
+  <p:cSld>
+    <p:spTree>
+      <p:nvGrpSpPr>
+        <p:cNvPr id="1" name=""/>
+        <p:cNvGrpSpPr/>
+        <p:nvPr/>
+      </p:nvGrpSpPr>
+      <p:grpSpPr/>
+      <p:sp>
+        <p:nvSpPr>
+          <p:cNvPr id="2" name="TextBox 1"/>
+          <p:cNvSpPr txBox="1"/>
+          <p:nvPr/>
+        </p:nvSpPr>
+        <p:spPr>
+          <a:xfrm>
+            <a:off x="731520" y="256032"/>
+            <a:ext cx="7772400" cy="1051560"/>
+          </a:xfrm>
+          <a:prstGeom prst="rect">
+            <a:avLst/>
+          </a:prstGeom>
+          <a:noFill/>
+        </p:spPr>
+        <p:txBody>
+          <a:bodyPr wrap="square" lIns="0" tIns="0" rIns="0" bIns="0">
+            <a:spAutoFit/>
+          </a:bodyPr>
+          <a:lstStyle/>
+          <a:p>
+            <a:pPr>
+              <a:defRPr sz="850" b="1">
+                <a:solidFill>
+                  <a:srgbClr val="0170B9"/>
+                </a:solidFill>
+              </a:defRPr>
+            </a:pPr>
+            <a:r>
+              <a:t>CONCLUSION SUPPLY CHAIN CONSULTANT — STRATEGIC BUSINESS BLUEPRINT</a:t>
+            </a:r>
+          </a:p>
+          <a:p>
+            <a:pPr>
+              <a:spcBef>
+                <a:spcPts val="200"/>
+              </a:spcBef>
+              <a:defRPr sz="1650" b="1">
+                <a:solidFill>
+                  <a:srgbClr val="002F5E"/>
+                </a:solidFill>
+              </a:defRPr>
+            </a:pPr>
+            <a:r>
+              <a:t>Menjawab Dilemma: Di Mana Ditaruhnya &amp; Konsepnya di Aplikasi Web CIDP?</a:t>
+            </a:r>
+          </a:p>
+        </p:txBody>
+      </p:sp>
+      <p:sp>
+        <p:nvSpPr>
+          <p:cNvPr id="3" name="Rounded Rectangle 2"/>
+          <p:cNvSpPr/>
+          <p:nvPr/>
+        </p:nvSpPr>
+        <p:spPr>
+          <a:xfrm>
+            <a:off x="8412480" y="237744"/>
+            <a:ext cx="3017520" cy="932688"/>
+          </a:xfrm>
+          <a:prstGeom prst="roundRect">
+            <a:avLst/>
+          </a:prstGeom>
+          <a:solidFill>
+            <a:srgbClr val="EFF6FF"/>
+          </a:solidFill>
+          <a:ln w="12700">
+            <a:solidFill>
+              <a:srgbClr val="0170B9"/>
+            </a:solidFill>
+          </a:ln>
+        </p:spPr>
+        <p:style>
+          <a:lnRef idx="1">
+            <a:schemeClr val="accent1"/>
+          </a:lnRef>
+          <a:fillRef idx="3">
+            <a:schemeClr val="accent1"/>
+          </a:fillRef>
+          <a:effectRef idx="2">
+            <a:schemeClr val="accent1"/>
+          </a:effectRef>
+          <a:fontRef idx="minor">
+            <a:schemeClr val="lt1"/>
+          </a:fontRef>
+        </p:style>
+        <p:txBody>
+          <a:bodyPr rtlCol="0" anchor="ctr" wrap="square" lIns="109728" rIns="109728" tIns="73152" bIns="73152"/>
+          <a:lstStyle/>
+          <a:p>
+            <a:pPr algn="ctr">
+              <a:defRPr sz="750" b="1">
+                <a:solidFill>
+                  <a:srgbClr val="0170B9"/>
+                </a:solidFill>
+              </a:defRPr>
+            </a:pPr>
+            <a:r>
+              <a:t>🌐 HALAMAN WEB / LIVE DEMO</a:t>
+            </a:r>
+          </a:p>
+          <a:p>
+            <a:pPr>
+              <a:spcBef>
+                <a:spcPts val="100"/>
+              </a:spcBef>
+              <a:defRPr sz="950" b="1">
+                <a:solidFill>
+                  <a:srgbClr val="002F5E"/>
+                </a:solidFill>
+              </a:defRPr>
+            </a:pPr>
+            <a:r>
+              <a:t>dashboard.php</a:t>
+            </a:r>
+          </a:p>
+          <a:p>
+            <a:pPr>
+              <a:spcBef>
+                <a:spcPts val="100"/>
+              </a:spcBef>
+              <a:defRPr sz="700" i="1">
+                <a:solidFill>
+                  <a:srgbClr val="64748B"/>
+                </a:solidFill>
+              </a:defRPr>
+            </a:pPr>
+            <a:r>
+              <a:t>http://localhost/.../dashboard.php</a:t>
+            </a:r>
+          </a:p>
+        </p:txBody>
+      </p:sp>
+      <p:sp>
+        <p:nvSpPr>
+          <p:cNvPr id="4" name="TextBox 3"/>
+          <p:cNvSpPr txBox="1"/>
+          <p:nvPr/>
+        </p:nvSpPr>
+        <p:spPr>
+          <a:xfrm>
+            <a:off x="731520" y="6446520"/>
+            <a:ext cx="10698480" cy="320040"/>
+          </a:xfrm>
+          <a:prstGeom prst="rect">
+            <a:avLst/>
+          </a:prstGeom>
+          <a:noFill/>
+        </p:spPr>
+        <p:txBody>
+          <a:bodyPr wrap="square" lIns="0" tIns="0" rIns="0" bIns="0">
+            <a:spAutoFit/>
+          </a:bodyPr>
+          <a:lstStyle/>
+          <a:p>
+            <a:pPr>
+              <a:defRPr sz="850">
+                <a:solidFill>
+                  <a:srgbClr val="64748B"/>
+                </a:solidFill>
+              </a:defRPr>
+            </a:pPr>
+            <a:r>
+              <a:t>Conclusion Supply Chain Consultant  •  Naufal Andika Heditya &amp; Zulfikar J. Fatah  •  Topik 7: CIDP 35 Ha                    Slide 14 of 16</a:t>
+            </a:r>
+          </a:p>
+        </p:txBody>
+      </p:sp>
+      <p:pic>
+        <p:nvPicPr>
+          <p:cNvPr id="5" name="Picture 4" descr="PETA_ARSITEKTUR_DAN_KONSEP_APLIKASI_CIDP.jpg"/>
+          <p:cNvPicPr>
+            <a:picLocks noChangeAspect="1"/>
+          </p:cNvPicPr>
+          <p:nvPr/>
+        </p:nvPicPr>
+        <p:blipFill>
+          <a:blip r:embed="rId2"/>
+          <a:stretch>
+            <a:fillRect/>
+          </a:stretch>
+        </p:blipFill>
+        <p:spPr>
+          <a:xfrm>
+            <a:off x="731520" y="1417320"/>
+            <a:ext cx="10698480" cy="4343400"/>
+          </a:xfrm>
+          <a:prstGeom prst="rect">
+            <a:avLst/>
+          </a:prstGeom>
+        </p:spPr>
+      </p:pic>
+      <p:sp>
+        <p:nvSpPr>
+          <p:cNvPr id="6" name="Rounded Rectangle 5"/>
+          <p:cNvSpPr/>
+          <p:nvPr/>
+        </p:nvSpPr>
+        <p:spPr>
+          <a:xfrm>
+            <a:off x="731520" y="5852160"/>
+            <a:ext cx="10698480" cy="438912"/>
+          </a:xfrm>
+          <a:prstGeom prst="roundRect">
+            <a:avLst/>
+          </a:prstGeom>
+          <a:solidFill>
+            <a:srgbClr val="FEF3C7"/>
+          </a:solidFill>
+          <a:ln w="12700">
+            <a:solidFill>
+              <a:srgbClr val="F59E0B"/>
+            </a:solidFill>
+          </a:ln>
+        </p:spPr>
+        <p:style>
+          <a:lnRef idx="1">
+            <a:schemeClr val="accent1"/>
+          </a:lnRef>
+          <a:fillRef idx="3">
+            <a:schemeClr val="accent1"/>
+          </a:fillRef>
+          <a:effectRef idx="2">
+            <a:schemeClr val="accent1"/>
+          </a:effectRef>
+          <a:fontRef idx="minor">
+            <a:schemeClr val="lt1"/>
+          </a:fontRef>
+        </p:style>
+        <p:txBody>
+          <a:bodyPr rtlCol="0" anchor="ctr" wrap="square"/>
+          <a:lstStyle/>
+          <a:p>
+            <a:pPr algn="l">
+              <a:defRPr sz="950" b="1">
+                <a:solidFill>
+                  <a:srgbClr val="B45309"/>
+                </a:solidFill>
+              </a:defRPr>
+            </a:pPr>
+            <a:r>
+              <a:t>👉  Solusi Kompleksitas: Pemisahan 5 Modul Terstruktur (WCS, YMS, WMS, TMS, ERP) menjaga kode rapi dan modular.</a:t>
+            </a:r>
+          </a:p>
+        </p:txBody>
+      </p:sp>
+    </p:spTree>
+  </p:cSld>
+  <p:clrMapOvr>
+    <a:masterClrMapping/>
+  </p:clrMapOvr>
+</p:sld>
+</file>
+
+<file path=ppt/slides/slide15.xml><?xml version="1.0" encoding="utf-8"?>
+<p:sld xmlns:a="http://schemas.openxmlformats.org/drawingml/2006/main" xmlns:p="http://schemas.openxmlformats.org/presentationml/2006/main" xmlns:r="http://schemas.openxmlformats.org/officeDocument/2006/relationships">
+  <p:cSld>
+    <p:spTree>
+      <p:nvGrpSpPr>
+        <p:cNvPr id="1" name=""/>
+        <p:cNvGrpSpPr/>
+        <p:nvPr/>
+      </p:nvGrpSpPr>
+      <p:grpSpPr/>
+      <p:sp>
+        <p:nvSpPr>
+          <p:cNvPr id="2" name="TextBox 1"/>
+          <p:cNvSpPr txBox="1"/>
+          <p:nvPr/>
+        </p:nvSpPr>
+        <p:spPr>
+          <a:xfrm>
+            <a:off x="731520" y="256032"/>
+            <a:ext cx="7772400" cy="1051560"/>
+          </a:xfrm>
+          <a:prstGeom prst="rect">
+            <a:avLst/>
+          </a:prstGeom>
+          <a:noFill/>
+        </p:spPr>
+        <p:txBody>
+          <a:bodyPr wrap="square" lIns="0" tIns="0" rIns="0" bIns="0">
+            <a:spAutoFit/>
+          </a:bodyPr>
+          <a:lstStyle/>
+          <a:p>
+            <a:pPr>
+              <a:defRPr sz="850" b="1">
+                <a:solidFill>
+                  <a:srgbClr val="0170B9"/>
+                </a:solidFill>
+              </a:defRPr>
+            </a:pPr>
+            <a:r>
+              <a:t>CONCLUSION SUPPLY CHAIN CONSULTANT — STRATEGIC BUSINESS BLUEPRINT</a:t>
+            </a:r>
+          </a:p>
+          <a:p>
+            <a:pPr>
+              <a:spcBef>
+                <a:spcPts val="200"/>
+              </a:spcBef>
+              <a:defRPr sz="1650" b="1">
+                <a:solidFill>
+                  <a:srgbClr val="002F5E"/>
+                </a:solidFill>
+              </a:defRPr>
+            </a:pPr>
+            <a:r>
+              <a:t>Matriks Integrasi Data Fitur (Data Mapping), Anomali, &amp; FSD (Bab 9, 10, 11)</a:t>
+            </a:r>
+          </a:p>
+        </p:txBody>
+      </p:sp>
+      <p:sp>
+        <p:nvSpPr>
+          <p:cNvPr id="3" name="Rounded Rectangle 2"/>
+          <p:cNvSpPr/>
+          <p:nvPr/>
+        </p:nvSpPr>
+        <p:spPr>
+          <a:xfrm>
+            <a:off x="8412480" y="237744"/>
+            <a:ext cx="3017520" cy="932688"/>
+          </a:xfrm>
+          <a:prstGeom prst="roundRect">
+            <a:avLst/>
+          </a:prstGeom>
+          <a:solidFill>
+            <a:srgbClr val="EFF6FF"/>
+          </a:solidFill>
+          <a:ln w="12700">
+            <a:solidFill>
+              <a:srgbClr val="0170B9"/>
+            </a:solidFill>
+          </a:ln>
+        </p:spPr>
+        <p:style>
+          <a:lnRef idx="1">
+            <a:schemeClr val="accent1"/>
+          </a:lnRef>
+          <a:fillRef idx="3">
+            <a:schemeClr val="accent1"/>
+          </a:fillRef>
+          <a:effectRef idx="2">
+            <a:schemeClr val="accent1"/>
+          </a:effectRef>
+          <a:fontRef idx="minor">
+            <a:schemeClr val="lt1"/>
+          </a:fontRef>
+        </p:style>
+        <p:txBody>
+          <a:bodyPr rtlCol="0" anchor="ctr" wrap="square" lIns="109728" rIns="109728" tIns="73152" bIns="73152"/>
+          <a:lstStyle/>
+          <a:p>
+            <a:pPr algn="ctr">
+              <a:defRPr sz="750" b="1">
+                <a:solidFill>
+                  <a:srgbClr val="0170B9"/>
+                </a:solidFill>
+              </a:defRPr>
+            </a:pPr>
+            <a:r>
+              <a:t>🌐 HALAMAN WEB / LIVE DEMO</a:t>
+            </a:r>
+          </a:p>
+          <a:p>
+            <a:pPr>
+              <a:spcBef>
+                <a:spcPts val="100"/>
+              </a:spcBef>
+              <a:defRPr sz="950" b="1">
+                <a:solidFill>
+                  <a:srgbClr val="002F5E"/>
+                </a:solidFill>
+              </a:defRPr>
+            </a:pPr>
+            <a:r>
+              <a:t>dashboard.php?page=settings</a:t>
+            </a:r>
+          </a:p>
+          <a:p>
+            <a:pPr>
+              <a:spcBef>
+                <a:spcPts val="100"/>
+              </a:spcBef>
+              <a:defRPr sz="700" i="1">
+                <a:solidFill>
+                  <a:srgbClr val="64748B"/>
+                </a:solidFill>
+              </a:defRPr>
+            </a:pPr>
+            <a:r>
+              <a:t>http://localhost/.../settings.php</a:t>
+            </a:r>
+          </a:p>
+        </p:txBody>
+      </p:sp>
+      <p:sp>
+        <p:nvSpPr>
+          <p:cNvPr id="4" name="TextBox 3"/>
+          <p:cNvSpPr txBox="1"/>
+          <p:nvPr/>
+        </p:nvSpPr>
+        <p:spPr>
+          <a:xfrm>
+            <a:off x="731520" y="6446520"/>
+            <a:ext cx="10698480" cy="320040"/>
+          </a:xfrm>
+          <a:prstGeom prst="rect">
+            <a:avLst/>
+          </a:prstGeom>
+          <a:noFill/>
+        </p:spPr>
+        <p:txBody>
+          <a:bodyPr wrap="square" lIns="0" tIns="0" rIns="0" bIns="0">
+            <a:spAutoFit/>
+          </a:bodyPr>
+          <a:lstStyle/>
+          <a:p>
+            <a:pPr>
+              <a:defRPr sz="850">
+                <a:solidFill>
+                  <a:srgbClr val="64748B"/>
+                </a:solidFill>
+              </a:defRPr>
+            </a:pPr>
+            <a:r>
+              <a:t>Conclusion Supply Chain Consultant  •  Naufal Andika Heditya &amp; Zulfikar J. Fatah  •  Topik 7: CIDP 35 Ha                    Slide 15 of 16</a:t>
+            </a:r>
+          </a:p>
+        </p:txBody>
+      </p:sp>
+      <p:graphicFrame>
+        <p:nvGraphicFramePr>
+          <p:cNvPr id="5" name="Table 4"/>
+          <p:cNvGraphicFramePr>
+            <a:graphicFrameLocks noGrp="1"/>
+          </p:cNvGraphicFramePr>
+          <p:nvPr/>
+        </p:nvGraphicFramePr>
+        <p:xfrm>
+          <a:off x="731520" y="1508760"/>
+          <a:ext cx="6858000" cy="4160520"/>
+        </p:xfrm>
+        <a:graphic>
+          <a:graphicData uri="http://schemas.openxmlformats.org/drawingml/2006/table">
+            <a:tbl>
+              <a:tblPr firstRow="1" bandRow="1">
+                <a:tableStyleId>{5C22544A-7EE6-4342-B048-85BDC9FD1C3A}</a:tableStyleId>
+              </a:tblPr>
+              <a:tblGrid>
+                <a:gridCol w="1645920"/>
+                <a:gridCol w="1645920"/>
+                <a:gridCol w="1920240"/>
+                <a:gridCol w="1645920"/>
+              </a:tblGrid>
+              <a:tr h="832104">
+                <a:tc>
+                  <a:txBody>
+                    <a:bodyPr/>
+                    <a:lstStyle/>
+                    <a:p>
+                      <a:pPr>
+                        <a:defRPr b="1" sz="900">
+                          <a:solidFill>
+                            <a:srgbClr val="FFFFFF"/>
+                          </a:solidFill>
+                        </a:defRPr>
+                      </a:pPr>
+                      <a:r>
+                        <a:t>Modul Fitur</a:t>
+                      </a:r>
+                    </a:p>
+                  </a:txBody>
+                  <a:tcPr>
+                    <a:solidFill>
+                      <a:srgbClr val="002F5E"/>
+                    </a:solidFill>
+                  </a:tcPr>
+                </a:tc>
+                <a:tc>
+                  <a:txBody>
+                    <a:bodyPr/>
+                    <a:lstStyle/>
+                    <a:p>
+                      <a:pPr>
+                        <a:defRPr b="1" sz="900">
+                          <a:solidFill>
+                            <a:srgbClr val="FFFFFF"/>
+                          </a:solidFill>
+                        </a:defRPr>
+                      </a:pPr>
+                      <a:r>
+                        <a:t>Data Input (Source)</a:t>
+                      </a:r>
+                    </a:p>
+                  </a:txBody>
+                  <a:tcPr>
+                    <a:solidFill>
+                      <a:srgbClr val="002F5E"/>
+                    </a:solidFill>
+                  </a:tcPr>
+                </a:tc>
+                <a:tc>
+                  <a:txBody>
+                    <a:bodyPr/>
+                    <a:lstStyle/>
+                    <a:p>
+                      <a:pPr>
+                        <a:defRPr b="1" sz="900">
+                          <a:solidFill>
+                            <a:srgbClr val="FFFFFF"/>
+                          </a:solidFill>
+                        </a:defRPr>
+                      </a:pPr>
+                      <a:r>
+                        <a:t>Proses Validasi Sistem</a:t>
+                      </a:r>
+                    </a:p>
+                  </a:txBody>
+                  <a:tcPr>
+                    <a:solidFill>
+                      <a:srgbClr val="002F5E"/>
+                    </a:solidFill>
+                  </a:tcPr>
+                </a:tc>
+                <a:tc>
+                  <a:txBody>
+                    <a:bodyPr/>
+                    <a:lstStyle/>
+                    <a:p>
+                      <a:pPr>
+                        <a:defRPr b="1" sz="900">
+                          <a:solidFill>
+                            <a:srgbClr val="FFFFFF"/>
+                          </a:solidFill>
+                        </a:defRPr>
+                      </a:pPr>
+                      <a:r>
+                        <a:t>Data Output (Target)</a:t>
+                      </a:r>
+                    </a:p>
+                  </a:txBody>
+                  <a:tcPr>
+                    <a:solidFill>
+                      <a:srgbClr val="002F5E"/>
+                    </a:solidFill>
+                  </a:tcPr>
+                </a:tc>
+              </a:tr>
+              <a:tr h="832104">
+                <a:tc>
+                  <a:txBody>
+                    <a:bodyPr/>
+                    <a:lstStyle/>
+                    <a:p>
+                      <a:pPr>
+                        <a:defRPr sz="800">
+                          <a:solidFill>
+                            <a:srgbClr val="1E293B"/>
+                          </a:solidFill>
+                        </a:defRPr>
+                      </a:pPr>
+                      <a:r>
+                        <a:t>ASN Receiving</a:t>
+                      </a:r>
+                      <a:br/>
+                      <a:r>
+                        <a:t>(WMS)</a:t>
+                      </a:r>
+                    </a:p>
+                  </a:txBody>
+                  <a:tcPr>
+                    <a:solidFill>
+                      <a:srgbClr val="FFFFFF"/>
+                    </a:solidFill>
+                  </a:tcPr>
+                </a:tc>
+                <a:tc>
+                  <a:txBody>
+                    <a:bodyPr/>
+                    <a:lstStyle/>
+                    <a:p>
+                      <a:pPr>
+                        <a:defRPr sz="800">
+                          <a:solidFill>
+                            <a:srgbClr val="1E293B"/>
+                          </a:solidFill>
+                        </a:defRPr>
+                      </a:pPr>
+                      <a:r>
+                        <a:t>PO Data dari ERP &amp;</a:t>
+                      </a:r>
+                      <a:br/>
+                      <a:r>
+                        <a:t>Dokumen Delivery</a:t>
+                      </a:r>
+                    </a:p>
+                  </a:txBody>
+                  <a:tcPr>
+                    <a:solidFill>
+                      <a:srgbClr val="FFFFFF"/>
+                    </a:solidFill>
+                  </a:tcPr>
+                </a:tc>
+                <a:tc>
+                  <a:txBody>
+                    <a:bodyPr/>
+                    <a:lstStyle/>
+                    <a:p>
+                      <a:pPr>
+                        <a:defRPr sz="800">
+                          <a:solidFill>
+                            <a:srgbClr val="1E293B"/>
+                          </a:solidFill>
+                        </a:defRPr>
+                      </a:pPr>
+                      <a:r>
+                        <a:t>Cek kesesuaian nomor PO &amp; toleransi kuantitas</a:t>
+                      </a:r>
+                    </a:p>
+                  </a:txBody>
+                  <a:tcPr>
+                    <a:solidFill>
+                      <a:srgbClr val="FFFFFF"/>
+                    </a:solidFill>
+                  </a:tcPr>
+                </a:tc>
+                <a:tc>
+                  <a:txBody>
+                    <a:bodyPr/>
+                    <a:lstStyle/>
+                    <a:p>
+                      <a:pPr>
+                        <a:defRPr sz="800">
+                          <a:solidFill>
+                            <a:srgbClr val="1E293B"/>
+                          </a:solidFill>
+                        </a:defRPr>
+                      </a:pPr>
+                      <a:r>
+                        <a:t>Status: Received /</a:t>
+                      </a:r>
+                      <a:br/>
+                      <a:r>
+                        <a:t>Over-receipt Alert</a:t>
+                      </a:r>
+                    </a:p>
+                  </a:txBody>
+                  <a:tcPr>
+                    <a:solidFill>
+                      <a:srgbClr val="FFFFFF"/>
+                    </a:solidFill>
+                  </a:tcPr>
+                </a:tc>
+              </a:tr>
+              <a:tr h="832104">
+                <a:tc>
+                  <a:txBody>
+                    <a:bodyPr/>
+                    <a:lstStyle/>
+                    <a:p>
+                      <a:pPr>
+                        <a:defRPr sz="800">
+                          <a:solidFill>
+                            <a:srgbClr val="1E293B"/>
+                          </a:solidFill>
+                        </a:defRPr>
+                      </a:pPr>
+                      <a:r>
+                        <a:t>Picking Engine</a:t>
+                      </a:r>
+                      <a:br/>
+                      <a:r>
+                        <a:t>(WMS / WCS)</a:t>
+                      </a:r>
+                    </a:p>
+                  </a:txBody>
+                  <a:tcPr>
+                    <a:solidFill>
+                      <a:srgbClr val="F1F5F9"/>
+                    </a:solidFill>
+                  </a:tcPr>
+                </a:tc>
+                <a:tc>
+                  <a:txBody>
+                    <a:bodyPr/>
+                    <a:lstStyle/>
+                    <a:p>
+                      <a:pPr>
+                        <a:defRPr sz="800">
+                          <a:solidFill>
+                            <a:srgbClr val="1E293B"/>
+                          </a:solidFill>
+                        </a:defRPr>
+                      </a:pPr>
+                      <a:r>
+                        <a:t>Order List dari ERP &amp;</a:t>
+                      </a:r>
+                      <a:br/>
+                      <a:r>
+                        <a:t>Lokasi Bin CFS</a:t>
+                      </a:r>
+                    </a:p>
+                  </a:txBody>
+                  <a:tcPr>
+                    <a:solidFill>
+                      <a:srgbClr val="F1F5F9"/>
+                    </a:solidFill>
+                  </a:tcPr>
+                </a:tc>
+                <a:tc>
+                  <a:txBody>
+                    <a:bodyPr/>
+                    <a:lstStyle/>
+                    <a:p>
+                      <a:pPr>
+                        <a:defRPr sz="800">
+                          <a:solidFill>
+                            <a:srgbClr val="1E293B"/>
+                          </a:solidFill>
+                        </a:defRPr>
+                      </a:pPr>
+                      <a:r>
+                        <a:t>Cek aturan FEFO &amp; kapasitas beban rak</a:t>
+                      </a:r>
+                    </a:p>
+                  </a:txBody>
+                  <a:tcPr>
+                    <a:solidFill>
+                      <a:srgbClr val="F1F5F9"/>
+                    </a:solidFill>
+                  </a:tcPr>
+                </a:tc>
+                <a:tc>
+                  <a:txBody>
+                    <a:bodyPr/>
+                    <a:lstStyle/>
+                    <a:p>
+                      <a:pPr>
+                        <a:defRPr sz="800">
+                          <a:solidFill>
+                            <a:srgbClr val="1E293B"/>
+                          </a:solidFill>
+                        </a:defRPr>
+                      </a:pPr>
+                      <a:r>
+                        <a:t>Task Command ke</a:t>
+                      </a:r>
+                      <a:br/>
+                      <a:r>
+                        <a:t>PDA / AMR / Forklift</a:t>
+                      </a:r>
+                    </a:p>
+                  </a:txBody>
+                  <a:tcPr>
+                    <a:solidFill>
+                      <a:srgbClr val="F1F5F9"/>
+                    </a:solidFill>
+                  </a:tcPr>
+                </a:tc>
+              </a:tr>
+              <a:tr h="832104">
+                <a:tc>
+                  <a:txBody>
+                    <a:bodyPr/>
+                    <a:lstStyle/>
+                    <a:p>
+                      <a:pPr>
+                        <a:defRPr sz="800">
+                          <a:solidFill>
+                            <a:srgbClr val="1E293B"/>
+                          </a:solidFill>
+                        </a:defRPr>
+                      </a:pPr>
+                      <a:r>
+                        <a:t>Mass Scanning</a:t>
+                      </a:r>
+                      <a:br/>
+                      <a:r>
+                        <a:t>(WCS)</a:t>
+                      </a:r>
+                    </a:p>
+                  </a:txBody>
+                  <a:tcPr>
+                    <a:solidFill>
+                      <a:srgbClr val="FFFFFF"/>
+                    </a:solidFill>
+                  </a:tcPr>
+                </a:tc>
+                <a:tc>
+                  <a:txBody>
+                    <a:bodyPr/>
+                    <a:lstStyle/>
+                    <a:p>
+                      <a:pPr>
+                        <a:defRPr sz="800">
+                          <a:solidFill>
+                            <a:srgbClr val="1E293B"/>
+                          </a:solidFill>
+                        </a:defRPr>
+                      </a:pPr>
+                      <a:r>
+                        <a:t>Barcode &amp; Weight Sensor</a:t>
+                      </a:r>
+                      <a:br/>
+                      <a:r>
+                        <a:t>Tunnel DWS (&lt;500ms)</a:t>
+                      </a:r>
+                    </a:p>
+                  </a:txBody>
+                  <a:tcPr>
+                    <a:solidFill>
+                      <a:srgbClr val="FFFFFF"/>
+                    </a:solidFill>
+                  </a:tcPr>
+                </a:tc>
+                <a:tc>
+                  <a:txBody>
+                    <a:bodyPr/>
+                    <a:lstStyle/>
+                    <a:p>
+                      <a:pPr>
+                        <a:defRPr sz="800">
+                          <a:solidFill>
+                            <a:srgbClr val="1E293B"/>
+                          </a:solidFill>
+                        </a:defRPr>
+                      </a:pPr>
+                      <a:r>
+                        <a:t>Cek kecocokan manifes &amp; toleransi berat ±2%</a:t>
+                      </a:r>
+                    </a:p>
+                  </a:txBody>
+                  <a:tcPr>
+                    <a:solidFill>
+                      <a:srgbClr val="FFFFFF"/>
+                    </a:solidFill>
+                  </a:tcPr>
+                </a:tc>
+                <a:tc>
+                  <a:txBody>
+                    <a:bodyPr/>
+                    <a:lstStyle/>
+                    <a:p>
+                      <a:pPr>
+                        <a:defRPr sz="800">
+                          <a:solidFill>
+                            <a:srgbClr val="1E293B"/>
+                          </a:solidFill>
+                        </a:defRPr>
+                      </a:pPr>
+                      <a:r>
+                        <a:t>Signal Diverter &amp;</a:t>
+                      </a:r>
+                      <a:br/>
+                      <a:r>
+                        <a:t>Resi Label Tercetak</a:t>
+                      </a:r>
+                    </a:p>
+                  </a:txBody>
+                  <a:tcPr>
+                    <a:solidFill>
+                      <a:srgbClr val="FFFFFF"/>
+                    </a:solidFill>
+                  </a:tcPr>
+                </a:tc>
+              </a:tr>
+              <a:tr h="832104">
+                <a:tc>
+                  <a:txBody>
+                    <a:bodyPr/>
+                    <a:lstStyle/>
+                    <a:p>
+                      <a:pPr>
+                        <a:defRPr sz="800">
+                          <a:solidFill>
+                            <a:srgbClr val="1E293B"/>
+                          </a:solidFill>
+                        </a:defRPr>
+                      </a:pPr>
+                      <a:r>
+                        <a:t>Route Planner</a:t>
+                      </a:r>
+                      <a:br/>
+                      <a:r>
+                        <a:t>(TMS)</a:t>
+                      </a:r>
+                    </a:p>
+                  </a:txBody>
+                  <a:tcPr>
+                    <a:solidFill>
+                      <a:srgbClr val="F1F5F9"/>
+                    </a:solidFill>
+                  </a:tcPr>
+                </a:tc>
+                <a:tc>
+                  <a:txBody>
+                    <a:bodyPr/>
+                    <a:lstStyle/>
+                    <a:p>
+                      <a:pPr>
+                        <a:defRPr sz="800">
+                          <a:solidFill>
+                            <a:srgbClr val="1E293B"/>
+                          </a:solidFill>
+                        </a:defRPr>
+                      </a:pPr>
+                      <a:r>
+                        <a:t>Alamat Kirim, Bobot,</a:t>
+                      </a:r>
+                      <a:br/>
+                      <a:r>
+                        <a:t>&amp; Batasan Jam Jalan</a:t>
+                      </a:r>
+                    </a:p>
+                  </a:txBody>
+                  <a:tcPr>
+                    <a:solidFill>
+                      <a:srgbClr val="F1F5F9"/>
+                    </a:solidFill>
+                  </a:tcPr>
+                </a:tc>
+                <a:tc>
+                  <a:txBody>
+                    <a:bodyPr/>
+                    <a:lstStyle/>
+                    <a:p>
+                      <a:pPr>
+                        <a:defRPr sz="800">
+                          <a:solidFill>
+                            <a:srgbClr val="1E293B"/>
+                          </a:solidFill>
+                        </a:defRPr>
+                      </a:pPr>
+                      <a:r>
+                        <a:t>Algoritma rute tercepat &amp; optimasi tonase</a:t>
+                      </a:r>
+                    </a:p>
+                  </a:txBody>
+                  <a:tcPr>
+                    <a:solidFill>
+                      <a:srgbClr val="F1F5F9"/>
+                    </a:solidFill>
+                  </a:tcPr>
+                </a:tc>
+                <a:tc>
+                  <a:txBody>
+                    <a:bodyPr/>
+                    <a:lstStyle/>
+                    <a:p>
+                      <a:pPr>
+                        <a:defRPr sz="800">
+                          <a:solidFill>
+                            <a:srgbClr val="1E293B"/>
+                          </a:solidFill>
+                        </a:defRPr>
+                      </a:pPr>
+                      <a:r>
+                        <a:t>Manifest Jalan &amp;</a:t>
+                      </a:r>
+                      <a:br/>
+                      <a:r>
+                        <a:t>GPS Track Assignment</a:t>
+                      </a:r>
+                    </a:p>
+                  </a:txBody>
+                  <a:tcPr>
+                    <a:solidFill>
+                      <a:srgbClr val="F1F5F9"/>
+                    </a:solidFill>
+                  </a:tcPr>
+                </a:tc>
+              </a:tr>
+            </a:tbl>
+          </a:graphicData>
+        </a:graphic>
+      </p:graphicFrame>
+      <p:sp>
+        <p:nvSpPr>
+          <p:cNvPr id="6" name="Rounded Rectangle 5"/>
+          <p:cNvSpPr/>
+          <p:nvPr/>
+        </p:nvSpPr>
+        <p:spPr>
+          <a:xfrm>
+            <a:off x="7772400" y="1508760"/>
+            <a:ext cx="3657600" cy="4160520"/>
           </a:xfrm>
           <a:prstGeom prst="roundRect">
             <a:avLst/>
@@ -5501,14 +6421,14 @@
       </p:sp>
       <p:sp>
         <p:nvSpPr>
-          <p:cNvPr id="10" name="TextBox 9"/>
+          <p:cNvPr id="7" name="TextBox 6"/>
           <p:cNvSpPr txBox="1"/>
           <p:nvPr/>
         </p:nvSpPr>
         <p:spPr>
           <a:xfrm>
-            <a:off x="6291072" y="1691640"/>
-            <a:ext cx="2295144" cy="2743200"/>
+            <a:off x="7955279" y="1691640"/>
+            <a:ext cx="3291840" cy="3794760"/>
           </a:xfrm>
           <a:prstGeom prst="rect">
             <a:avLst/>
@@ -5522,76 +6442,108 @@
           <a:lstStyle/>
           <a:p>
             <a:pPr>
-              <a:defRPr sz="850" b="1">
-                <a:solidFill>
-                  <a:srgbClr val="9333EA"/>
-                </a:solidFill>
-              </a:defRPr>
-            </a:pPr>
-            <a:r>
-              <a:t>3. STANDAR &amp; KEPATUHAN</a:t>
+              <a:defRPr sz="1050" b="1">
+                <a:solidFill>
+                  <a:srgbClr val="EF4444"/>
+                </a:solidFill>
+              </a:defRPr>
+            </a:pPr>
+            <a:r>
+              <a:t>PENANGANAN ANOMALI &amp; FSD STANDAR</a:t>
             </a:r>
           </a:p>
           <a:p>
             <a:pPr>
               <a:spcBef>
-                <a:spcPts val="200"/>
+                <a:spcPts val="600"/>
               </a:spcBef>
-              <a:defRPr sz="1300" b="1">
-                <a:solidFill>
-                  <a:srgbClr val="002F5E"/>
-                </a:solidFill>
-              </a:defRPr>
-            </a:pPr>
-            <a:r>
-              <a:t>GS1 SSCC &amp; CEISA 4.0</a:t>
-            </a:r>
-          </a:p>
-          <a:p>
-            <a:pPr>
-              <a:spcBef>
-                <a:spcPts val="400"/>
-              </a:spcBef>
-              <a:defRPr sz="800">
+              <a:defRPr sz="850">
                 <a:solidFill>
                   <a:srgbClr val="1E293B"/>
                 </a:solidFill>
               </a:defRPr>
             </a:pPr>
             <a:r>
-              <a:t>• Standar global GS1 AI (00) &amp; ISO 6346.</a:t>
-            </a:r>
-            <a:br/>
-            <a:r>
-              <a:t>• Kepatuhan PMK 190/2022 DJBC.</a:t>
-            </a:r>
-            <a:br/>
-            <a:r>
-              <a:t>• Otomasi SPPB 94,2% &amp; Smart E-Seal transit KA.</a:t>
-            </a:r>
-          </a:p>
-        </p:txBody>
-      </p:sp>
-      <p:sp>
-        <p:nvSpPr>
-          <p:cNvPr id="11" name="Rounded Rectangle 10"/>
+              <a:t>1. Anomali Overweight di Gate Timbangan:</a:t>
+            </a:r>
+            <a:br/>
+            <a:r>
+              <a:t>• Gejala: Berat &gt; 34 ton atau selisih &gt; 2%.</a:t>
+            </a:r>
+            <a:br/>
+            <a:r>
+              <a:t>• Penanganan: Palang lock, truk dialihkan ke Holding Bay Karantina, investigasi dokumen.</a:t>
+            </a:r>
+            <a:br/>
+            <a:br/>
+            <a:r>
+              <a:t>2. No-Read Barcode pada Conveyor WCS:</a:t>
+            </a:r>
+            <a:br/>
+            <a:r>
+              <a:t>• Gejala: Barcode robek / scanner gagal baca.</a:t>
+            </a:r>
+            <a:br/>
+            <a:r>
+              <a:t>• Penanganan: Diverter belokkan paket ke Reject Lane + alert PDA operator.</a:t>
+            </a:r>
+            <a:br/>
+            <a:br/>
+            <a:r>
+              <a:t>3. Shortage Stok saat Picking WMS:</a:t>
+            </a:r>
+            <a:br/>
+            <a:r>
+              <a:t>• Gejala: Fisik barang di rak kurang dari order.</a:t>
+            </a:r>
+            <a:br/>
+            <a:r>
+              <a:t>• Penanganan: Klik 'Item Shortage', sistem picu Blind Cycle Count &amp; alokasi rak alternatif.</a:t>
+            </a:r>
+            <a:br/>
+            <a:br/>
+            <a:r>
+              <a:t>4. 4 Pilar FSD Standar Silabus:</a:t>
+            </a:r>
+            <a:br/>
+            <a:r>
+              <a:t>• User Role &amp; Permission</a:t>
+            </a:r>
+            <a:br/>
+            <a:r>
+              <a:t>• Trigger Condition</a:t>
+            </a:r>
+            <a:br/>
+            <a:r>
+              <a:t>• Input Fields &amp; Validation Rules</a:t>
+            </a:r>
+            <a:br/>
+            <a:r>
+              <a:t>• System Response &amp; Error Handling</a:t>
+            </a:r>
+          </a:p>
+        </p:txBody>
+      </p:sp>
+      <p:sp>
+        <p:nvSpPr>
+          <p:cNvPr id="8" name="Rounded Rectangle 7"/>
           <p:cNvSpPr/>
           <p:nvPr/>
         </p:nvSpPr>
         <p:spPr>
           <a:xfrm>
-            <a:off x="8906256" y="1508760"/>
-            <a:ext cx="2514600" cy="3108960"/>
+            <a:off x="731520" y="5852160"/>
+            <a:ext cx="10698480" cy="438912"/>
           </a:xfrm>
           <a:prstGeom prst="roundRect">
             <a:avLst/>
           </a:prstGeom>
           <a:solidFill>
-            <a:srgbClr val="FFFFFF"/>
+            <a:srgbClr val="FEF3C7"/>
           </a:solidFill>
           <a:ln w="12700">
             <a:solidFill>
-              <a:srgbClr val="E2E8F0"/>
+              <a:srgbClr val="F59E0B"/>
             </a:solidFill>
           </a:ln>
         </p:spPr>
@@ -5610,103 +6562,59 @@
           </a:fontRef>
         </p:style>
         <p:txBody>
-          <a:bodyPr rtlCol="0" anchor="ctr"/>
-          <a:lstStyle/>
-          <a:p>
-            <a:pPr algn="ctr"/>
-          </a:p>
-        </p:txBody>
-      </p:sp>
-      <p:sp>
-        <p:nvSpPr>
-          <p:cNvPr id="12" name="TextBox 11"/>
-          <p:cNvSpPr txBox="1"/>
-          <p:nvPr/>
-        </p:nvSpPr>
-        <p:spPr>
-          <a:xfrm>
-            <a:off x="9015984" y="1691640"/>
-            <a:ext cx="2295144" cy="2743200"/>
-          </a:xfrm>
-          <a:prstGeom prst="rect">
-            <a:avLst/>
-          </a:prstGeom>
-          <a:noFill/>
-        </p:spPr>
-        <p:txBody>
-          <a:bodyPr wrap="square">
-            <a:spAutoFit/>
-          </a:bodyPr>
-          <a:lstStyle/>
-          <a:p>
-            <a:pPr>
-              <a:defRPr sz="850" b="1">
-                <a:solidFill>
-                  <a:srgbClr val="10B981"/>
-                </a:solidFill>
-              </a:defRPr>
-            </a:pPr>
-            <a:r>
-              <a:t>4. PENJAMINAN MUTU (QA)</a:t>
-            </a:r>
-          </a:p>
-          <a:p>
-            <a:pPr>
-              <a:spcBef>
-                <a:spcPts val="200"/>
-              </a:spcBef>
-              <a:defRPr sz="1300" b="1">
-                <a:solidFill>
-                  <a:srgbClr val="002F5E"/>
-                </a:solidFill>
-              </a:defRPr>
-            </a:pPr>
-            <a:r>
-              <a:t>Zero Revenue Leakage</a:t>
-            </a:r>
-          </a:p>
-          <a:p>
-            <a:pPr>
-              <a:spcBef>
-                <a:spcPts val="400"/>
-              </a:spcBef>
-              <a:defRPr sz="800">
-                <a:solidFill>
-                  <a:srgbClr val="1E293B"/>
-                </a:solidFill>
-              </a:defRPr>
-            </a:pPr>
-            <a:r>
-              <a:t>• 100% kasus ekstrem tertangani (SOLAS overload &amp; cek digit).</a:t>
-            </a:r>
-            <a:br/>
-            <a:r>
-              <a:t>• Palang Gate-Out kunci tagihan belum lunas.</a:t>
-            </a:r>
-          </a:p>
-        </p:txBody>
-      </p:sp>
-      <p:sp>
-        <p:nvSpPr>
-          <p:cNvPr id="13" name="Rounded Rectangle 12"/>
+          <a:bodyPr rtlCol="0" anchor="ctr" wrap="square"/>
+          <a:lstStyle/>
+          <a:p>
+            <a:pPr algn="l">
+              <a:defRPr sz="950" b="1">
+                <a:solidFill>
+                  <a:srgbClr val="B45309"/>
+                </a:solidFill>
+              </a:defRPr>
+            </a:pPr>
+            <a:r>
+              <a:t>👉  Matriks integrasi dan skenario exception handling menjamin operasional stabil 24/7 tanpa henti.</a:t>
+            </a:r>
+          </a:p>
+        </p:txBody>
+      </p:sp>
+    </p:spTree>
+  </p:cSld>
+  <p:clrMapOvr>
+    <a:masterClrMapping/>
+  </p:clrMapOvr>
+</p:sld>
+</file>
+
+<file path=ppt/slides/slide16.xml><?xml version="1.0" encoding="utf-8"?>
+<p:sld xmlns:a="http://schemas.openxmlformats.org/drawingml/2006/main" xmlns:p="http://schemas.openxmlformats.org/presentationml/2006/main" xmlns:r="http://schemas.openxmlformats.org/officeDocument/2006/relationships">
+  <p:cSld>
+    <p:spTree>
+      <p:nvGrpSpPr>
+        <p:cNvPr id="1" name=""/>
+        <p:cNvGrpSpPr/>
+        <p:nvPr/>
+      </p:nvGrpSpPr>
+      <p:grpSpPr/>
+      <p:sp>
+        <p:nvSpPr>
+          <p:cNvPr id="2" name="Rectangle 1"/>
           <p:cNvSpPr/>
           <p:nvPr/>
         </p:nvSpPr>
         <p:spPr>
           <a:xfrm>
-            <a:off x="731520" y="4800600"/>
-            <a:ext cx="10698480" cy="1417320"/>
-          </a:xfrm>
-          <a:prstGeom prst="roundRect">
+            <a:off x="0" y="0"/>
+            <a:ext cx="12191695" cy="6858000"/>
+          </a:xfrm>
+          <a:prstGeom prst="rect">
             <a:avLst/>
           </a:prstGeom>
           <a:solidFill>
             <a:srgbClr val="002F5E"/>
           </a:solidFill>
-          <a:ln w="12700">
-            <a:solidFill>
-              <a:srgbClr val="0170B9"/>
-            </a:solidFill>
+          <a:ln>
+            <a:noFill/>
           </a:ln>
         </p:spPr>
         <p:style>
@@ -5724,18 +6632,44 @@
           </a:fontRef>
         </p:style>
         <p:txBody>
-          <a:bodyPr rtlCol="0" anchor="ctr" wrap="square"/>
-          <a:lstStyle/>
-          <a:p>
-            <a:pPr algn="ctr">
-              <a:defRPr sz="1000" b="1">
-                <a:solidFill>
-                  <a:srgbClr val="38BDF8"/>
-                </a:solidFill>
-              </a:defRPr>
-            </a:pPr>
-            <a:r>
-              <a:t>REKOMENDASI FINAL STRATEGIS CONCLUSION SUPPLY CHAIN CONSULTANT</a:t>
+          <a:bodyPr rtlCol="0" anchor="ctr"/>
+          <a:lstStyle/>
+          <a:p>
+            <a:pPr algn="ctr"/>
+          </a:p>
+        </p:txBody>
+      </p:sp>
+      <p:sp>
+        <p:nvSpPr>
+          <p:cNvPr id="3" name="TextBox 2"/>
+          <p:cNvSpPr txBox="1"/>
+          <p:nvPr/>
+        </p:nvSpPr>
+        <p:spPr>
+          <a:xfrm>
+            <a:off x="731520" y="457200"/>
+            <a:ext cx="10698480" cy="1097280"/>
+          </a:xfrm>
+          <a:prstGeom prst="rect">
+            <a:avLst/>
+          </a:prstGeom>
+          <a:noFill/>
+        </p:spPr>
+        <p:txBody>
+          <a:bodyPr wrap="square">
+            <a:spAutoFit/>
+          </a:bodyPr>
+          <a:lstStyle/>
+          <a:p>
+            <a:pPr>
+              <a:defRPr sz="1800" b="1">
+                <a:solidFill>
+                  <a:srgbClr val="FFFFFF"/>
+                </a:solidFill>
+              </a:defRPr>
+            </a:pPr>
+            <a:r>
+              <a:t>KESIMPULAN REKOMENDASI KONSULTAN &amp; ROADMAP MENUJU GO-LIVE</a:t>
             </a:r>
           </a:p>
           <a:p>
@@ -5743,29 +6677,322 @@
               <a:spcBef>
                 <a:spcPts val="300"/>
               </a:spcBef>
-              <a:defRPr sz="850">
+              <a:defRPr sz="950" b="1">
+                <a:solidFill>
+                  <a:srgbClr val="38BDF8"/>
+                </a:solidFill>
+              </a:defRPr>
+            </a:pPr>
+            <a:r>
+              <a:t>STRATEGI EKSEKUTIF MENUJU IMPLEMENTASI TERMINAL INTERMODAL DRY PORT KELAS DUNIA</a:t>
+            </a:r>
+          </a:p>
+        </p:txBody>
+      </p:sp>
+      <p:sp>
+        <p:nvSpPr>
+          <p:cNvPr id="4" name="Rounded Rectangle 3"/>
+          <p:cNvSpPr/>
+          <p:nvPr/>
+        </p:nvSpPr>
+        <p:spPr>
+          <a:xfrm>
+            <a:off x="731520" y="1691640"/>
+            <a:ext cx="3383280" cy="4206240"/>
+          </a:xfrm>
+          <a:prstGeom prst="roundRect">
+            <a:avLst/>
+          </a:prstGeom>
+          <a:solidFill>
+            <a:srgbClr val="0F2140"/>
+          </a:solidFill>
+          <a:ln>
+            <a:solidFill>
+              <a:srgbClr val="1E3A6E"/>
+            </a:solidFill>
+          </a:ln>
+        </p:spPr>
+        <p:style>
+          <a:lnRef idx="1">
+            <a:schemeClr val="accent1"/>
+          </a:lnRef>
+          <a:fillRef idx="3">
+            <a:schemeClr val="accent1"/>
+          </a:fillRef>
+          <a:effectRef idx="2">
+            <a:schemeClr val="accent1"/>
+          </a:effectRef>
+          <a:fontRef idx="minor">
+            <a:schemeClr val="lt1"/>
+          </a:fontRef>
+        </p:style>
+        <p:txBody>
+          <a:bodyPr rtlCol="0" anchor="ctr" wrap="square"/>
+          <a:lstStyle/>
+          <a:p>
+            <a:pPr algn="ctr">
+              <a:defRPr sz="1100" b="1">
+                <a:solidFill>
+                  <a:srgbClr val="38BDF8"/>
+                </a:solidFill>
+              </a:defRPr>
+            </a:pPr>
+            <a:r>
+              <a:t>1. KEPATUHAN STANDAR REGULASI</a:t>
+            </a:r>
+          </a:p>
+          <a:p>
+            <a:pPr>
+              <a:spcBef>
+                <a:spcPts val="800"/>
+              </a:spcBef>
+              <a:defRPr sz="900">
                 <a:solidFill>
                   <a:srgbClr val="E2E8F0"/>
                 </a:solidFill>
               </a:defRPr>
             </a:pPr>
             <a:r>
-              <a:t>Sistem CIDP YMS terbukti secara empiris dan kuantitatif SANGAT LAYAK (FEASIBLE) untuk dilanjutkan ke tahap implementasi komersial. Solusi ini menyelesaikan inefisiensi pelabuhan konvensional, menjamin keuntungan finansial pemodal, dan memenuhi seluruh standar regulasi logistik nasional maupun internasional.</a:t>
-            </a:r>
-          </a:p>
+              <a:t>• Verifikasi Berat Internasional:</a:t>
+            </a:r>
+            <a:br/>
+            <a:r>
+              <a:t>  Implementasi jembatan timbang 80T patuh 100% pada SOLAS VGM Bab VI &amp; UU RI No. 22/2009.</a:t>
+            </a:r>
+            <a:br/>
+            <a:br/>
+            <a:r>
+              <a:t>• Integritas Penomoran ISO 6346:</a:t>
+            </a:r>
+            <a:br/>
+            <a:r>
+              <a:t>  Validasi Modulo 11 check digit mencegah kesalahan identitas peti kemas.</a:t>
+            </a:r>
+            <a:br/>
+            <a:br/>
+            <a:r>
+              <a:t>• Kepatuhan Bea Cukai CEISA 4.0:</a:t>
+            </a:r>
+            <a:br/>
+            <a:r>
+              <a:t>  Kunci otomatis (Customs Lock) memastikan barang tanpa SPPB tidak bocor ke luar pelabuhan kering.</a:t>
+            </a:r>
+          </a:p>
+        </p:txBody>
+      </p:sp>
+      <p:sp>
+        <p:nvSpPr>
+          <p:cNvPr id="5" name="Rounded Rectangle 4"/>
+          <p:cNvSpPr/>
+          <p:nvPr/>
+        </p:nvSpPr>
+        <p:spPr>
+          <a:xfrm>
+            <a:off x="4389120" y="1691640"/>
+            <a:ext cx="3383280" cy="4206240"/>
+          </a:xfrm>
+          <a:prstGeom prst="roundRect">
+            <a:avLst/>
+          </a:prstGeom>
+          <a:solidFill>
+            <a:srgbClr val="0F2140"/>
+          </a:solidFill>
+          <a:ln>
+            <a:solidFill>
+              <a:srgbClr val="1E3A6E"/>
+            </a:solidFill>
+          </a:ln>
+        </p:spPr>
+        <p:style>
+          <a:lnRef idx="1">
+            <a:schemeClr val="accent1"/>
+          </a:lnRef>
+          <a:fillRef idx="3">
+            <a:schemeClr val="accent1"/>
+          </a:fillRef>
+          <a:effectRef idx="2">
+            <a:schemeClr val="accent1"/>
+          </a:effectRef>
+          <a:fontRef idx="minor">
+            <a:schemeClr val="lt1"/>
+          </a:fontRef>
+        </p:style>
+        <p:txBody>
+          <a:bodyPr rtlCol="0" anchor="ctr" wrap="square"/>
+          <a:lstStyle/>
           <a:p>
             <a:pPr algn="ctr">
+              <a:defRPr sz="1100" b="1">
+                <a:solidFill>
+                  <a:srgbClr val="34D399"/>
+                </a:solidFill>
+              </a:defRPr>
+            </a:pPr>
+            <a:r>
+              <a:t>2. EFISIENSI &amp; ZERO LEAKAGE</a:t>
+            </a:r>
+          </a:p>
+          <a:p>
+            <a:pPr>
               <a:spcBef>
-                <a:spcPts val="400"/>
+                <a:spcPts val="800"/>
               </a:spcBef>
+              <a:defRPr sz="900">
+                <a:solidFill>
+                  <a:srgbClr val="E2E8F0"/>
+                </a:solidFill>
+              </a:defRPr>
+            </a:pPr>
+            <a:r>
+              <a:t>• Zero Revenue Leakage:</a:t>
+            </a:r>
+            <a:br/>
+            <a:r>
+              <a:t>  Penguncian palang barrier gate-out hingga invoice berstatus PAID menghilangkan potensi kebocoran pendapatan.</a:t>
+            </a:r>
+            <a:br/>
+            <a:br/>
+            <a:r>
+              <a:t>• Pangkas Waktu Gate In:</a:t>
+            </a:r>
+            <a:br/>
+            <a:r>
+              <a:t>  Otomasi ANPR, OCR, dan timbangan memangkas waktu proses dari 15 menit menjadi 90 detik per truk.</a:t>
+            </a:r>
+            <a:br/>
+            <a:br/>
+            <a:r>
+              <a:t>• Penghematan Logistik Intermodal:</a:t>
+            </a:r>
+            <a:br/>
+            <a:r>
+              <a:t>  Konektivitas rel KA 600m memangkas biaya transportasi jarak jauh hingga 40%.</a:t>
+            </a:r>
+          </a:p>
+        </p:txBody>
+      </p:sp>
+      <p:sp>
+        <p:nvSpPr>
+          <p:cNvPr id="6" name="Rounded Rectangle 5"/>
+          <p:cNvSpPr/>
+          <p:nvPr/>
+        </p:nvSpPr>
+        <p:spPr>
+          <a:xfrm>
+            <a:off x="8046720" y="1691640"/>
+            <a:ext cx="3383280" cy="4206240"/>
+          </a:xfrm>
+          <a:prstGeom prst="roundRect">
+            <a:avLst/>
+          </a:prstGeom>
+          <a:solidFill>
+            <a:srgbClr val="0F2140"/>
+          </a:solidFill>
+          <a:ln>
+            <a:solidFill>
+              <a:srgbClr val="1E3A6E"/>
+            </a:solidFill>
+          </a:ln>
+        </p:spPr>
+        <p:style>
+          <a:lnRef idx="1">
+            <a:schemeClr val="accent1"/>
+          </a:lnRef>
+          <a:fillRef idx="3">
+            <a:schemeClr val="accent1"/>
+          </a:fillRef>
+          <a:effectRef idx="2">
+            <a:schemeClr val="accent1"/>
+          </a:effectRef>
+          <a:fontRef idx="minor">
+            <a:schemeClr val="lt1"/>
+          </a:fontRef>
+        </p:style>
+        <p:txBody>
+          <a:bodyPr rtlCol="0" anchor="ctr" wrap="square"/>
+          <a:lstStyle/>
+          <a:p>
+            <a:pPr algn="ctr">
+              <a:defRPr sz="1100" b="1">
+                <a:solidFill>
+                  <a:srgbClr val="FBBF24"/>
+                </a:solidFill>
+              </a:defRPr>
+            </a:pPr>
+            <a:r>
+              <a:t>3. ROADMAP MENUJU GO-LIVE</a:t>
+            </a:r>
+          </a:p>
+          <a:p>
+            <a:pPr>
+              <a:spcBef>
+                <a:spcPts val="800"/>
+              </a:spcBef>
+              <a:defRPr sz="900">
+                <a:solidFill>
+                  <a:srgbClr val="E2E8F0"/>
+                </a:solidFill>
+              </a:defRPr>
+            </a:pPr>
+            <a:r>
+              <a:t>• FASE 1 (Bulan 1-3): Fondasi Sistem</a:t>
+            </a:r>
+            <a:br/>
+            <a:r>
+              <a:t>  Finalisasi modul Web YMS, migrasi skema MySQL, dan integrasi modul Odoo ERP.</a:t>
+            </a:r>
+            <a:br/>
+            <a:br/>
+            <a:r>
+              <a:t>• FASE 2 (Bulan 4-6): Kalibrasi IoT</a:t>
+            </a:r>
+            <a:br/>
+            <a:r>
+              <a:t>  Pemasangan sensor timbangan Avery, kamera ANPR/OCR, dan commissioning VMT RTG.</a:t>
+            </a:r>
+            <a:br/>
+            <a:br/>
+            <a:r>
+              <a:t>• FASE 3 (Bulan 7-9): Uji Coba Lapangan</a:t>
+            </a:r>
+            <a:br/>
+            <a:r>
+              <a:t>  Integrasi API CEISA 4.0 Bea Cukai, simulasi KA Logistik, dan pelatihan operator terminal.</a:t>
+            </a:r>
+          </a:p>
+        </p:txBody>
+      </p:sp>
+      <p:sp>
+        <p:nvSpPr>
+          <p:cNvPr id="7" name="TextBox 6"/>
+          <p:cNvSpPr txBox="1"/>
+          <p:nvPr/>
+        </p:nvSpPr>
+        <p:spPr>
+          <a:xfrm>
+            <a:off x="731520" y="6172200"/>
+            <a:ext cx="10698480" cy="365760"/>
+          </a:xfrm>
+          <a:prstGeom prst="rect">
+            <a:avLst/>
+          </a:prstGeom>
+          <a:noFill/>
+        </p:spPr>
+        <p:txBody>
+          <a:bodyPr wrap="none">
+            <a:spAutoFit/>
+          </a:bodyPr>
+          <a:lstStyle/>
+          <a:p>
+            <a:pPr algn="ctr">
               <a:defRPr sz="950" b="1">
                 <a:solidFill>
-                  <a:srgbClr val="F59E0B"/>
-                </a:solidFill>
-              </a:defRPr>
-            </a:pPr>
-            <a:r>
-              <a:t>🌐 LIVE PORTAL: http://localhost/Conclusion_Intermodal_Dry_Port/  •  SESI TANYA JAWAB (Q&amp;A)  •  DR. TIGOR FRANKY, S.T., M.T.</a:t>
+                  <a:srgbClr val="94A3B8"/>
+                </a:solidFill>
+              </a:defRPr>
+            </a:pPr>
+            <a:r>
+              <a:t>Conclusion Supply Chain Consultant  •  Terima Kasih  •  Sesi Tanya Jawab &amp; Diskusi Terbuka</a:t>
             </a:r>
           </a:p>
         </p:txBody>
@@ -5797,7 +7024,7 @@
         <p:spPr>
           <a:xfrm>
             <a:off x="731520" y="256032"/>
-            <a:ext cx="7498079" cy="1051560"/>
+            <a:ext cx="7772400" cy="1051560"/>
           </a:xfrm>
           <a:prstGeom prst="rect">
             <a:avLst/>
@@ -5833,7 +7060,7 @@
               </a:defRPr>
             </a:pPr>
             <a:r>
-              <a:t>Paradigma Business Analyst: Developer vs BA &amp; Metodologi 3-Langkah</a:t>
+              <a:t>Paradigma Business Analyst: Developer vs BA &amp; Metodologi 3-Langkah (Bab 1)</a:t>
             </a:r>
           </a:p>
         </p:txBody>
@@ -5846,8 +7073,8 @@
         </p:nvSpPr>
         <p:spPr>
           <a:xfrm>
-            <a:off x="8321040" y="237744"/>
-            <a:ext cx="3108960" cy="932688"/>
+            <a:off x="8412480" y="237744"/>
+            <a:ext cx="3017520" cy="932688"/>
           </a:xfrm>
           <a:prstGeom prst="roundRect">
             <a:avLst/>
@@ -5952,7 +7179,7 @@
               </a:defRPr>
             </a:pPr>
             <a:r>
-              <a:t>Conclusion Supply Chain Consultant  •  Naufal Andika Heditya &amp; Zulfikar J. Fatah  •  Topik 7: CIDP 35 Ha                    Slide 2 of 12</a:t>
+              <a:t>Conclusion Supply Chain Consultant  •  Naufal Andika Heditya &amp; Zulfikar J. Fatah  •  Topik 7: CIDP 35 Ha                    Slide 2 of 16</a:t>
             </a:r>
           </a:p>
         </p:txBody>
@@ -6025,65 +7252,66 @@
           <a:lstStyle/>
           <a:p>
             <a:pPr>
-              <a:defRPr sz="950" b="1">
+              <a:defRPr sz="1100" b="1">
                 <a:solidFill>
                   <a:srgbClr val="0170B9"/>
                 </a:solidFill>
               </a:defRPr>
             </a:pPr>
             <a:r>
-              <a:t>DEVELOPER VS BUSINESS ANALYST</a:t>
+              <a:t>1. DEVELOPER VS BA MINDSET</a:t>
             </a:r>
           </a:p>
           <a:p>
             <a:pPr>
               <a:spcBef>
-                <a:spcPts val="200"/>
+                <a:spcPts val="800"/>
               </a:spcBef>
-              <a:defRPr sz="1200" b="1">
-                <a:solidFill>
-                  <a:srgbClr val="002F5E"/>
-                </a:solidFill>
-              </a:defRPr>
-            </a:pPr>
-            <a:r>
-              <a:t>Perbedaan Sudut Pandang</a:t>
-            </a:r>
-          </a:p>
-          <a:p>
-            <a:pPr>
-              <a:spcBef>
-                <a:spcPts val="400"/>
-              </a:spcBef>
-              <a:defRPr sz="850">
+              <a:defRPr sz="900">
                 <a:solidFill>
                   <a:srgbClr val="1E293B"/>
                 </a:solidFill>
               </a:defRPr>
             </a:pPr>
             <a:r>
-              <a:t>• Pendekatan Developer (Koding):</a:t>
-            </a:r>
-            <a:br/>
-            <a:r>
-              <a:t>  - Fokus struktur koding, database sintaks, &amp; tombol.</a:t>
-            </a:r>
-            <a:br/>
-            <a:r>
-              <a:t>  - Contoh: Membuat Button 'Confirm Putaway'.</a:t>
-            </a:r>
-            <a:br/>
-            <a:br/>
-            <a:r>
-              <a:t>• Pendekatan Business Analyst (BA):</a:t>
-            </a:r>
-            <a:br/>
-            <a:r>
-              <a:t>  - Fokus logika bisnis, batasan input, &amp; dampak operasional.</a:t>
-            </a:r>
-            <a:br/>
-            <a:r>
-              <a:t>  - Contoh: 'Sistem wajib verifikasi berat barang &lt;= kapasitas rak bin sebelum status lokasi diperbarui di database.'</a:t>
+              <a:t>• Pendekatan Developer (Teknis):</a:t>
+            </a:r>
+            <a:br/>
+            <a:r>
+              <a:t>  - Fokus struktur koding &amp; query DB</a:t>
+            </a:r>
+            <a:br/>
+            <a:r>
+              <a:t>  - Implementasi tombol antarmuka UI</a:t>
+            </a:r>
+            <a:br/>
+            <a:r>
+              <a:t>  - 'Membuat tombol Confirm Putaway'</a:t>
+            </a:r>
+            <a:br/>
+            <a:r>
+              <a:t>  - Integrasi teknis endpoint REST API</a:t>
+            </a:r>
+            <a:br/>
+            <a:br/>
+            <a:r>
+              <a:t>• Pendekatan BA (Logika Bisnis):</a:t>
+            </a:r>
+            <a:br/>
+            <a:r>
+              <a:t>  - Fokus logika bisnis &amp; parameter input</a:t>
+            </a:r>
+            <a:br/>
+            <a:r>
+              <a:t>  - Validasi aturan, regulasi, &amp; batas toleransi</a:t>
+            </a:r>
+            <a:br/>
+            <a:r>
+              <a:t>  - Analisis dampak ke operasional riil</a:t>
+            </a:r>
+            <a:br/>
+            <a:r>
+              <a:t>  - 'Sistem wajib memverifikasi berat barang ≤ kapasitas maksimum rak sebelum status lokasi diperbarui di database.'</a:t>
             </a:r>
           </a:p>
         </p:txBody>
@@ -6097,138 +7325,6 @@
         <p:spPr>
           <a:xfrm>
             <a:off x="4389120" y="1508760"/>
-            <a:ext cx="3383280" cy="4160520"/>
-          </a:xfrm>
-          <a:prstGeom prst="roundRect">
-            <a:avLst/>
-          </a:prstGeom>
-          <a:solidFill>
-            <a:srgbClr val="EFF6FF"/>
-          </a:solidFill>
-          <a:ln w="12700">
-            <a:solidFill>
-              <a:srgbClr val="0170B9"/>
-            </a:solidFill>
-          </a:ln>
-        </p:spPr>
-        <p:style>
-          <a:lnRef idx="1">
-            <a:schemeClr val="accent1"/>
-          </a:lnRef>
-          <a:fillRef idx="3">
-            <a:schemeClr val="accent1"/>
-          </a:fillRef>
-          <a:effectRef idx="2">
-            <a:schemeClr val="accent1"/>
-          </a:effectRef>
-          <a:fontRef idx="minor">
-            <a:schemeClr val="lt1"/>
-          </a:fontRef>
-        </p:style>
-        <p:txBody>
-          <a:bodyPr rtlCol="0" anchor="ctr"/>
-          <a:lstStyle/>
-          <a:p>
-            <a:pPr algn="ctr"/>
-          </a:p>
-        </p:txBody>
-      </p:sp>
-      <p:sp>
-        <p:nvSpPr>
-          <p:cNvPr id="8" name="TextBox 7"/>
-          <p:cNvSpPr txBox="1"/>
-          <p:nvPr/>
-        </p:nvSpPr>
-        <p:spPr>
-          <a:xfrm>
-            <a:off x="4572000" y="1691640"/>
-            <a:ext cx="3017520" cy="3794760"/>
-          </a:xfrm>
-          <a:prstGeom prst="rect">
-            <a:avLst/>
-          </a:prstGeom>
-          <a:noFill/>
-        </p:spPr>
-        <p:txBody>
-          <a:bodyPr wrap="square">
-            <a:spAutoFit/>
-          </a:bodyPr>
-          <a:lstStyle/>
-          <a:p>
-            <a:pPr>
-              <a:defRPr sz="950" b="1">
-                <a:solidFill>
-                  <a:srgbClr val="0170B9"/>
-                </a:solidFill>
-              </a:defRPr>
-            </a:pPr>
-            <a:r>
-              <a:t>METODOLOGI PERKULIAHAN DR. TIGOR</a:t>
-            </a:r>
-          </a:p>
-          <a:p>
-            <a:pPr>
-              <a:spcBef>
-                <a:spcPts val="200"/>
-              </a:spcBef>
-              <a:defRPr sz="1200" b="1">
-                <a:solidFill>
-                  <a:srgbClr val="002F5E"/>
-                </a:solidFill>
-              </a:defRPr>
-            </a:pPr>
-            <a:r>
-              <a:t>Rumus 3-Langkah Analisis Fitur</a:t>
-            </a:r>
-          </a:p>
-          <a:p>
-            <a:pPr>
-              <a:spcBef>
-                <a:spcPts val="400"/>
-              </a:spcBef>
-              <a:defRPr sz="850">
-                <a:solidFill>
-                  <a:srgbClr val="1E293B"/>
-                </a:solidFill>
-              </a:defRPr>
-            </a:pPr>
-            <a:r>
-              <a:t>1. FITUR / EVENT TRIGGER:</a:t>
-            </a:r>
-            <a:br/>
-            <a:r>
-              <a:t>   Tombol UI / input sensor (misal: 'Trigger Gate-In').</a:t>
-            </a:r>
-            <a:br/>
-            <a:br/>
-            <a:r>
-              <a:t>2. VALIDASI BUSINESS RULE:</a:t>
-            </a:r>
-            <a:br/>
-            <a:r>
-              <a:t>   Verifikasi aturan (misal: 'Berat &lt;= 34.000 kg SOLAS VGM &amp; ISO Modulo 11').</a:t>
-            </a:r>
-            <a:br/>
-            <a:br/>
-            <a:r>
-              <a:t>3. DAMPAK &amp; STATUS DATABASE:</a:t>
-            </a:r>
-            <a:br/>
-            <a:r>
-              <a:t>   Perubahan data &amp; aksi fisik (misal: 'Status GATE_IN_APPROVED, e-Pass cetak, palang buka').</a:t>
-            </a:r>
-          </a:p>
-        </p:txBody>
-      </p:sp>
-      <p:sp>
-        <p:nvSpPr>
-          <p:cNvPr id="9" name="Rounded Rectangle 8"/>
-          <p:cNvSpPr/>
-          <p:nvPr/>
-        </p:nvSpPr>
-        <p:spPr>
-          <a:xfrm>
-            <a:off x="8046720" y="1508760"/>
             <a:ext cx="3383280" cy="4160520"/>
           </a:xfrm>
           <a:prstGeom prst="roundRect">
@@ -6267,13 +7363,13 @@
       </p:sp>
       <p:sp>
         <p:nvSpPr>
-          <p:cNvPr id="10" name="TextBox 9"/>
+          <p:cNvPr id="8" name="TextBox 7"/>
           <p:cNvSpPr txBox="1"/>
           <p:nvPr/>
         </p:nvSpPr>
         <p:spPr>
           <a:xfrm>
-            <a:off x="8229600" y="1691640"/>
+            <a:off x="4572000" y="1691640"/>
             <a:ext cx="3017520" cy="3794760"/>
           </a:xfrm>
           <a:prstGeom prst="rect">
@@ -6288,63 +7384,180 @@
           <a:lstStyle/>
           <a:p>
             <a:pPr>
+              <a:defRPr sz="1100" b="1">
+                <a:solidFill>
+                  <a:srgbClr val="002F5E"/>
+                </a:solidFill>
+              </a:defRPr>
+            </a:pPr>
+            <a:r>
+              <a:t>2. RUMUS 3-LANGKAH ANALISIS BA</a:t>
+            </a:r>
+          </a:p>
+          <a:p>
+            <a:pPr>
               <a:spcBef>
-                <a:spcPts val="0"/>
+                <a:spcPts val="800"/>
               </a:spcBef>
-              <a:defRPr sz="950" b="1">
+              <a:defRPr sz="900">
+                <a:solidFill>
+                  <a:srgbClr val="1E293B"/>
+                </a:solidFill>
+              </a:defRPr>
+            </a:pPr>
+            <a:r>
+              <a:t>Setiap fitur diubah menjadi spesifikasi bisnis melalui 3 langkah berurutan:</a:t>
+            </a:r>
+            <a:br/>
+            <a:br/>
+            <a:r>
+              <a:t>1. FITUR / EVENT TRIGGER:</a:t>
+            </a:r>
+            <a:br/>
+            <a:r>
+              <a:t>   Tombol UI, pindaian sensor RFID, atau trigger waktu terjadwal.</a:t>
+            </a:r>
+            <a:br/>
+            <a:br/>
+            <a:r>
+              <a:t>2. VALIDASI BUSINESS RULE:</a:t>
+            </a:r>
+            <a:br/>
+            <a:r>
+              <a:t>   Logika matematis, batasan hukum (SOLAS VGM, UU LLAJ), ambang toleransi, dan percabangan IF-THEN-ELSE.</a:t>
+            </a:r>
+            <a:br/>
+            <a:br/>
+            <a:r>
+              <a:t>3. DAMPAK &amp; PEMBARUAN SISTEM:</a:t>
+            </a:r>
+            <a:br/>
+            <a:r>
+              <a:t>   Perubahan status database, aksi perangkat keras fisik (palang buka/kunci), dan cetak dokumen resmi.</a:t>
+            </a:r>
+          </a:p>
+        </p:txBody>
+      </p:sp>
+      <p:sp>
+        <p:nvSpPr>
+          <p:cNvPr id="9" name="Rounded Rectangle 8"/>
+          <p:cNvSpPr/>
+          <p:nvPr/>
+        </p:nvSpPr>
+        <p:spPr>
+          <a:xfrm>
+            <a:off x="8046720" y="1508760"/>
+            <a:ext cx="3383280" cy="4160520"/>
+          </a:xfrm>
+          <a:prstGeom prst="roundRect">
+            <a:avLst/>
+          </a:prstGeom>
+          <a:solidFill>
+            <a:srgbClr val="FFFFFF"/>
+          </a:solidFill>
+          <a:ln w="12700">
+            <a:solidFill>
+              <a:srgbClr val="E2E8F0"/>
+            </a:solidFill>
+          </a:ln>
+        </p:spPr>
+        <p:style>
+          <a:lnRef idx="1">
+            <a:schemeClr val="accent1"/>
+          </a:lnRef>
+          <a:fillRef idx="3">
+            <a:schemeClr val="accent1"/>
+          </a:fillRef>
+          <a:effectRef idx="2">
+            <a:schemeClr val="accent1"/>
+          </a:effectRef>
+          <a:fontRef idx="minor">
+            <a:schemeClr val="lt1"/>
+          </a:fontRef>
+        </p:style>
+        <p:txBody>
+          <a:bodyPr rtlCol="0" anchor="ctr"/>
+          <a:lstStyle/>
+          <a:p>
+            <a:pPr algn="ctr"/>
+          </a:p>
+        </p:txBody>
+      </p:sp>
+      <p:sp>
+        <p:nvSpPr>
+          <p:cNvPr id="10" name="TextBox 9"/>
+          <p:cNvSpPr txBox="1"/>
+          <p:nvPr/>
+        </p:nvSpPr>
+        <p:spPr>
+          <a:xfrm>
+            <a:off x="8229600" y="1691640"/>
+            <a:ext cx="3017520" cy="3794760"/>
+          </a:xfrm>
+          <a:prstGeom prst="rect">
+            <a:avLst/>
+          </a:prstGeom>
+          <a:noFill/>
+        </p:spPr>
+        <p:txBody>
+          <a:bodyPr wrap="square">
+            <a:spAutoFit/>
+          </a:bodyPr>
+          <a:lstStyle/>
+          <a:p>
+            <a:pPr>
+              <a:defRPr sz="1100" b="1">
                 <a:solidFill>
                   <a:srgbClr val="10B981"/>
                 </a:solidFill>
               </a:defRPr>
             </a:pPr>
             <a:r>
-              <a:t>ORKESTRASI 5 MODUL LOGISTIK</a:t>
+              <a:t>3. CONTOH IMPLEMENTASI NYATA</a:t>
             </a:r>
           </a:p>
           <a:p>
             <a:pPr>
               <a:spcBef>
-                <a:spcPts val="200"/>
+                <a:spcPts val="800"/>
               </a:spcBef>
-              <a:defRPr sz="1200" b="1">
-                <a:solidFill>
-                  <a:srgbClr val="002F5E"/>
-                </a:solidFill>
-              </a:defRPr>
-            </a:pPr>
-            <a:r>
-              <a:t>Ekosistem Terpadu CIDP</a:t>
-            </a:r>
-          </a:p>
-          <a:p>
-            <a:pPr>
-              <a:spcBef>
-                <a:spcPts val="400"/>
-              </a:spcBef>
-              <a:defRPr sz="850">
+              <a:defRPr sz="900">
                 <a:solidFill>
                   <a:srgbClr val="1E293B"/>
                 </a:solidFill>
               </a:defRPr>
             </a:pPr>
             <a:r>
-              <a:t>• WCS: Kontrol sensor OCR, timbangan 80t, &amp; RFID.</a:t>
-            </a:r>
-            <a:br/>
-            <a:r>
-              <a:t>• YMS: Penjadwalan gate &amp; alokasi 3D Bay-Row-Tier.</a:t>
-            </a:r>
-            <a:br/>
-            <a:r>
-              <a:t>• WMS: Gudang CFS LCL (GS1 SSCC-18) &amp; Reefer dingin.</a:t>
-            </a:r>
-            <a:br/>
-            <a:r>
-              <a:t>• TMS: Intermodal rel siding 600m &amp; GPS E-Seal KA.</a:t>
-            </a:r>
-            <a:br/>
-            <a:r>
-              <a:t>• ERP: Odoo Billing &amp; Webhook CEISA 4.0 Bea Cukai.</a:t>
+              <a:t>Contoh Kasus 1: Fitur Putaway</a:t>
+            </a:r>
+            <a:br/>
+            <a:r>
+              <a:t>• Fitur: Tombol 'Confirm Putaway'</a:t>
+            </a:r>
+            <a:br/>
+            <a:r>
+              <a:t>• Rule: Cek Berat Palet ≤ Kapasitas Rak (1.500 kg/level) &amp; Tinggi Palet ≤ 1.6m</a:t>
+            </a:r>
+            <a:br/>
+            <a:r>
+              <a:t>• Dampak: Jika lolos, status rak di DB jadi OCCUPIED; jika gagal, rak ditolak &amp; dicarikan bin alternatif.</a:t>
+            </a:r>
+            <a:br/>
+            <a:br/>
+            <a:r>
+              <a:t>Contoh Kasus 2: Fitur Timbangan</a:t>
+            </a:r>
+            <a:br/>
+            <a:r>
+              <a:t>• Fitur: Sensor Loop Jembatan Timbang</a:t>
+            </a:r>
+            <a:br/>
+            <a:r>
+              <a:t>• Rule: Gross Weight ≤ 34.000 kg &amp; Toleransi ±2% vs VGM SOLAS</a:t>
+            </a:r>
+            <a:br/>
+            <a:r>
+              <a:t>• Dampak: Lolos → palang buka &amp; status APPROVED; Gagal → palang lock &amp; status REJECTED.</a:t>
             </a:r>
           </a:p>
         </p:txBody>
@@ -6357,7 +7570,7 @@
         </p:nvSpPr>
         <p:spPr>
           <a:xfrm>
-            <a:off x="731520" y="5779008"/>
+            <a:off x="731520" y="5852160"/>
             <a:ext cx="10698480" cy="438912"/>
           </a:xfrm>
           <a:prstGeom prst="roundRect">
@@ -6398,7 +7611,7 @@
               </a:defRPr>
             </a:pPr>
             <a:r>
-              <a:t>👉  PUSAT NAVIGASI SISTEM: Seluruh Alur Terintegrasi Diakses Melalui Portal 'dashboard.php?page=beranda'</a:t>
+              <a:t>👉  Konsep ini menjadi pondasi seluruh analisis fitur CIDP: Mengubah tombol menjadi kepatuhan operasional.</a:t>
             </a:r>
           </a:p>
         </p:txBody>
@@ -6430,7 +7643,7 @@
         <p:spPr>
           <a:xfrm>
             <a:off x="731520" y="256032"/>
-            <a:ext cx="7498079" cy="1051560"/>
+            <a:ext cx="7772400" cy="1051560"/>
           </a:xfrm>
           <a:prstGeom prst="rect">
             <a:avLst/>
@@ -6466,7 +7679,7 @@
               </a:defRPr>
             </a:pPr>
             <a:r>
-              <a:t>Master End-to-End Decision Flow: Peta Alur Keputusan Terminal (Gate-In s/d Gate-Out)</a:t>
+              <a:t>Business Role &amp; Matriks Alokasi Alat: Siapa yang Ngangkat, Nimbang, &amp; Barangnya Apa?</a:t>
             </a:r>
           </a:p>
         </p:txBody>
@@ -6479,8 +7692,8 @@
         </p:nvSpPr>
         <p:spPr>
           <a:xfrm>
-            <a:off x="8321040" y="237744"/>
-            <a:ext cx="3108960" cy="932688"/>
+            <a:off x="8412480" y="237744"/>
+            <a:ext cx="3017520" cy="932688"/>
           </a:xfrm>
           <a:prstGeom prst="roundRect">
             <a:avLst/>
@@ -6535,7 +7748,7 @@
               </a:defRPr>
             </a:pPr>
             <a:r>
-              <a:t>dashboard.php?page=simulator</a:t>
+              <a:t>dashboard.php?page=alat</a:t>
             </a:r>
           </a:p>
           <a:p>
@@ -6550,7 +7763,7 @@
               </a:defRPr>
             </a:pPr>
             <a:r>
-              <a:t>http://localhost/.../simulator.php</a:t>
+              <a:t>http://localhost/.../alat.php</a:t>
             </a:r>
           </a:p>
         </p:txBody>
@@ -6585,725 +7798,871 @@
               </a:defRPr>
             </a:pPr>
             <a:r>
-              <a:t>Conclusion Supply Chain Consultant  •  Naufal Andika Heditya &amp; Zulfikar J. Fatah  •  Topik 7: CIDP 35 Ha                    Slide 3 of 12</a:t>
-            </a:r>
-          </a:p>
-        </p:txBody>
-      </p:sp>
-      <p:sp>
-        <p:nvSpPr>
-          <p:cNvPr id="5" name="Rounded Rectangle 4"/>
+              <a:t>Conclusion Supply Chain Consultant  •  Naufal Andika Heditya &amp; Zulfikar J. Fatah  •  Topik 7: CIDP 35 Ha                    Slide 3 of 16</a:t>
+            </a:r>
+          </a:p>
+        </p:txBody>
+      </p:sp>
+      <p:graphicFrame>
+        <p:nvGraphicFramePr>
+          <p:cNvPr id="5" name="Table 4"/>
+          <p:cNvGraphicFramePr>
+            <a:graphicFrameLocks noGrp="1"/>
+          </p:cNvGraphicFramePr>
+          <p:nvPr/>
+        </p:nvGraphicFramePr>
+        <p:xfrm>
+          <a:off x="731520" y="1508760"/>
+          <a:ext cx="10698480" cy="4160520"/>
+        </p:xfrm>
+        <a:graphic>
+          <a:graphicData uri="http://schemas.openxmlformats.org/drawingml/2006/table">
+            <a:tbl>
+              <a:tblPr firstRow="1" bandRow="1">
+                <a:tableStyleId>{5C22544A-7EE6-4342-B048-85BDC9FD1C3A}</a:tableStyleId>
+              </a:tblPr>
+              <a:tblGrid>
+                <a:gridCol w="2011680"/>
+                <a:gridCol w="2286000"/>
+                <a:gridCol w="2468880"/>
+                <a:gridCol w="2468880"/>
+                <a:gridCol w="1463040"/>
+              </a:tblGrid>
+              <a:tr h="693420">
+                <a:tc>
+                  <a:txBody>
+                    <a:bodyPr/>
+                    <a:lstStyle/>
+                    <a:p>
+                      <a:pPr>
+                        <a:defRPr b="1" sz="950">
+                          <a:solidFill>
+                            <a:srgbClr val="FFFFFF"/>
+                          </a:solidFill>
+                        </a:defRPr>
+                      </a:pPr>
+                      <a:r>
+                        <a:t>Tahapan Operasi</a:t>
+                      </a:r>
+                    </a:p>
+                  </a:txBody>
+                  <a:tcPr>
+                    <a:solidFill>
+                      <a:srgbClr val="002F5E"/>
+                    </a:solidFill>
+                  </a:tcPr>
+                </a:tc>
+                <a:tc>
+                  <a:txBody>
+                    <a:bodyPr/>
+                    <a:lstStyle/>
+                    <a:p>
+                      <a:pPr>
+                        <a:defRPr b="1" sz="950">
+                          <a:solidFill>
+                            <a:srgbClr val="FFFFFF"/>
+                          </a:solidFill>
+                        </a:defRPr>
+                      </a:pPr>
+                      <a:r>
+                        <a:t>Karakteristik Barangnya</a:t>
+                      </a:r>
+                    </a:p>
+                  </a:txBody>
+                  <a:tcPr>
+                    <a:solidFill>
+                      <a:srgbClr val="002F5E"/>
+                    </a:solidFill>
+                  </a:tcPr>
+                </a:tc>
+                <a:tc>
+                  <a:txBody>
+                    <a:bodyPr/>
+                    <a:lstStyle/>
+                    <a:p>
+                      <a:pPr>
+                        <a:defRPr b="1" sz="950">
+                          <a:solidFill>
+                            <a:srgbClr val="FFFFFF"/>
+                          </a:solidFill>
+                        </a:defRPr>
+                      </a:pPr>
+                      <a:r>
+                        <a:t>Siapa yang Nimbang &amp; Alat Sensor</a:t>
+                      </a:r>
+                    </a:p>
+                  </a:txBody>
+                  <a:tcPr>
+                    <a:solidFill>
+                      <a:srgbClr val="002F5E"/>
+                    </a:solidFill>
+                  </a:tcPr>
+                </a:tc>
+                <a:tc>
+                  <a:txBody>
+                    <a:bodyPr/>
+                    <a:lstStyle/>
+                    <a:p>
+                      <a:pPr>
+                        <a:defRPr b="1" sz="950">
+                          <a:solidFill>
+                            <a:srgbClr val="FFFFFF"/>
+                          </a:solidFill>
+                        </a:defRPr>
+                      </a:pPr>
+                      <a:r>
+                        <a:t>Siapa yang Ngangkat &amp; Operator</a:t>
+                      </a:r>
+                    </a:p>
+                  </a:txBody>
+                  <a:tcPr>
+                    <a:solidFill>
+                      <a:srgbClr val="002F5E"/>
+                    </a:solidFill>
+                  </a:tcPr>
+                </a:tc>
+                <a:tc>
+                  <a:txBody>
+                    <a:bodyPr/>
+                    <a:lstStyle/>
+                    <a:p>
+                      <a:pPr>
+                        <a:defRPr b="1" sz="950">
+                          <a:solidFill>
+                            <a:srgbClr val="FFFFFF"/>
+                          </a:solidFill>
+                        </a:defRPr>
+                      </a:pPr>
+                      <a:r>
+                        <a:t>Modul Sistem</a:t>
+                      </a:r>
+                    </a:p>
+                  </a:txBody>
+                  <a:tcPr>
+                    <a:solidFill>
+                      <a:srgbClr val="002F5E"/>
+                    </a:solidFill>
+                  </a:tcPr>
+                </a:tc>
+              </a:tr>
+              <a:tr h="693420">
+                <a:tc>
+                  <a:txBody>
+                    <a:bodyPr/>
+                    <a:lstStyle/>
+                    <a:p>
+                      <a:pPr>
+                        <a:defRPr sz="800">
+                          <a:solidFill>
+                            <a:srgbClr val="1E293B"/>
+                          </a:solidFill>
+                        </a:defRPr>
+                      </a:pPr>
+                      <a:r>
+                        <a:t>1. Gerbang Masuk</a:t>
+                      </a:r>
+                      <a:br/>
+                      <a:r>
+                        <a:t>(Gate-In Weighbridge)</a:t>
+                      </a:r>
+                    </a:p>
+                  </a:txBody>
+                  <a:tcPr>
+                    <a:solidFill>
+                      <a:srgbClr val="FFFFFF"/>
+                    </a:solidFill>
+                  </a:tcPr>
+                </a:tc>
+                <a:tc>
+                  <a:txBody>
+                    <a:bodyPr/>
+                    <a:lstStyle/>
+                    <a:p>
+                      <a:pPr>
+                        <a:defRPr sz="800">
+                          <a:solidFill>
+                            <a:srgbClr val="1E293B"/>
+                          </a:solidFill>
+                        </a:defRPr>
+                      </a:pPr>
+                      <a:r>
+                        <a:t>Semua Muatan Truk:</a:t>
+                      </a:r>
+                      <a:br/>
+                      <a:r>
+                        <a:t>• FCL Dry Kontainer</a:t>
+                      </a:r>
+                      <a:br/>
+                      <a:r>
+                        <a:t>• Reefer Container</a:t>
+                      </a:r>
+                      <a:br/>
+                      <a:r>
+                        <a:t>• LCL Loose Cargo</a:t>
+                      </a:r>
+                    </a:p>
+                  </a:txBody>
+                  <a:tcPr>
+                    <a:solidFill>
+                      <a:srgbClr val="FFFFFF"/>
+                    </a:solidFill>
+                  </a:tcPr>
+                </a:tc>
+                <a:tc>
+                  <a:txBody>
+                    <a:bodyPr/>
+                    <a:lstStyle/>
+                    <a:p>
+                      <a:pPr>
+                        <a:defRPr sz="800">
+                          <a:solidFill>
+                            <a:srgbClr val="1E293B"/>
+                          </a:solidFill>
+                        </a:defRPr>
+                      </a:pPr>
+                      <a:r>
+                        <a:t>• Sensor WCS: Jembatan Timbang Pitless 80 Ton (Avery Load Cell)</a:t>
+                      </a:r>
+                      <a:br/>
+                      <a:r>
+                        <a:t>• Role: External Truck Driver &amp; Tallyman Gate Inbound</a:t>
+                      </a:r>
+                      <a:br/>
+                      <a:r>
+                        <a:t>• Waktu: &lt; 3 detik pembacaan</a:t>
+                      </a:r>
+                    </a:p>
+                  </a:txBody>
+                  <a:tcPr>
+                    <a:solidFill>
+                      <a:srgbClr val="FFFFFF"/>
+                    </a:solidFill>
+                  </a:tcPr>
+                </a:tc>
+                <a:tc>
+                  <a:txBody>
+                    <a:bodyPr/>
+                    <a:lstStyle/>
+                    <a:p>
+                      <a:pPr>
+                        <a:defRPr sz="800">
+                          <a:solidFill>
+                            <a:srgbClr val="1E293B"/>
+                          </a:solidFill>
+                        </a:defRPr>
+                      </a:pPr>
+                      <a:r>
+                        <a:t>Belum diangkat (masih di atas sasis truk trailer flatbed). Dilakukan verifikasi batas legal 34 ton.</a:t>
+                      </a:r>
+                    </a:p>
+                  </a:txBody>
+                  <a:tcPr>
+                    <a:solidFill>
+                      <a:srgbClr val="FFFFFF"/>
+                    </a:solidFill>
+                  </a:tcPr>
+                </a:tc>
+                <a:tc>
+                  <a:txBody>
+                    <a:bodyPr/>
+                    <a:lstStyle/>
+                    <a:p>
+                      <a:pPr>
+                        <a:defRPr sz="800">
+                          <a:solidFill>
+                            <a:srgbClr val="1E293B"/>
+                          </a:solidFill>
+                        </a:defRPr>
+                      </a:pPr>
+                      <a:r>
+                        <a:t>WCS + YMS</a:t>
+                      </a:r>
+                      <a:br/>
+                      <a:r>
+                        <a:t>(pages/gate.php)</a:t>
+                      </a:r>
+                    </a:p>
+                  </a:txBody>
+                  <a:tcPr>
+                    <a:solidFill>
+                      <a:srgbClr val="FFFFFF"/>
+                    </a:solidFill>
+                  </a:tcPr>
+                </a:tc>
+              </a:tr>
+              <a:tr h="693420">
+                <a:tc>
+                  <a:txBody>
+                    <a:bodyPr/>
+                    <a:lstStyle/>
+                    <a:p>
+                      <a:pPr>
+                        <a:defRPr sz="800">
+                          <a:solidFill>
+                            <a:srgbClr val="1E293B"/>
+                          </a:solidFill>
+                        </a:defRPr>
+                      </a:pPr>
+                      <a:r>
+                        <a:t>2. Lapangan Penumpukan</a:t>
+                      </a:r>
+                      <a:br/>
+                      <a:r>
+                        <a:t>(Yard Stacking)</a:t>
+                      </a:r>
+                    </a:p>
+                  </a:txBody>
+                  <a:tcPr>
+                    <a:solidFill>
+                      <a:srgbClr val="F1F5F9"/>
+                    </a:solidFill>
+                  </a:tcPr>
+                </a:tc>
+                <a:tc>
+                  <a:txBody>
+                    <a:bodyPr/>
+                    <a:lstStyle/>
+                    <a:p>
+                      <a:pPr>
+                        <a:defRPr sz="800">
+                          <a:solidFill>
+                            <a:srgbClr val="1E293B"/>
+                          </a:solidFill>
+                        </a:defRPr>
+                      </a:pPr>
+                      <a:r>
+                        <a:t>Kontainer 40 Feet Laden</a:t>
+                      </a:r>
+                      <a:br/>
+                      <a:r>
+                        <a:t>(Peti kemas isi muatan berat, bobot 20 - 32 Ton)</a:t>
+                      </a:r>
+                    </a:p>
+                  </a:txBody>
+                  <a:tcPr>
+                    <a:solidFill>
+                      <a:srgbClr val="F1F5F9"/>
+                    </a:solidFill>
+                  </a:tcPr>
+                </a:tc>
+                <a:tc>
+                  <a:txBody>
+                    <a:bodyPr/>
+                    <a:lstStyle/>
+                    <a:p>
+                      <a:pPr>
+                        <a:defRPr sz="800">
+                          <a:solidFill>
+                            <a:srgbClr val="1E293B"/>
+                          </a:solidFill>
+                        </a:defRPr>
+                      </a:pPr>
+                      <a:r>
+                        <a:t>Data berat diambil otomatis dari timbangan gate &amp; dokumen VGM SOLAS yang tersimpan di database YMS.</a:t>
+                      </a:r>
+                    </a:p>
+                  </a:txBody>
+                  <a:tcPr>
+                    <a:solidFill>
+                      <a:srgbClr val="F1F5F9"/>
+                    </a:solidFill>
+                  </a:tcPr>
+                </a:tc>
+                <a:tc>
+                  <a:txBody>
+                    <a:bodyPr/>
+                    <a:lstStyle/>
+                    <a:p>
+                      <a:pPr>
+                        <a:defRPr sz="800">
+                          <a:solidFill>
+                            <a:srgbClr val="1E293B"/>
+                          </a:solidFill>
+                        </a:defRPr>
+                      </a:pPr>
+                      <a:r>
+                        <a:t>• SIAPA YANG NGANGKAT:</a:t>
+                      </a:r>
+                      <a:br/>
+                      <a:r>
+                        <a:t>  RTG Crane 45 Ton (Rubber Tyred Gantry) atau Reach Stacker 45 Ton.</a:t>
+                      </a:r>
+                      <a:br/>
+                      <a:r>
+                        <a:t>• OPERATOR: RTG Operator berlisensi SIO Kemnaker via VMT di kabin.</a:t>
+                      </a:r>
+                    </a:p>
+                  </a:txBody>
+                  <a:tcPr>
+                    <a:solidFill>
+                      <a:srgbClr val="F1F5F9"/>
+                    </a:solidFill>
+                  </a:tcPr>
+                </a:tc>
+                <a:tc>
+                  <a:txBody>
+                    <a:bodyPr/>
+                    <a:lstStyle/>
+                    <a:p>
+                      <a:pPr>
+                        <a:defRPr sz="800">
+                          <a:solidFill>
+                            <a:srgbClr val="1E293B"/>
+                          </a:solidFill>
+                        </a:defRPr>
+                      </a:pPr>
+                      <a:r>
+                        <a:t>YMS + WCS</a:t>
+                      </a:r>
+                      <a:br/>
+                      <a:r>
+                        <a:t>(pages/yard.php &amp;</a:t>
+                      </a:r>
+                      <a:br/>
+                      <a:r>
+                        <a:t>pages/alat.php)</a:t>
+                      </a:r>
+                    </a:p>
+                  </a:txBody>
+                  <a:tcPr>
+                    <a:solidFill>
+                      <a:srgbClr val="F1F5F9"/>
+                    </a:solidFill>
+                  </a:tcPr>
+                </a:tc>
+              </a:tr>
+              <a:tr h="693420">
+                <a:tc>
+                  <a:txBody>
+                    <a:bodyPr/>
+                    <a:lstStyle/>
+                    <a:p>
+                      <a:pPr>
+                        <a:defRPr sz="800">
+                          <a:solidFill>
+                            <a:srgbClr val="1E293B"/>
+                          </a:solidFill>
+                        </a:defRPr>
+                      </a:pPr>
+                      <a:r>
+                        <a:t>3. Penumpukan Kosong</a:t>
+                      </a:r>
+                      <a:br/>
+                      <a:r>
+                        <a:t>(Empty Stacking)</a:t>
+                      </a:r>
+                    </a:p>
+                  </a:txBody>
+                  <a:tcPr>
+                    <a:solidFill>
+                      <a:srgbClr val="FFFFFF"/>
+                    </a:solidFill>
+                  </a:tcPr>
+                </a:tc>
+                <a:tc>
+                  <a:txBody>
+                    <a:bodyPr/>
+                    <a:lstStyle/>
+                    <a:p>
+                      <a:pPr>
+                        <a:defRPr sz="800">
+                          <a:solidFill>
+                            <a:srgbClr val="1E293B"/>
+                          </a:solidFill>
+                        </a:defRPr>
+                      </a:pPr>
+                      <a:r>
+                        <a:t>Kontainer 20ft / 40ft Kosong</a:t>
+                      </a:r>
+                      <a:br/>
+                      <a:r>
+                        <a:t>(Empty Container, bobot tara 2,2 - 3,8 Ton)</a:t>
+                      </a:r>
+                    </a:p>
+                  </a:txBody>
+                  <a:tcPr>
+                    <a:solidFill>
+                      <a:srgbClr val="FFFFFF"/>
+                    </a:solidFill>
+                  </a:tcPr>
+                </a:tc>
+                <a:tc>
+                  <a:txBody>
+                    <a:bodyPr/>
+                    <a:lstStyle/>
+                    <a:p>
+                      <a:pPr>
+                        <a:defRPr sz="800">
+                          <a:solidFill>
+                            <a:srgbClr val="1E293B"/>
+                          </a:solidFill>
+                        </a:defRPr>
+                      </a:pPr>
+                      <a:r>
+                        <a:t>Ditimbang saat gate-in untuk verifikasi kondisi kosong (tare verification).</a:t>
+                      </a:r>
+                    </a:p>
+                  </a:txBody>
+                  <a:tcPr>
+                    <a:solidFill>
+                      <a:srgbClr val="FFFFFF"/>
+                    </a:solidFill>
+                  </a:tcPr>
+                </a:tc>
+                <a:tc>
+                  <a:txBody>
+                    <a:bodyPr/>
+                    <a:lstStyle/>
+                    <a:p>
+                      <a:pPr>
+                        <a:defRPr sz="800">
+                          <a:solidFill>
+                            <a:srgbClr val="1E293B"/>
+                          </a:solidFill>
+                        </a:defRPr>
+                      </a:pPr>
+                      <a:r>
+                        <a:t>• SIAPA YANG NGANGKAT:</a:t>
+                      </a:r>
+                      <a:br/>
+                      <a:r>
+                        <a:t>  Empty Container Handler (ECH) 10 Ton.</a:t>
+                      </a:r>
+                      <a:br/>
+                      <a:r>
+                        <a:t>• OPERATOR: ECH Operator berlisensi. Mampu menumpuk 6-8 tier.</a:t>
+                      </a:r>
+                    </a:p>
+                  </a:txBody>
+                  <a:tcPr>
+                    <a:solidFill>
+                      <a:srgbClr val="FFFFFF"/>
+                    </a:solidFill>
+                  </a:tcPr>
+                </a:tc>
+                <a:tc>
+                  <a:txBody>
+                    <a:bodyPr/>
+                    <a:lstStyle/>
+                    <a:p>
+                      <a:pPr>
+                        <a:defRPr sz="800">
+                          <a:solidFill>
+                            <a:srgbClr val="1E293B"/>
+                          </a:solidFill>
+                        </a:defRPr>
+                      </a:pPr>
+                      <a:r>
+                        <a:t>YMS + WCS</a:t>
+                      </a:r>
+                      <a:br/>
+                      <a:r>
+                        <a:t>(pages/alat.php)</a:t>
+                      </a:r>
+                    </a:p>
+                  </a:txBody>
+                  <a:tcPr>
+                    <a:solidFill>
+                      <a:srgbClr val="FFFFFF"/>
+                    </a:solidFill>
+                  </a:tcPr>
+                </a:tc>
+              </a:tr>
+              <a:tr h="693420">
+                <a:tc>
+                  <a:txBody>
+                    <a:bodyPr/>
+                    <a:lstStyle/>
+                    <a:p>
+                      <a:pPr>
+                        <a:defRPr sz="800">
+                          <a:solidFill>
+                            <a:srgbClr val="1E293B"/>
+                          </a:solidFill>
+                        </a:defRPr>
+                      </a:pPr>
+                      <a:r>
+                        <a:t>4. Gudang CFS</a:t>
+                      </a:r>
+                      <a:br/>
+                      <a:r>
+                        <a:t>(Stripping &amp; Stuffing)</a:t>
+                      </a:r>
+                    </a:p>
+                  </a:txBody>
+                  <a:tcPr>
+                    <a:solidFill>
+                      <a:srgbClr val="F1F5F9"/>
+                    </a:solidFill>
+                  </a:tcPr>
+                </a:tc>
+                <a:tc>
+                  <a:txBody>
+                    <a:bodyPr/>
+                    <a:lstStyle/>
+                    <a:p>
+                      <a:pPr>
+                        <a:defRPr sz="800">
+                          <a:solidFill>
+                            <a:srgbClr val="1E293B"/>
+                          </a:solidFill>
+                        </a:defRPr>
+                      </a:pPr>
+                      <a:r>
+                        <a:t>Kargo Curah / LCL / Palet</a:t>
+                      </a:r>
+                      <a:br/>
+                      <a:r>
+                        <a:t>(Karton, drum kimia non-DG, suku cadang mesin)</a:t>
+                      </a:r>
+                    </a:p>
+                  </a:txBody>
+                  <a:tcPr>
+                    <a:solidFill>
+                      <a:srgbClr val="F1F5F9"/>
+                    </a:solidFill>
+                  </a:tcPr>
+                </a:tc>
+                <a:tc>
+                  <a:txBody>
+                    <a:bodyPr/>
+                    <a:lstStyle/>
+                    <a:p>
+                      <a:pPr>
+                        <a:defRPr sz="800">
+                          <a:solidFill>
+                            <a:srgbClr val="1E293B"/>
+                          </a:solidFill>
+                        </a:defRPr>
+                      </a:pPr>
+                      <a:r>
+                        <a:t>• Sensor WCS: Timbangan Palet Digital &amp; DWS Mass Scanner di conveyor CFS.</a:t>
+                      </a:r>
+                      <a:br/>
+                      <a:r>
+                        <a:t>• Toleransi: ± 2%.</a:t>
+                      </a:r>
+                    </a:p>
+                  </a:txBody>
+                  <a:tcPr>
+                    <a:solidFill>
+                      <a:srgbClr val="F1F5F9"/>
+                    </a:solidFill>
+                  </a:tcPr>
+                </a:tc>
+                <a:tc>
+                  <a:txBody>
+                    <a:bodyPr/>
+                    <a:lstStyle/>
+                    <a:p>
+                      <a:pPr>
+                        <a:defRPr sz="800">
+                          <a:solidFill>
+                            <a:srgbClr val="1E293B"/>
+                          </a:solidFill>
+                        </a:defRPr>
+                      </a:pPr>
+                      <a:r>
+                        <a:t>• SIAPA YANG NGANGKAT:</a:t>
+                      </a:r>
+                      <a:br/>
+                      <a:r>
+                        <a:t>  Forklift 3-5 Ton (Diesel/Electric) &amp; Reach Truck CFS.</a:t>
+                      </a:r>
+                      <a:br/>
+                      <a:r>
+                        <a:t>• OPERATOR: Forklift Driver &amp; Tallyman CFS.</a:t>
+                      </a:r>
+                    </a:p>
+                  </a:txBody>
+                  <a:tcPr>
+                    <a:solidFill>
+                      <a:srgbClr val="F1F5F9"/>
+                    </a:solidFill>
+                  </a:tcPr>
+                </a:tc>
+                <a:tc>
+                  <a:txBody>
+                    <a:bodyPr/>
+                    <a:lstStyle/>
+                    <a:p>
+                      <a:pPr>
+                        <a:defRPr sz="800">
+                          <a:solidFill>
+                            <a:srgbClr val="1E293B"/>
+                          </a:solidFill>
+                        </a:defRPr>
+                      </a:pPr>
+                      <a:r>
+                        <a:t>WMS + WCS</a:t>
+                      </a:r>
+                      <a:br/>
+                      <a:r>
+                        <a:t>(pages/cfs.php &amp;</a:t>
+                      </a:r>
+                      <a:br/>
+                      <a:r>
+                        <a:t>master_rak.php)</a:t>
+                      </a:r>
+                    </a:p>
+                  </a:txBody>
+                  <a:tcPr>
+                    <a:solidFill>
+                      <a:srgbClr val="F1F5F9"/>
+                    </a:solidFill>
+                  </a:tcPr>
+                </a:tc>
+              </a:tr>
+              <a:tr h="693420">
+                <a:tc>
+                  <a:txBody>
+                    <a:bodyPr/>
+                    <a:lstStyle/>
+                    <a:p>
+                      <a:pPr>
+                        <a:defRPr sz="800">
+                          <a:solidFill>
+                            <a:srgbClr val="1E293B"/>
+                          </a:solidFill>
+                        </a:defRPr>
+                      </a:pPr>
+                      <a:r>
+                        <a:t>5. Rel Siding KA 600M</a:t>
+                      </a:r>
+                      <a:br/>
+                      <a:r>
+                        <a:t>(Intermodal Rail)</a:t>
+                      </a:r>
+                    </a:p>
+                  </a:txBody>
+                  <a:tcPr>
+                    <a:solidFill>
+                      <a:srgbClr val="FFFFFF"/>
+                    </a:solidFill>
+                  </a:tcPr>
+                </a:tc>
+                <a:tc>
+                  <a:txBody>
+                    <a:bodyPr/>
+                    <a:lstStyle/>
+                    <a:p>
+                      <a:pPr>
+                        <a:defRPr sz="800">
+                          <a:solidFill>
+                            <a:srgbClr val="1E293B"/>
+                          </a:solidFill>
+                        </a:defRPr>
+                      </a:pPr>
+                      <a:r>
+                        <a:t>Kontainer 20ft &amp; 40ft</a:t>
+                      </a:r>
+                      <a:br/>
+                      <a:r>
+                        <a:t>(Muatan intermodal ekspor/impor KAI Logistik)</a:t>
+                      </a:r>
+                    </a:p>
+                  </a:txBody>
+                  <a:tcPr>
+                    <a:solidFill>
+                      <a:srgbClr val="FFFFFF"/>
+                    </a:solidFill>
+                  </a:tcPr>
+                </a:tc>
+                <a:tc>
+                  <a:txBody>
+                    <a:bodyPr/>
+                    <a:lstStyle/>
+                    <a:p>
+                      <a:pPr>
+                        <a:defRPr sz="800">
+                          <a:solidFill>
+                            <a:srgbClr val="1E293B"/>
+                          </a:solidFill>
+                        </a:defRPr>
+                      </a:pPr>
+                      <a:r>
+                        <a:t>Timbangan dinamis gandar rel (Rail Weigh-in-Motion) batas maks 15 ton/gandar.</a:t>
+                      </a:r>
+                    </a:p>
+                  </a:txBody>
+                  <a:tcPr>
+                    <a:solidFill>
+                      <a:srgbClr val="FFFFFF"/>
+                    </a:solidFill>
+                  </a:tcPr>
+                </a:tc>
+                <a:tc>
+                  <a:txBody>
+                    <a:bodyPr/>
+                    <a:lstStyle/>
+                    <a:p>
+                      <a:pPr>
+                        <a:defRPr sz="800">
+                          <a:solidFill>
+                            <a:srgbClr val="1E293B"/>
+                          </a:solidFill>
+                        </a:defRPr>
+                      </a:pPr>
+                      <a:r>
+                        <a:t>• SIAPA YANG NGANGKAT:</a:t>
+                      </a:r>
+                      <a:br/>
+                      <a:r>
+                        <a:t>  Rail Mounted Gantry (RMG) Crane 45 Ton / Reach Stacker Intermodal.</a:t>
+                      </a:r>
+                      <a:br/>
+                      <a:r>
+                        <a:t>• OPERATOR: Intermodal Crane Operator.</a:t>
+                      </a:r>
+                    </a:p>
+                  </a:txBody>
+                  <a:tcPr>
+                    <a:solidFill>
+                      <a:srgbClr val="FFFFFF"/>
+                    </a:solidFill>
+                  </a:tcPr>
+                </a:tc>
+                <a:tc>
+                  <a:txBody>
+                    <a:bodyPr/>
+                    <a:lstStyle/>
+                    <a:p>
+                      <a:pPr>
+                        <a:defRPr sz="800">
+                          <a:solidFill>
+                            <a:srgbClr val="1E293B"/>
+                          </a:solidFill>
+                        </a:defRPr>
+                      </a:pPr>
+                      <a:r>
+                        <a:t>TMS + YMS</a:t>
+                      </a:r>
+                      <a:br/>
+                      <a:r>
+                        <a:t>(pages/intermodal.php)</a:t>
+                      </a:r>
+                    </a:p>
+                  </a:txBody>
+                  <a:tcPr>
+                    <a:solidFill>
+                      <a:srgbClr val="FFFFFF"/>
+                    </a:solidFill>
+                  </a:tcPr>
+                </a:tc>
+              </a:tr>
+            </a:tbl>
+          </a:graphicData>
+        </a:graphic>
+      </p:graphicFrame>
+      <p:sp>
+        <p:nvSpPr>
+          <p:cNvPr id="6" name="Rounded Rectangle 5"/>
           <p:cNvSpPr/>
           <p:nvPr/>
         </p:nvSpPr>
         <p:spPr>
           <a:xfrm>
-            <a:off x="731520" y="1508760"/>
-            <a:ext cx="2029968" cy="4160520"/>
-          </a:xfrm>
-          <a:prstGeom prst="roundRect">
-            <a:avLst/>
-          </a:prstGeom>
-          <a:solidFill>
-            <a:srgbClr val="FFFFFF"/>
-          </a:solidFill>
-          <a:ln w="12700">
-            <a:solidFill>
-              <a:srgbClr val="E2E8F0"/>
-            </a:solidFill>
-          </a:ln>
-        </p:spPr>
-        <p:style>
-          <a:lnRef idx="1">
-            <a:schemeClr val="accent1"/>
-          </a:lnRef>
-          <a:fillRef idx="3">
-            <a:schemeClr val="accent1"/>
-          </a:fillRef>
-          <a:effectRef idx="2">
-            <a:schemeClr val="accent1"/>
-          </a:effectRef>
-          <a:fontRef idx="minor">
-            <a:schemeClr val="lt1"/>
-          </a:fontRef>
-        </p:style>
-        <p:txBody>
-          <a:bodyPr rtlCol="0" anchor="ctr"/>
-          <a:lstStyle/>
-          <a:p>
-            <a:pPr algn="ctr"/>
-          </a:p>
-        </p:txBody>
-      </p:sp>
-      <p:sp>
-        <p:nvSpPr>
-          <p:cNvPr id="6" name="TextBox 5"/>
-          <p:cNvSpPr txBox="1"/>
-          <p:nvPr/>
-        </p:nvSpPr>
-        <p:spPr>
-          <a:xfrm>
-            <a:off x="822960" y="1645920"/>
-            <a:ext cx="1847088" cy="3886200"/>
-          </a:xfrm>
-          <a:prstGeom prst="rect">
-            <a:avLst/>
-          </a:prstGeom>
-          <a:noFill/>
-        </p:spPr>
-        <p:txBody>
-          <a:bodyPr wrap="square">
-            <a:spAutoFit/>
-          </a:bodyPr>
-          <a:lstStyle/>
-          <a:p>
-            <a:pPr>
-              <a:defRPr sz="850" b="1">
-                <a:solidFill>
-                  <a:srgbClr val="0170B9"/>
-                </a:solidFill>
-              </a:defRPr>
-            </a:pPr>
-            <a:r>
-              <a:t>STAGE 1: GATE-IN</a:t>
-            </a:r>
-          </a:p>
-          <a:p>
-            <a:pPr>
-              <a:spcBef>
-                <a:spcPts val="100"/>
-              </a:spcBef>
-              <a:defRPr sz="1100" b="1">
-                <a:solidFill>
-                  <a:srgbClr val="002F5E"/>
-                </a:solidFill>
-              </a:defRPr>
-            </a:pPr>
-            <a:r>
-              <a:t>Truk Timbang &amp; OCR</a:t>
-            </a:r>
-          </a:p>
-          <a:p>
-            <a:pPr>
-              <a:spcBef>
-                <a:spcPts val="300"/>
-              </a:spcBef>
-              <a:defRPr sz="750">
-                <a:solidFill>
-                  <a:srgbClr val="1E293B"/>
-                </a:solidFill>
-              </a:defRPr>
-            </a:pPr>
-            <a:r>
-              <a:t>• Decision Point:</a:t>
-            </a:r>
-            <a:br/>
-            <a:r>
-              <a:t>  Berat Total &lt;= 34t &amp; Check Digit ISO Sah?</a:t>
-            </a:r>
-            <a:br/>
-            <a:br/>
-            <a:r>
-              <a:t>• [JIKA YA]:</a:t>
-            </a:r>
-            <a:br/>
-            <a:r>
-              <a:t>  Cetak e-Pass QR, palang buka, truk masuk ke zona tujuan.</a:t>
-            </a:r>
-            <a:br/>
-            <a:br/>
-            <a:r>
-              <a:t>• [JIKA TIDAK]:</a:t>
-            </a:r>
-            <a:br/>
-            <a:r>
-              <a:t>  Palang terkunci, sirine bunyi, truk tolak belok Jalur U-Turn.</a:t>
-            </a:r>
-            <a:br/>
-            <a:br/>
-            <a:r>
-              <a:t>• Menggunakan Apa:</a:t>
-            </a:r>
-            <a:br/>
-            <a:r>
-              <a:t>  Timbangan Pitless 80t Avery, Kamera ANPR 4K, Barrier Gate.</a:t>
-            </a:r>
-          </a:p>
-        </p:txBody>
-      </p:sp>
-      <p:sp>
-        <p:nvSpPr>
-          <p:cNvPr id="7" name="Rounded Rectangle 6"/>
-          <p:cNvSpPr/>
-          <p:nvPr/>
-        </p:nvSpPr>
-        <p:spPr>
-          <a:xfrm>
-            <a:off x="2898648" y="1508760"/>
-            <a:ext cx="2029968" cy="4160520"/>
-          </a:xfrm>
-          <a:prstGeom prst="roundRect">
-            <a:avLst/>
-          </a:prstGeom>
-          <a:solidFill>
-            <a:srgbClr val="FFFFFF"/>
-          </a:solidFill>
-          <a:ln w="12700">
-            <a:solidFill>
-              <a:srgbClr val="E2E8F0"/>
-            </a:solidFill>
-          </a:ln>
-        </p:spPr>
-        <p:style>
-          <a:lnRef idx="1">
-            <a:schemeClr val="accent1"/>
-          </a:lnRef>
-          <a:fillRef idx="3">
-            <a:schemeClr val="accent1"/>
-          </a:fillRef>
-          <a:effectRef idx="2">
-            <a:schemeClr val="accent1"/>
-          </a:effectRef>
-          <a:fontRef idx="minor">
-            <a:schemeClr val="lt1"/>
-          </a:fontRef>
-        </p:style>
-        <p:txBody>
-          <a:bodyPr rtlCol="0" anchor="ctr"/>
-          <a:lstStyle/>
-          <a:p>
-            <a:pPr algn="ctr"/>
-          </a:p>
-        </p:txBody>
-      </p:sp>
-      <p:sp>
-        <p:nvSpPr>
-          <p:cNvPr id="8" name="TextBox 7"/>
-          <p:cNvSpPr txBox="1"/>
-          <p:nvPr/>
-        </p:nvSpPr>
-        <p:spPr>
-          <a:xfrm>
-            <a:off x="2990088" y="1645920"/>
-            <a:ext cx="1847088" cy="3886200"/>
-          </a:xfrm>
-          <a:prstGeom prst="rect">
-            <a:avLst/>
-          </a:prstGeom>
-          <a:noFill/>
-        </p:spPr>
-        <p:txBody>
-          <a:bodyPr wrap="square">
-            <a:spAutoFit/>
-          </a:bodyPr>
-          <a:lstStyle/>
-          <a:p>
-            <a:pPr>
-              <a:defRPr sz="850" b="1">
-                <a:solidFill>
-                  <a:srgbClr val="6366F1"/>
-                </a:solidFill>
-              </a:defRPr>
-            </a:pPr>
-            <a:r>
-              <a:t>STAGE 2: YARD STACK</a:t>
-            </a:r>
-          </a:p>
-          <a:p>
-            <a:pPr>
-              <a:spcBef>
-                <a:spcPts val="100"/>
-              </a:spcBef>
-              <a:defRPr sz="1100" b="1">
-                <a:solidFill>
-                  <a:srgbClr val="002F5E"/>
-                </a:solidFill>
-              </a:defRPr>
-            </a:pPr>
-            <a:r>
-              <a:t>Lift-Off &amp; Penataan 3D</a:t>
-            </a:r>
-          </a:p>
-          <a:p>
-            <a:pPr>
-              <a:spcBef>
-                <a:spcPts val="300"/>
-              </a:spcBef>
-              <a:defRPr sz="750">
-                <a:solidFill>
-                  <a:srgbClr val="1E293B"/>
-                </a:solidFill>
-              </a:defRPr>
-            </a:pPr>
-            <a:r>
-              <a:t>• Decision Point:</a:t>
-            </a:r>
-            <a:br/>
-            <a:r>
-              <a:t>  Boks 20ft vs 40ft? Lolos Aturan Anti-Floating?</a:t>
-            </a:r>
-            <a:br/>
-            <a:br/>
-            <a:r>
-              <a:t>• [JIKA YA]:</a:t>
-            </a:r>
-            <a:br/>
-            <a:r>
-              <a:t>  20ft ke Bay Ganjil; 40ft ke Bay Genap. Laden di Tier 1-2.</a:t>
-            </a:r>
-            <a:br/>
-            <a:br/>
-            <a:r>
-              <a:t>• [JIKA TIDAK]:</a:t>
-            </a:r>
-            <a:br/>
-            <a:r>
-              <a:t>  YMS tolak putaway, alarm tablet operator bunyi, arahkan bin lain.</a:t>
-            </a:r>
-            <a:br/>
-            <a:br/>
-            <a:r>
-              <a:t>• Menggunakan Apa:</a:t>
-            </a:r>
-            <a:br/>
-            <a:r>
-              <a:t>  3 RS 45t Kalmar (Spreader Telescopic), 1 RTG 40t, VMT.</a:t>
-            </a:r>
-          </a:p>
-        </p:txBody>
-      </p:sp>
-      <p:sp>
-        <p:nvSpPr>
-          <p:cNvPr id="9" name="Rounded Rectangle 8"/>
-          <p:cNvSpPr/>
-          <p:nvPr/>
-        </p:nvSpPr>
-        <p:spPr>
-          <a:xfrm>
-            <a:off x="5065776" y="1508760"/>
-            <a:ext cx="2029968" cy="4160520"/>
-          </a:xfrm>
-          <a:prstGeom prst="roundRect">
-            <a:avLst/>
-          </a:prstGeom>
-          <a:solidFill>
-            <a:srgbClr val="FFFFFF"/>
-          </a:solidFill>
-          <a:ln w="12700">
-            <a:solidFill>
-              <a:srgbClr val="E2E8F0"/>
-            </a:solidFill>
-          </a:ln>
-        </p:spPr>
-        <p:style>
-          <a:lnRef idx="1">
-            <a:schemeClr val="accent1"/>
-          </a:lnRef>
-          <a:fillRef idx="3">
-            <a:schemeClr val="accent1"/>
-          </a:fillRef>
-          <a:effectRef idx="2">
-            <a:schemeClr val="accent1"/>
-          </a:effectRef>
-          <a:fontRef idx="minor">
-            <a:schemeClr val="lt1"/>
-          </a:fontRef>
-        </p:style>
-        <p:txBody>
-          <a:bodyPr rtlCol="0" anchor="ctr"/>
-          <a:lstStyle/>
-          <a:p>
-            <a:pPr algn="ctr"/>
-          </a:p>
-        </p:txBody>
-      </p:sp>
-      <p:sp>
-        <p:nvSpPr>
-          <p:cNvPr id="10" name="TextBox 9"/>
-          <p:cNvSpPr txBox="1"/>
-          <p:nvPr/>
-        </p:nvSpPr>
-        <p:spPr>
-          <a:xfrm>
-            <a:off x="5157216" y="1645920"/>
-            <a:ext cx="1847088" cy="3886200"/>
-          </a:xfrm>
-          <a:prstGeom prst="rect">
-            <a:avLst/>
-          </a:prstGeom>
-          <a:noFill/>
-        </p:spPr>
-        <p:txBody>
-          <a:bodyPr wrap="square">
-            <a:spAutoFit/>
-          </a:bodyPr>
-          <a:lstStyle/>
-          <a:p>
-            <a:pPr>
-              <a:defRPr sz="850" b="1">
-                <a:solidFill>
-                  <a:srgbClr val="9333EA"/>
-                </a:solidFill>
-              </a:defRPr>
-            </a:pPr>
-            <a:r>
-              <a:t>STAGE 3: FASILITAS</a:t>
-            </a:r>
-          </a:p>
-          <a:p>
-            <a:pPr>
-              <a:spcBef>
-                <a:spcPts val="100"/>
-              </a:spcBef>
-              <a:defRPr sz="1100" b="1">
-                <a:solidFill>
-                  <a:srgbClr val="002F5E"/>
-                </a:solidFill>
-              </a:defRPr>
-            </a:pPr>
-            <a:r>
-              <a:t>Reefer &amp; CFS Inbound</a:t>
-            </a:r>
-          </a:p>
-          <a:p>
-            <a:pPr>
-              <a:spcBef>
-                <a:spcPts val="300"/>
-              </a:spcBef>
-              <a:defRPr sz="750">
-                <a:solidFill>
-                  <a:srgbClr val="1E293B"/>
-                </a:solidFill>
-              </a:defRPr>
-            </a:pPr>
-            <a:r>
-              <a:t>• Decision Point:</a:t>
-            </a:r>
-            <a:br/>
-            <a:r>
-              <a:t>  Suhu -18C s/d -25C? Barcode GS1 SSCC Valid?</a:t>
-            </a:r>
-            <a:br/>
-            <a:br/>
-            <a:r>
-              <a:t>• [JIKA YA]:</a:t>
-            </a:r>
-            <a:br/>
-            <a:r>
-              <a:t>  Colok steker 380V; Forklift susun palet ke rak bin CFS.</a:t>
-            </a:r>
-            <a:br/>
-            <a:br/>
-            <a:r>
-              <a:t>• [JIKA TIDAK]:</a:t>
-            </a:r>
-            <a:br/>
-            <a:r>
-              <a:t>  Alarm Reefer + failover Genset; Barcode cacat cetak ulang (BLOCKED).</a:t>
-            </a:r>
-            <a:br/>
-            <a:br/>
-            <a:r>
-              <a:t>• Menggunakan Apa:</a:t>
-            </a:r>
-            <a:br/>
-            <a:r>
-              <a:t>  300 Soket CEE 380V, Genset 1.250kVA, Forklift 3t, PDA Zebra.</a:t>
-            </a:r>
-          </a:p>
-        </p:txBody>
-      </p:sp>
-      <p:sp>
-        <p:nvSpPr>
-          <p:cNvPr id="11" name="Rounded Rectangle 10"/>
-          <p:cNvSpPr/>
-          <p:nvPr/>
-        </p:nvSpPr>
-        <p:spPr>
-          <a:xfrm>
-            <a:off x="7232904" y="1508760"/>
-            <a:ext cx="2029968" cy="4160520"/>
-          </a:xfrm>
-          <a:prstGeom prst="roundRect">
-            <a:avLst/>
-          </a:prstGeom>
-          <a:solidFill>
-            <a:srgbClr val="FFFFFF"/>
-          </a:solidFill>
-          <a:ln w="12700">
-            <a:solidFill>
-              <a:srgbClr val="E2E8F0"/>
-            </a:solidFill>
-          </a:ln>
-        </p:spPr>
-        <p:style>
-          <a:lnRef idx="1">
-            <a:schemeClr val="accent1"/>
-          </a:lnRef>
-          <a:fillRef idx="3">
-            <a:schemeClr val="accent1"/>
-          </a:fillRef>
-          <a:effectRef idx="2">
-            <a:schemeClr val="accent1"/>
-          </a:effectRef>
-          <a:fontRef idx="minor">
-            <a:schemeClr val="lt1"/>
-          </a:fontRef>
-        </p:style>
-        <p:txBody>
-          <a:bodyPr rtlCol="0" anchor="ctr"/>
-          <a:lstStyle/>
-          <a:p>
-            <a:pPr algn="ctr"/>
-          </a:p>
-        </p:txBody>
-      </p:sp>
-      <p:sp>
-        <p:nvSpPr>
-          <p:cNvPr id="12" name="TextBox 11"/>
-          <p:cNvSpPr txBox="1"/>
-          <p:nvPr/>
-        </p:nvSpPr>
-        <p:spPr>
-          <a:xfrm>
-            <a:off x="7324344" y="1645920"/>
-            <a:ext cx="1847088" cy="3886200"/>
-          </a:xfrm>
-          <a:prstGeom prst="rect">
-            <a:avLst/>
-          </a:prstGeom>
-          <a:noFill/>
-        </p:spPr>
-        <p:txBody>
-          <a:bodyPr wrap="square">
-            <a:spAutoFit/>
-          </a:bodyPr>
-          <a:lstStyle/>
-          <a:p>
-            <a:pPr>
-              <a:defRPr sz="850" b="1">
-                <a:solidFill>
-                  <a:srgbClr val="0170B9"/>
-                </a:solidFill>
-              </a:defRPr>
-            </a:pPr>
-            <a:r>
-              <a:t>STAGE 4: KEPABEANAN</a:t>
-            </a:r>
-          </a:p>
-          <a:p>
-            <a:pPr>
-              <a:spcBef>
-                <a:spcPts val="100"/>
-              </a:spcBef>
-              <a:defRPr sz="1100" b="1">
-                <a:solidFill>
-                  <a:srgbClr val="002F5E"/>
-                </a:solidFill>
-              </a:defRPr>
-            </a:pPr>
-            <a:r>
-              <a:t>CEISA 4.0 &amp; Rel Kereta</a:t>
-            </a:r>
-          </a:p>
-          <a:p>
-            <a:pPr>
-              <a:spcBef>
-                <a:spcPts val="300"/>
-              </a:spcBef>
-              <a:defRPr sz="750">
-                <a:solidFill>
-                  <a:srgbClr val="1E293B"/>
-                </a:solidFill>
-              </a:defRPr>
-            </a:pPr>
-            <a:r>
-              <a:t>• Decision Point:</a:t>
-            </a:r>
-            <a:br/>
-            <a:r>
-              <a:t>  Profil Hijau vs Merah? Smart E-Seal Rel Utuh?</a:t>
-            </a:r>
-            <a:br/>
-            <a:br/>
-            <a:r>
-              <a:t>• [JIKA YA]:</a:t>
-            </a:r>
-            <a:br/>
-            <a:r>
-              <a:t>  SPPB rilis &lt;5 mnt; Muat 30 GD KA (60 TEU) jalan 90 mnt.</a:t>
-            </a:r>
-            <a:br/>
-            <a:br/>
-            <a:r>
-              <a:t>• [JIKA TIDAK]:</a:t>
-            </a:r>
-            <a:br/>
-            <a:r>
-              <a:t>  Jalur Merah ke Behandle X-Ray; Kawat putus picu Tamper Alert.</a:t>
-            </a:r>
-            <a:br/>
-            <a:br/>
-            <a:r>
-              <a:t>• Menggunakan Apa:</a:t>
-            </a:r>
-            <a:br/>
-            <a:r>
-              <a:t>  Webhook CEISA, Gantry X-Ray 6 MeV, Lok CC206, E-Seal Satelit.</a:t>
-            </a:r>
-          </a:p>
-        </p:txBody>
-      </p:sp>
-      <p:sp>
-        <p:nvSpPr>
-          <p:cNvPr id="13" name="Rounded Rectangle 12"/>
-          <p:cNvSpPr/>
-          <p:nvPr/>
-        </p:nvSpPr>
-        <p:spPr>
-          <a:xfrm>
-            <a:off x="9400032" y="1508760"/>
-            <a:ext cx="2029968" cy="4160520"/>
-          </a:xfrm>
-          <a:prstGeom prst="roundRect">
-            <a:avLst/>
-          </a:prstGeom>
-          <a:solidFill>
-            <a:srgbClr val="FFFFFF"/>
-          </a:solidFill>
-          <a:ln w="12700">
-            <a:solidFill>
-              <a:srgbClr val="E2E8F0"/>
-            </a:solidFill>
-          </a:ln>
-        </p:spPr>
-        <p:style>
-          <a:lnRef idx="1">
-            <a:schemeClr val="accent1"/>
-          </a:lnRef>
-          <a:fillRef idx="3">
-            <a:schemeClr val="accent1"/>
-          </a:fillRef>
-          <a:effectRef idx="2">
-            <a:schemeClr val="accent1"/>
-          </a:effectRef>
-          <a:fontRef idx="minor">
-            <a:schemeClr val="lt1"/>
-          </a:fontRef>
-        </p:style>
-        <p:txBody>
-          <a:bodyPr rtlCol="0" anchor="ctr"/>
-          <a:lstStyle/>
-          <a:p>
-            <a:pPr algn="ctr"/>
-          </a:p>
-        </p:txBody>
-      </p:sp>
-      <p:sp>
-        <p:nvSpPr>
-          <p:cNvPr id="14" name="TextBox 13"/>
-          <p:cNvSpPr txBox="1"/>
-          <p:nvPr/>
-        </p:nvSpPr>
-        <p:spPr>
-          <a:xfrm>
-            <a:off x="9491472" y="1645920"/>
-            <a:ext cx="1847088" cy="3886200"/>
-          </a:xfrm>
-          <a:prstGeom prst="rect">
-            <a:avLst/>
-          </a:prstGeom>
-          <a:noFill/>
-        </p:spPr>
-        <p:txBody>
-          <a:bodyPr wrap="square">
-            <a:spAutoFit/>
-          </a:bodyPr>
-          <a:lstStyle/>
-          <a:p>
-            <a:pPr>
-              <a:defRPr sz="850" b="1">
-                <a:solidFill>
-                  <a:srgbClr val="10B981"/>
-                </a:solidFill>
-              </a:defRPr>
-            </a:pPr>
-            <a:r>
-              <a:t>STAGE 5: GATE-OUT</a:t>
-            </a:r>
-          </a:p>
-          <a:p>
-            <a:pPr>
-              <a:spcBef>
-                <a:spcPts val="100"/>
-              </a:spcBef>
-              <a:defRPr sz="1100" b="1">
-                <a:solidFill>
-                  <a:srgbClr val="002F5E"/>
-                </a:solidFill>
-              </a:defRPr>
-            </a:pPr>
-            <a:r>
-              <a:t>Billing Zero Leakage</a:t>
-            </a:r>
-          </a:p>
-          <a:p>
-            <a:pPr>
-              <a:spcBef>
-                <a:spcPts val="300"/>
-              </a:spcBef>
-              <a:defRPr sz="750">
-                <a:solidFill>
-                  <a:srgbClr val="1E293B"/>
-                </a:solidFill>
-              </a:defRPr>
-            </a:pPr>
-            <a:r>
-              <a:t>• Decision Point:</a:t>
-            </a:r>
-            <a:br/>
-            <a:r>
-              <a:t>  Invoice Odoo PAID &amp; Dokumen SPPB Cleared?</a:t>
-            </a:r>
-            <a:br/>
-            <a:br/>
-            <a:r>
-              <a:t>• [JIKA YA]:</a:t>
-            </a:r>
-            <a:br/>
-            <a:r>
-              <a:t>  Palang terbuka, foto ANPR e-Exit Pass, kargo rilis.</a:t>
-            </a:r>
-            <a:br/>
-            <a:br/>
-            <a:r>
-              <a:t>• [JIKA TIDAK]:</a:t>
-            </a:r>
-            <a:br/>
-            <a:r>
-              <a:t>  Palang KUNCI PERMANEN, VMS suruh ke kasir, truk ke Holding Lane.</a:t>
-            </a:r>
-            <a:br/>
-            <a:br/>
-            <a:r>
-              <a:t>• Menggunakan Apa:</a:t>
-            </a:r>
-            <a:br/>
-            <a:r>
-              <a:t>  ERP Odoo Finance Webhook, Barrier Gate, Display LED VMS.</a:t>
-            </a:r>
-          </a:p>
-        </p:txBody>
-      </p:sp>
-      <p:sp>
-        <p:nvSpPr>
-          <p:cNvPr id="15" name="Rounded Rectangle 14"/>
-          <p:cNvSpPr/>
-          <p:nvPr/>
-        </p:nvSpPr>
-        <p:spPr>
-          <a:xfrm>
-            <a:off x="731520" y="5779008"/>
+            <a:off x="731520" y="5852160"/>
             <a:ext cx="10698480" cy="438912"/>
           </a:xfrm>
           <a:prstGeom prst="roundRect">
@@ -7344,7 +8703,7 @@
               </a:defRPr>
             </a:pPr>
             <a:r>
-              <a:t>👉  ARSITEKTUR KEPUTUSAN TERPADU: 5 Gatepoints Menjamin Kepatuhan Regulasi &amp; Zero Revenue Leakage!</a:t>
+              <a:t>👉  Jawaban Notulensi: Kontainer 40ft diangkat RTG / Reach Stacker 45T; Kosong oleh ECH; Palet CFS oleh Forklift 3-5T.</a:t>
             </a:r>
           </a:p>
         </p:txBody>
@@ -7376,7 +8735,7 @@
         <p:spPr>
           <a:xfrm>
             <a:off x="731520" y="256032"/>
-            <a:ext cx="7498079" cy="1051560"/>
+            <a:ext cx="7772400" cy="1051560"/>
           </a:xfrm>
           <a:prstGeom prst="rect">
             <a:avLst/>
@@ -7412,7 +8771,7 @@
               </a:defRPr>
             </a:pPr>
             <a:r>
-              <a:t>Flow 1: Gerbang Masuk &amp; Timbangan Dinamis (WCS + YMS)</a:t>
+              <a:t>Flowchart 1: Master End-to-End Decision Flowchart Terminal CIDP</a:t>
             </a:r>
           </a:p>
         </p:txBody>
@@ -7425,8 +8784,8 @@
         </p:nvSpPr>
         <p:spPr>
           <a:xfrm>
-            <a:off x="8321040" y="237744"/>
-            <a:ext cx="3108960" cy="932688"/>
+            <a:off x="8412480" y="237744"/>
+            <a:ext cx="3017520" cy="932688"/>
           </a:xfrm>
           <a:prstGeom prst="roundRect">
             <a:avLst/>
@@ -7481,7 +8840,7 @@
               </a:defRPr>
             </a:pPr>
             <a:r>
-              <a:t>pages/gate.php</a:t>
+              <a:t>dashboard.php?page=simulator</a:t>
             </a:r>
           </a:p>
           <a:p>
@@ -7496,7 +8855,7 @@
               </a:defRPr>
             </a:pPr>
             <a:r>
-              <a:t>http://localhost/.../pages/gate.php</a:t>
+              <a:t>http://localhost/.../simulator.php</a:t>
             </a:r>
           </a:p>
         </p:txBody>
@@ -7531,391 +8890,44 @@
               </a:defRPr>
             </a:pPr>
             <a:r>
-              <a:t>Conclusion Supply Chain Consultant  •  Naufal Andika Heditya &amp; Zulfikar J. Fatah  •  Topik 7: CIDP 35 Ha                    Slide 4 of 12</a:t>
-            </a:r>
-          </a:p>
-        </p:txBody>
-      </p:sp>
-      <p:sp>
-        <p:nvSpPr>
-          <p:cNvPr id="5" name="Rounded Rectangle 4"/>
-          <p:cNvSpPr/>
+              <a:t>Conclusion Supply Chain Consultant  •  Naufal Andika Heditya &amp; Zulfikar J. Fatah  •  Topik 7: CIDP 35 Ha                    Slide 4 of 16</a:t>
+            </a:r>
+          </a:p>
+        </p:txBody>
+      </p:sp>
+      <p:pic>
+        <p:nvPicPr>
+          <p:cNvPr id="5" name="Picture 4" descr="FLOWCHART_END_TO_END_PROSES_BISNIS_CIDP.jpg"/>
+          <p:cNvPicPr>
+            <a:picLocks noChangeAspect="1"/>
+          </p:cNvPicPr>
           <p:nvPr/>
-        </p:nvSpPr>
-        <p:spPr>
-          <a:xfrm>
-            <a:off x="731520" y="1508760"/>
-            <a:ext cx="5212080" cy="2926080"/>
-          </a:xfrm>
-          <a:prstGeom prst="roundRect">
-            <a:avLst/>
-          </a:prstGeom>
-          <a:solidFill>
-            <a:srgbClr val="ECFDF5"/>
-          </a:solidFill>
-          <a:ln w="12700">
-            <a:solidFill>
-              <a:srgbClr val="10B981"/>
-            </a:solidFill>
-          </a:ln>
-        </p:spPr>
-        <p:style>
-          <a:lnRef idx="1">
-            <a:schemeClr val="accent1"/>
-          </a:lnRef>
-          <a:fillRef idx="3">
-            <a:schemeClr val="accent1"/>
-          </a:fillRef>
-          <a:effectRef idx="2">
-            <a:schemeClr val="accent1"/>
-          </a:effectRef>
-          <a:fontRef idx="minor">
-            <a:schemeClr val="lt1"/>
-          </a:fontRef>
-        </p:style>
-        <p:txBody>
-          <a:bodyPr rtlCol="0" anchor="ctr"/>
-          <a:lstStyle/>
-          <a:p>
-            <a:pPr algn="ctr"/>
-          </a:p>
-        </p:txBody>
-      </p:sp>
-      <p:sp>
-        <p:nvSpPr>
-          <p:cNvPr id="6" name="TextBox 5"/>
-          <p:cNvSpPr txBox="1"/>
-          <p:nvPr/>
-        </p:nvSpPr>
-        <p:spPr>
-          <a:xfrm>
-            <a:off x="914400" y="1645920"/>
-            <a:ext cx="4846320" cy="2651760"/>
+        </p:nvPicPr>
+        <p:blipFill>
+          <a:blip r:embed="rId2"/>
+          <a:stretch>
+            <a:fillRect/>
+          </a:stretch>
+        </p:blipFill>
+        <p:spPr>
+          <a:xfrm>
+            <a:off x="731520" y="1417320"/>
+            <a:ext cx="10698480" cy="4343400"/>
           </a:xfrm>
           <a:prstGeom prst="rect">
             <a:avLst/>
           </a:prstGeom>
-          <a:noFill/>
-        </p:spPr>
-        <p:txBody>
-          <a:bodyPr wrap="square">
-            <a:spAutoFit/>
-          </a:bodyPr>
-          <a:lstStyle/>
-          <a:p>
-            <a:pPr>
-              <a:defRPr sz="900" b="1">
-                <a:solidFill>
-                  <a:srgbClr val="0170B9"/>
-                </a:solidFill>
-              </a:defRPr>
-            </a:pPr>
-            <a:r>
-              <a:t>[DECISION POINT]: Berat &lt;= 34.000 kg &amp; ISO Modulo 11 Sah?</a:t>
-            </a:r>
-          </a:p>
-          <a:p>
-            <a:pPr>
-              <a:spcBef>
-                <a:spcPts val="100"/>
-              </a:spcBef>
-              <a:defRPr sz="1200" b="1">
-                <a:solidFill>
-                  <a:srgbClr val="10B981"/>
-                </a:solidFill>
-              </a:defRPr>
-            </a:pPr>
-            <a:r>
-              <a:t>JIKA YA (PASS / APPROVED) -&gt; TRUK MASUK KE ZONA</a:t>
-            </a:r>
-          </a:p>
-          <a:p>
-            <a:pPr>
-              <a:spcBef>
-                <a:spcPts val="300"/>
-              </a:spcBef>
-              <a:defRPr sz="819">
-                <a:solidFill>
-                  <a:srgbClr val="1E293B"/>
-                </a:solidFill>
-              </a:defRPr>
-            </a:pPr>
-            <a:r>
-              <a:t>• Aksi Sistem: Tiket e-Pass (Kode QR) tercetak &lt;90 detik, palang barrier terbuka otomatis.</a:t>
-            </a:r>
-            <a:br/>
-            <a:r>
-              <a:t>• Status Database: GATE_IN_APPROVED</a:t>
-            </a:r>
-            <a:br/>
-            <a:r>
-              <a:t>• Ke Mana Truk Pergi Sesuai Manifes?</a:t>
-            </a:r>
-            <a:br/>
-            <a:r>
-              <a:t>  - FCL Kering -&gt; Masuk ke Lapangan Yard Blok A/B/C/D.</a:t>
-            </a:r>
-            <a:br/>
-            <a:r>
-              <a:t>  - Reefer Dingin -&gt; Masuk ke Blok E (Area 300 Steker Listrik).</a:t>
-            </a:r>
-            <a:br/>
-            <a:r>
-              <a:t>  - Kargo LCL -&gt; Menuju Rampa Dock Gudang CFS (D1-D5).</a:t>
-            </a:r>
-            <a:br/>
-            <a:r>
-              <a:t>  - Pabean Jalur Merah -&gt; Menuju Hanggar Behandle Bea Cukai.</a:t>
-            </a:r>
-          </a:p>
-        </p:txBody>
-      </p:sp>
-      <p:sp>
-        <p:nvSpPr>
-          <p:cNvPr id="7" name="Rounded Rectangle 6"/>
+        </p:spPr>
+      </p:pic>
+      <p:sp>
+        <p:nvSpPr>
+          <p:cNvPr id="6" name="Rounded Rectangle 5"/>
           <p:cNvSpPr/>
           <p:nvPr/>
         </p:nvSpPr>
         <p:spPr>
           <a:xfrm>
-            <a:off x="6217920" y="1508760"/>
-            <a:ext cx="5212080" cy="2926080"/>
-          </a:xfrm>
-          <a:prstGeom prst="roundRect">
-            <a:avLst/>
-          </a:prstGeom>
-          <a:solidFill>
-            <a:srgbClr val="FEF2F2"/>
-          </a:solidFill>
-          <a:ln w="12700">
-            <a:solidFill>
-              <a:srgbClr val="EF4444"/>
-            </a:solidFill>
-          </a:ln>
-        </p:spPr>
-        <p:style>
-          <a:lnRef idx="1">
-            <a:schemeClr val="accent1"/>
-          </a:lnRef>
-          <a:fillRef idx="3">
-            <a:schemeClr val="accent1"/>
-          </a:fillRef>
-          <a:effectRef idx="2">
-            <a:schemeClr val="accent1"/>
-          </a:effectRef>
-          <a:fontRef idx="minor">
-            <a:schemeClr val="lt1"/>
-          </a:fontRef>
-        </p:style>
-        <p:txBody>
-          <a:bodyPr rtlCol="0" anchor="ctr"/>
-          <a:lstStyle/>
-          <a:p>
-            <a:pPr algn="ctr"/>
-          </a:p>
-        </p:txBody>
-      </p:sp>
-      <p:sp>
-        <p:nvSpPr>
-          <p:cNvPr id="8" name="TextBox 7"/>
-          <p:cNvSpPr txBox="1"/>
-          <p:nvPr/>
-        </p:nvSpPr>
-        <p:spPr>
-          <a:xfrm>
-            <a:off x="6400800" y="1645920"/>
-            <a:ext cx="4846320" cy="2651760"/>
-          </a:xfrm>
-          <a:prstGeom prst="rect">
-            <a:avLst/>
-          </a:prstGeom>
-          <a:noFill/>
-        </p:spPr>
-        <p:txBody>
-          <a:bodyPr wrap="square">
-            <a:spAutoFit/>
-          </a:bodyPr>
-          <a:lstStyle/>
-          <a:p>
-            <a:pPr>
-              <a:defRPr sz="900" b="1">
-                <a:solidFill>
-                  <a:srgbClr val="EF4444"/>
-                </a:solidFill>
-              </a:defRPr>
-            </a:pPr>
-            <a:r>
-              <a:t>[DECISION POINT]: Berat &gt; 34.000 kg ATAU ISO Check Digit Salah?</a:t>
-            </a:r>
-          </a:p>
-          <a:p>
-            <a:pPr>
-              <a:spcBef>
-                <a:spcPts val="100"/>
-              </a:spcBef>
-              <a:defRPr sz="1200" b="1">
-                <a:solidFill>
-                  <a:srgbClr val="EF4444"/>
-                </a:solidFill>
-              </a:defRPr>
-            </a:pPr>
-            <a:r>
-              <a:t>JIKA TIDAK (REJECTED) -&gt; TOLAK &amp; RUTE U-TURN</a:t>
-            </a:r>
-          </a:p>
-          <a:p>
-            <a:pPr>
-              <a:spcBef>
-                <a:spcPts val="300"/>
-              </a:spcBef>
-              <a:defRPr sz="819">
-                <a:solidFill>
-                  <a:srgbClr val="1E293B"/>
-                </a:solidFill>
-              </a:defRPr>
-            </a:pPr>
-            <a:r>
-              <a:t>• Aksi Sistem: Palang Barrier TETAP TERKUNCI PERMANEN, sirine alarm 105 dB berbunyi, lampu LED merah menyala.</a:t>
-            </a:r>
-            <a:br/>
-            <a:r>
-              <a:t>• Status Database: OVERLOAD_REJECTED / INVALID_CHECK_DIGIT</a:t>
-            </a:r>
-            <a:br/>
-            <a:r>
-              <a:t>• Ke Mana Truk Pergi?</a:t>
-            </a:r>
-            <a:br/>
-            <a:r>
-              <a:t>  - Dilarang keras masuk ke pelataran terminal penumpukan!</a:t>
-            </a:r>
-            <a:br/>
-            <a:r>
-              <a:t>  - Sistem mengarahkan supir belok kiri ke Jalur U-Turn (Putar Balik) untuk keluar terminal atau ke Redress Area.</a:t>
-            </a:r>
-            <a:br/>
-            <a:r>
-              <a:t>  - Menyelamatkan jalan beton K-450 dari keretakan dini.</a:t>
-            </a:r>
-          </a:p>
-        </p:txBody>
-      </p:sp>
-      <p:sp>
-        <p:nvSpPr>
-          <p:cNvPr id="9" name="Rounded Rectangle 8"/>
-          <p:cNvSpPr/>
-          <p:nvPr/>
-        </p:nvSpPr>
-        <p:spPr>
-          <a:xfrm>
-            <a:off x="731520" y="4553712"/>
-            <a:ext cx="10698480" cy="1143000"/>
-          </a:xfrm>
-          <a:prstGeom prst="roundRect">
-            <a:avLst/>
-          </a:prstGeom>
-          <a:solidFill>
-            <a:srgbClr val="FFFFFF"/>
-          </a:solidFill>
-          <a:ln w="12700">
-            <a:solidFill>
-              <a:srgbClr val="0170B9"/>
-            </a:solidFill>
-          </a:ln>
-        </p:spPr>
-        <p:style>
-          <a:lnRef idx="1">
-            <a:schemeClr val="accent1"/>
-          </a:lnRef>
-          <a:fillRef idx="3">
-            <a:schemeClr val="accent1"/>
-          </a:fillRef>
-          <a:effectRef idx="2">
-            <a:schemeClr val="accent1"/>
-          </a:effectRef>
-          <a:fontRef idx="minor">
-            <a:schemeClr val="lt1"/>
-          </a:fontRef>
-        </p:style>
-        <p:txBody>
-          <a:bodyPr rtlCol="0" anchor="ctr"/>
-          <a:lstStyle/>
-          <a:p>
-            <a:pPr algn="ctr"/>
-          </a:p>
-        </p:txBody>
-      </p:sp>
-      <p:sp>
-        <p:nvSpPr>
-          <p:cNvPr id="10" name="TextBox 9"/>
-          <p:cNvSpPr txBox="1"/>
-          <p:nvPr/>
-        </p:nvSpPr>
-        <p:spPr>
-          <a:xfrm>
-            <a:off x="914400" y="4645152"/>
-            <a:ext cx="10332720" cy="960120"/>
-          </a:xfrm>
-          <a:prstGeom prst="rect">
-            <a:avLst/>
-          </a:prstGeom>
-          <a:noFill/>
-        </p:spPr>
-        <p:txBody>
-          <a:bodyPr wrap="square">
-            <a:spAutoFit/>
-          </a:bodyPr>
-          <a:lstStyle/>
-          <a:p>
-            <a:pPr>
-              <a:defRPr sz="900" b="1">
-                <a:solidFill>
-                  <a:srgbClr val="002F5E"/>
-                </a:solidFill>
-              </a:defRPr>
-            </a:pPr>
-            <a:r>
-              <a:t>MENGGUNAKAN APA (ASET FISIK, SENSOR HARDWARE &amp; SOFTWARE MODUL):</a:t>
-            </a:r>
-          </a:p>
-          <a:p>
-            <a:pPr>
-              <a:spcBef>
-                <a:spcPts val="200"/>
-              </a:spcBef>
-              <a:defRPr sz="800">
-                <a:solidFill>
-                  <a:srgbClr val="1E293B"/>
-                </a:solidFill>
-              </a:defRPr>
-            </a:pPr>
-            <a:r>
-              <a:t>• Sensor &amp; Timbangan: Jembatan Timbang Pitless 80 Ton (Load Cell Avery Weigh-Tronix) + Inductive Ground Loop Detektor WCS.</a:t>
-            </a:r>
-            <a:br/>
-            <a:r>
-              <a:t>• Kamera &amp; Vision AI: Kamera ANPR Hikvision 4K (Plat Nomor Truk) + Kamera OCR Boks Kontainer (Standar ISO 6346:2022).</a:t>
-            </a:r>
-            <a:br/>
-            <a:r>
-              <a:t>• Otomasi Gerbang: Automatic Systems Barrier Gate Magnetic Control + Kiosk Cetak Tiket Thermal Zebra Kiosk KRD.</a:t>
-            </a:r>
-            <a:br/>
-            <a:r>
-              <a:t>• Perangkat Lunak: Modul WCS Gate Controller (Event Listener IoT) &amp; YMS Gate Inbound Engine.</a:t>
-            </a:r>
-          </a:p>
-        </p:txBody>
-      </p:sp>
-      <p:sp>
-        <p:nvSpPr>
-          <p:cNvPr id="11" name="Rounded Rectangle 10"/>
-          <p:cNvSpPr/>
-          <p:nvPr/>
-        </p:nvSpPr>
-        <p:spPr>
-          <a:xfrm>
-            <a:off x="731520" y="5779008"/>
+            <a:off x="731520" y="5852160"/>
             <a:ext cx="10698480" cy="438912"/>
           </a:xfrm>
           <a:prstGeom prst="roundRect">
@@ -7956,7 +8968,7 @@
               </a:defRPr>
             </a:pPr>
             <a:r>
-              <a:t>👉  [LIVE DEMO]: Buka 'pages/gate.php' -&gt; Jalankan Simulasi Kamera OCR, ANPR, &amp; Uji Truk Overload SOLAS (&gt;34t)</a:t>
+              <a:t>👉  Flowchart End-to-End Resmi: Simbol Terminator, Decision Diamond, Process Box, &amp; Cabang Ya/Tidak.</a:t>
             </a:r>
           </a:p>
         </p:txBody>
@@ -7988,7 +9000,7 @@
         <p:spPr>
           <a:xfrm>
             <a:off x="731520" y="256032"/>
-            <a:ext cx="7498079" cy="1051560"/>
+            <a:ext cx="7772400" cy="1051560"/>
           </a:xfrm>
           <a:prstGeom prst="rect">
             <a:avLst/>
@@ -8024,7 +9036,7 @@
               </a:defRPr>
             </a:pPr>
             <a:r>
-              <a:t>Flow 2: Pengangkatan Kontainer &amp; Stacking 3D Bay-Row-Tier (YMS + WCS)</a:t>
+              <a:t>Flowchart 2: Alur Keputusan Timbangan Dinamis Gate-In (WCS + YMS)</a:t>
             </a:r>
           </a:p>
         </p:txBody>
@@ -8037,8 +9049,8 @@
         </p:nvSpPr>
         <p:spPr>
           <a:xfrm>
-            <a:off x="8321040" y="237744"/>
-            <a:ext cx="3108960" cy="932688"/>
+            <a:off x="8412480" y="237744"/>
+            <a:ext cx="3017520" cy="932688"/>
           </a:xfrm>
           <a:prstGeom prst="roundRect">
             <a:avLst/>
@@ -8093,7 +9105,7 @@
               </a:defRPr>
             </a:pPr>
             <a:r>
-              <a:t>pages/yard.php</a:t>
+              <a:t>dashboard.php?page=gate</a:t>
             </a:r>
           </a:p>
           <a:p>
@@ -8108,7 +9120,7 @@
               </a:defRPr>
             </a:pPr>
             <a:r>
-              <a:t>http://localhost/.../pages/yard.php</a:t>
+              <a:t>http://localhost/.../gate.php</a:t>
             </a:r>
           </a:p>
         </p:txBody>
@@ -8143,375 +9155,44 @@
               </a:defRPr>
             </a:pPr>
             <a:r>
-              <a:t>Conclusion Supply Chain Consultant  •  Naufal Andika Heditya &amp; Zulfikar J. Fatah  •  Topik 7: CIDP 35 Ha                    Slide 5 of 12</a:t>
-            </a:r>
-          </a:p>
-        </p:txBody>
-      </p:sp>
-      <p:sp>
-        <p:nvSpPr>
-          <p:cNvPr id="5" name="Rounded Rectangle 4"/>
-          <p:cNvSpPr/>
+              <a:t>Conclusion Supply Chain Consultant  •  Naufal Andika Heditya &amp; Zulfikar J. Fatah  •  Topik 7: CIDP 35 Ha                    Slide 5 of 16</a:t>
+            </a:r>
+          </a:p>
+        </p:txBody>
+      </p:sp>
+      <p:pic>
+        <p:nvPicPr>
+          <p:cNvPr id="5" name="Picture 4" descr="FLOWCHART_TIMBANGAN_GATE_IN_DECISION.jpg"/>
+          <p:cNvPicPr>
+            <a:picLocks noChangeAspect="1"/>
+          </p:cNvPicPr>
           <p:nvPr/>
-        </p:nvSpPr>
-        <p:spPr>
-          <a:xfrm>
-            <a:off x="731520" y="1508760"/>
-            <a:ext cx="5212080" cy="2926080"/>
-          </a:xfrm>
-          <a:prstGeom prst="roundRect">
-            <a:avLst/>
-          </a:prstGeom>
-          <a:solidFill>
-            <a:srgbClr val="FFFFFF"/>
-          </a:solidFill>
-          <a:ln w="12700">
-            <a:solidFill>
-              <a:srgbClr val="E2E8F0"/>
-            </a:solidFill>
-          </a:ln>
-        </p:spPr>
-        <p:style>
-          <a:lnRef idx="1">
-            <a:schemeClr val="accent1"/>
-          </a:lnRef>
-          <a:fillRef idx="3">
-            <a:schemeClr val="accent1"/>
-          </a:fillRef>
-          <a:effectRef idx="2">
-            <a:schemeClr val="accent1"/>
-          </a:effectRef>
-          <a:fontRef idx="minor">
-            <a:schemeClr val="lt1"/>
-          </a:fontRef>
-        </p:style>
-        <p:txBody>
-          <a:bodyPr rtlCol="0" anchor="ctr"/>
-          <a:lstStyle/>
-          <a:p>
-            <a:pPr algn="ctr"/>
-          </a:p>
-        </p:txBody>
-      </p:sp>
-      <p:sp>
-        <p:nvSpPr>
-          <p:cNvPr id="6" name="TextBox 5"/>
-          <p:cNvSpPr txBox="1"/>
-          <p:nvPr/>
-        </p:nvSpPr>
-        <p:spPr>
-          <a:xfrm>
-            <a:off x="914400" y="1645920"/>
-            <a:ext cx="4846320" cy="2651760"/>
+        </p:nvPicPr>
+        <p:blipFill>
+          <a:blip r:embed="rId2"/>
+          <a:stretch>
+            <a:fillRect/>
+          </a:stretch>
+        </p:blipFill>
+        <p:spPr>
+          <a:xfrm>
+            <a:off x="731520" y="1417320"/>
+            <a:ext cx="10698480" cy="4343400"/>
           </a:xfrm>
           <a:prstGeom prst="rect">
             <a:avLst/>
           </a:prstGeom>
-          <a:noFill/>
-        </p:spPr>
-        <p:txBody>
-          <a:bodyPr wrap="square">
-            <a:spAutoFit/>
-          </a:bodyPr>
-          <a:lstStyle/>
-          <a:p>
-            <a:pPr>
-              <a:defRPr sz="900" b="1">
-                <a:solidFill>
-                  <a:srgbClr val="0170B9"/>
-                </a:solidFill>
-              </a:defRPr>
-            </a:pPr>
-            <a:r>
-              <a:t>SIAPA YANG MENGANGKAT &amp; DECISION UKURAN BOKS</a:t>
-            </a:r>
-          </a:p>
-          <a:p>
-            <a:pPr>
-              <a:spcBef>
-                <a:spcPts val="100"/>
-              </a:spcBef>
-              <a:defRPr sz="1200" b="1">
-                <a:solidFill>
-                  <a:srgbClr val="002F5E"/>
-                </a:solidFill>
-              </a:defRPr>
-            </a:pPr>
-            <a:r>
-              <a:t>Reach Stacker 45t Telescopic Spreader vs RTG vs Forklift</a:t>
-            </a:r>
-          </a:p>
-          <a:p>
-            <a:pPr>
-              <a:spcBef>
-                <a:spcPts val="300"/>
-              </a:spcBef>
-              <a:defRPr sz="819">
-                <a:solidFill>
-                  <a:srgbClr val="1E293B"/>
-                </a:solidFill>
-              </a:defRPr>
-            </a:pPr>
-            <a:r>
-              <a:t>• Decision 1: Kontainer 20ft vs 40ft?</a:t>
-            </a:r>
-            <a:br/>
-            <a:r>
-              <a:t>  - [JIKA 20 FT]: Reach Stacker 45t gunakan posisi Spreader 20ft -&gt; Menaruh di Bay Ganjil (01, 03, 05, 07).</a:t>
-            </a:r>
-            <a:br/>
-            <a:r>
-              <a:t>  - [JIKA 40 FT]: Spreader Telescopic hidrolik memanjang otomatis ke 40ft -&gt; Menaruh di Bay Genap (02, 06, 10).</a:t>
-            </a:r>
-            <a:br/>
-            <a:r>
-              <a:t>• Penumpukan Intensif (Blok A/B): Diangkat RTG Crane 40t 16-Roda.</a:t>
-            </a:r>
-            <a:br/>
-            <a:r>
-              <a:t>• Palet di Gudang CFS: Diangkat Forklift Heavy Duty 3-5 Ton.</a:t>
-            </a:r>
-            <a:br/>
-            <a:r>
-              <a:t>• Rangkaian Kereta Api: Diangkat Reach Stacker di Siding Rel 600m.</a:t>
-            </a:r>
-          </a:p>
-        </p:txBody>
-      </p:sp>
-      <p:sp>
-        <p:nvSpPr>
-          <p:cNvPr id="7" name="Rounded Rectangle 6"/>
+        </p:spPr>
+      </p:pic>
+      <p:sp>
+        <p:nvSpPr>
+          <p:cNvPr id="6" name="Rounded Rectangle 5"/>
           <p:cNvSpPr/>
           <p:nvPr/>
         </p:nvSpPr>
         <p:spPr>
           <a:xfrm>
-            <a:off x="6217920" y="1508760"/>
-            <a:ext cx="5212080" cy="2926080"/>
-          </a:xfrm>
-          <a:prstGeom prst="roundRect">
-            <a:avLst/>
-          </a:prstGeom>
-          <a:solidFill>
-            <a:srgbClr val="EFF6FF"/>
-          </a:solidFill>
-          <a:ln w="12700">
-            <a:solidFill>
-              <a:srgbClr val="0170B9"/>
-            </a:solidFill>
-          </a:ln>
-        </p:spPr>
-        <p:style>
-          <a:lnRef idx="1">
-            <a:schemeClr val="accent1"/>
-          </a:lnRef>
-          <a:fillRef idx="3">
-            <a:schemeClr val="accent1"/>
-          </a:fillRef>
-          <a:effectRef idx="2">
-            <a:schemeClr val="accent1"/>
-          </a:effectRef>
-          <a:fontRef idx="minor">
-            <a:schemeClr val="lt1"/>
-          </a:fontRef>
-        </p:style>
-        <p:txBody>
-          <a:bodyPr rtlCol="0" anchor="ctr"/>
-          <a:lstStyle/>
-          <a:p>
-            <a:pPr algn="ctr"/>
-          </a:p>
-        </p:txBody>
-      </p:sp>
-      <p:sp>
-        <p:nvSpPr>
-          <p:cNvPr id="8" name="TextBox 7"/>
-          <p:cNvSpPr txBox="1"/>
-          <p:nvPr/>
-        </p:nvSpPr>
-        <p:spPr>
-          <a:xfrm>
-            <a:off x="6400800" y="1645920"/>
-            <a:ext cx="4846320" cy="2651760"/>
-          </a:xfrm>
-          <a:prstGeom prst="rect">
-            <a:avLst/>
-          </a:prstGeom>
-          <a:noFill/>
-        </p:spPr>
-        <p:txBody>
-          <a:bodyPr wrap="square">
-            <a:spAutoFit/>
-          </a:bodyPr>
-          <a:lstStyle/>
-          <a:p>
-            <a:pPr>
-              <a:defRPr sz="900" b="1">
-                <a:solidFill>
-                  <a:srgbClr val="0170B9"/>
-                </a:solidFill>
-              </a:defRPr>
-            </a:pPr>
-            <a:r>
-              <a:t>DECISION ATURAN PENEMPATAN 3D BAY-ROW-TIER</a:t>
-            </a:r>
-          </a:p>
-          <a:p>
-            <a:pPr>
-              <a:spcBef>
-                <a:spcPts val="100"/>
-              </a:spcBef>
-              <a:defRPr sz="1200" b="1">
-                <a:solidFill>
-                  <a:srgbClr val="002F5E"/>
-                </a:solidFill>
-              </a:defRPr>
-            </a:pPr>
-            <a:r>
-              <a:t>Logika Keputusan Penempatan Slot Lapangan</a:t>
-            </a:r>
-          </a:p>
-          <a:p>
-            <a:pPr>
-              <a:spcBef>
-                <a:spcPts val="300"/>
-              </a:spcBef>
-              <a:defRPr sz="819">
-                <a:solidFill>
-                  <a:srgbClr val="1E293B"/>
-                </a:solidFill>
-              </a:defRPr>
-            </a:pPr>
-            <a:r>
-              <a:t>• Decision 2: Apakah Penempatan Memenuhi Aturan Stacking?</a:t>
-            </a:r>
-            <a:br/>
-            <a:r>
-              <a:t>  - [JIKA YA]: Boks diletakkan di koordinat 3D Bay-Row-Tier yang ditugaskan -&gt; Status STACK_CONFIRMED. Rasio gerak derek optimal 1.1 moves/box (hemat solar HSD Rp 1,06 M/thn).</a:t>
-            </a:r>
-            <a:br/>
-            <a:r>
-              <a:t>  - [JIKA TIDAK]: Larangan Corner Casting (20ft di atas 40ft) atau Anti-Floating (Tier n saat n-1 kosong) -&gt; Sistem YMS tolak perintah putaway! Alarm tablet kabin berbunyi, operator dialihkan ke bin lain.</a:t>
-            </a:r>
-          </a:p>
-        </p:txBody>
-      </p:sp>
-      <p:sp>
-        <p:nvSpPr>
-          <p:cNvPr id="9" name="Rounded Rectangle 8"/>
-          <p:cNvSpPr/>
-          <p:nvPr/>
-        </p:nvSpPr>
-        <p:spPr>
-          <a:xfrm>
-            <a:off x="731520" y="4553712"/>
-            <a:ext cx="10698480" cy="1143000"/>
-          </a:xfrm>
-          <a:prstGeom prst="roundRect">
-            <a:avLst/>
-          </a:prstGeom>
-          <a:solidFill>
-            <a:srgbClr val="FFFFFF"/>
-          </a:solidFill>
-          <a:ln w="12700">
-            <a:solidFill>
-              <a:srgbClr val="0170B9"/>
-            </a:solidFill>
-          </a:ln>
-        </p:spPr>
-        <p:style>
-          <a:lnRef idx="1">
-            <a:schemeClr val="accent1"/>
-          </a:lnRef>
-          <a:fillRef idx="3">
-            <a:schemeClr val="accent1"/>
-          </a:fillRef>
-          <a:effectRef idx="2">
-            <a:schemeClr val="accent1"/>
-          </a:effectRef>
-          <a:fontRef idx="minor">
-            <a:schemeClr val="lt1"/>
-          </a:fontRef>
-        </p:style>
-        <p:txBody>
-          <a:bodyPr rtlCol="0" anchor="ctr"/>
-          <a:lstStyle/>
-          <a:p>
-            <a:pPr algn="ctr"/>
-          </a:p>
-        </p:txBody>
-      </p:sp>
-      <p:sp>
-        <p:nvSpPr>
-          <p:cNvPr id="10" name="TextBox 9"/>
-          <p:cNvSpPr txBox="1"/>
-          <p:nvPr/>
-        </p:nvSpPr>
-        <p:spPr>
-          <a:xfrm>
-            <a:off x="914400" y="4645152"/>
-            <a:ext cx="10332720" cy="960120"/>
-          </a:xfrm>
-          <a:prstGeom prst="rect">
-            <a:avLst/>
-          </a:prstGeom>
-          <a:noFill/>
-        </p:spPr>
-        <p:txBody>
-          <a:bodyPr wrap="square">
-            <a:spAutoFit/>
-          </a:bodyPr>
-          <a:lstStyle/>
-          <a:p>
-            <a:pPr>
-              <a:defRPr sz="900" b="1">
-                <a:solidFill>
-                  <a:srgbClr val="002F5E"/>
-                </a:solidFill>
-              </a:defRPr>
-            </a:pPr>
-            <a:r>
-              <a:t>MENGGUNAKAN APA (ARMADA ALAT BERAT, HARDWARE &amp; SOFTWARE YMS):</a:t>
-            </a:r>
-          </a:p>
-          <a:p>
-            <a:pPr>
-              <a:spcBef>
-                <a:spcPts val="200"/>
-              </a:spcBef>
-              <a:defRPr sz="800">
-                <a:solidFill>
-                  <a:srgbClr val="1E293B"/>
-                </a:solidFill>
-              </a:defRPr>
-            </a:pPr>
-            <a:r>
-              <a:t>• Armada Derek: 3 Unit Reach Stacker 45 Ton Kalmar DRG450-65S5M (Telescopic Spreader Bromma) + 1 Unit RTG Crane 40 Ton Konecranes.</a:t>
-            </a:r>
-            <a:br/>
-            <a:r>
-              <a:t>• Armada CFS: Forklift Elektrik Linde 3-5 Ton + Rampa Loading Dock Leveler Hidrolik.</a:t>
-            </a:r>
-            <a:br/>
-            <a:r>
-              <a:t>• Komunikasi Kabin: Komputer Kabin VMT (Vehicle Mounted Terminal) Advantech DLT-V72 terhubung Industrial Wireless Mesh.</a:t>
-            </a:r>
-            <a:br/>
-            <a:r>
-              <a:t>• Perangkat Lunak: Modul YMS 3D Yard Allocation Engine, WCS Equipment Dispatcher &amp; Driver Mobile Job Order.</a:t>
-            </a:r>
-          </a:p>
-        </p:txBody>
-      </p:sp>
-      <p:sp>
-        <p:nvSpPr>
-          <p:cNvPr id="11" name="Rounded Rectangle 10"/>
-          <p:cNvSpPr/>
-          <p:nvPr/>
-        </p:nvSpPr>
-        <p:spPr>
-          <a:xfrm>
-            <a:off x="731520" y="5779008"/>
+            <a:off x="731520" y="5852160"/>
             <a:ext cx="10698480" cy="438912"/>
           </a:xfrm>
           <a:prstGeom prst="roundRect">
@@ -8552,7 +9233,7 @@
               </a:defRPr>
             </a:pPr>
             <a:r>
-              <a:t>👉  [LIVE DEMO]: Buka 'pages/yard.php' &amp; 'pages/simulator.php' -&gt; Uji Coba Telescopic Spreader &amp; Alokasi Slot 3D</a:t>
+              <a:t>👉  Menjawab Notulensi: Truk masuk timbangan, jika lulus ke mana vs jika tidak lulus belok ke Reject Lane.</a:t>
             </a:r>
           </a:p>
         </p:txBody>
@@ -8584,7 +9265,7 @@
         <p:spPr>
           <a:xfrm>
             <a:off x="731520" y="256032"/>
-            <a:ext cx="7498079" cy="1051560"/>
+            <a:ext cx="7772400" cy="1051560"/>
           </a:xfrm>
           <a:prstGeom prst="rect">
             <a:avLst/>
@@ -8620,7 +9301,7 @@
               </a:defRPr>
             </a:pPr>
             <a:r>
-              <a:t>Flow 3 &amp; 4: Rantai Dingin Reefer &amp; Gudang CFS Inbound Stripping (WMS + WCS)</a:t>
+              <a:t>Business Rule 1: Parameter Masukan &amp; Formula Validasi Timbangan Gate-In</a:t>
             </a:r>
           </a:p>
         </p:txBody>
@@ -8633,8 +9314,8 @@
         </p:nvSpPr>
         <p:spPr>
           <a:xfrm>
-            <a:off x="8321040" y="237744"/>
-            <a:ext cx="3108960" cy="932688"/>
+            <a:off x="8412480" y="237744"/>
+            <a:ext cx="3017520" cy="932688"/>
           </a:xfrm>
           <a:prstGeom prst="roundRect">
             <a:avLst/>
@@ -8689,7 +9370,7 @@
               </a:defRPr>
             </a:pPr>
             <a:r>
-              <a:t>pages/reefer.php &amp; pages/cfs.php</a:t>
+              <a:t>dashboard.php?page=gate</a:t>
             </a:r>
           </a:p>
           <a:p>
@@ -8704,7 +9385,7 @@
               </a:defRPr>
             </a:pPr>
             <a:r>
-              <a:t>http://localhost/.../pages/reefer.php</a:t>
+              <a:t>http://localhost/.../gate.php</a:t>
             </a:r>
           </a:p>
         </p:txBody>
@@ -8739,7 +9420,7 @@
               </a:defRPr>
             </a:pPr>
             <a:r>
-              <a:t>Conclusion Supply Chain Consultant  •  Naufal Andika Heditya &amp; Zulfikar J. Fatah  •  Topik 7: CIDP 35 Ha                    Slide 6 of 12</a:t>
+              <a:t>Conclusion Supply Chain Consultant  •  Naufal Andika Heditya &amp; Zulfikar J. Fatah  •  Topik 7: CIDP 35 Ha                    Slide 6 of 16</a:t>
             </a:r>
           </a:p>
         </p:txBody>
@@ -8753,7 +9434,7 @@
         <p:spPr>
           <a:xfrm>
             <a:off x="731520" y="1508760"/>
-            <a:ext cx="5212080" cy="2926080"/>
+            <a:ext cx="5212080" cy="4160520"/>
           </a:xfrm>
           <a:prstGeom prst="roundRect">
             <a:avLst/>
@@ -8797,8 +9478,8 @@
         </p:nvSpPr>
         <p:spPr>
           <a:xfrm>
-            <a:off x="914400" y="1645920"/>
-            <a:ext cx="4846320" cy="2651760"/>
+            <a:off x="914400" y="1691640"/>
+            <a:ext cx="4846320" cy="3794760"/>
           </a:xfrm>
           <a:prstGeom prst="rect">
             <a:avLst/>
@@ -8812,52 +9493,79 @@
           <a:lstStyle/>
           <a:p>
             <a:pPr>
-              <a:defRPr sz="900" b="1">
+              <a:defRPr sz="1100" b="1">
                 <a:solidFill>
                   <a:srgbClr val="0170B9"/>
                 </a:solidFill>
               </a:defRPr>
             </a:pPr>
             <a:r>
-              <a:t>FLOW 3: COLD CHAIN REEFER (BLOK E - 300 PLUGS)</a:t>
+              <a:t>1. PARAMETER MASUKAN &amp; FORMULA VALIDASI</a:t>
             </a:r>
           </a:p>
           <a:p>
             <a:pPr>
               <a:spcBef>
-                <a:spcPts val="100"/>
+                <a:spcPts val="600"/>
               </a:spcBef>
-              <a:defRPr sz="1200" b="1">
-                <a:solidFill>
-                  <a:srgbClr val="002F5E"/>
-                </a:solidFill>
-              </a:defRPr>
-            </a:pPr>
-            <a:r>
-              <a:t>Decision Suhu Dingin &amp; Penanganan Daya</a:t>
-            </a:r>
-          </a:p>
-          <a:p>
-            <a:pPr>
-              <a:spcBef>
-                <a:spcPts val="300"/>
-              </a:spcBef>
-              <a:defRPr sz="819">
+              <a:defRPr sz="900">
                 <a:solidFill>
                   <a:srgbClr val="1E293B"/>
                 </a:solidFill>
               </a:defRPr>
             </a:pPr>
             <a:r>
-              <a:t>• Decision Point: Suhu -18C s/d -25C &amp; Daya Listrik &lt; 30 Menit?</a:t>
-            </a:r>
-            <a:br/>
-            <a:r>
-              <a:t>  - [JIKA YA]: Colok steker CEE 380V/32A, status REEFER_PLUGGED_ACTIVE, telemetri IoT merekam suhu tiap 60s, tarif listrik Rp 250rb/shift tercatat otomatis.</a:t>
-            </a:r>
-            <a:br/>
-            <a:r>
-              <a:t>  - [JIKA TIDAK (Suhu &gt; -15C / Listrik Padam)]: WCS picu REEFER_BREACH_ALERT, sirine bunyi, Automatic Transfer Switch menyalakan Genset cadangan 1.250 kVA, teknisi reefer cek unit. Hindari klaim kargo $100.000+.</a:t>
+              <a:t>• Aktor &amp; Hardware WCS:</a:t>
+            </a:r>
+            <a:br/>
+            <a:r>
+              <a:t>  - Driver Truk Eksternal, Gate Clerk / Tallyman</a:t>
+            </a:r>
+            <a:br/>
+            <a:r>
+              <a:t>  - Jembatan Timbang Pitless 80 Ton (Load Cell Avery Weigh-Tronix)</a:t>
+            </a:r>
+            <a:br/>
+            <a:r>
+              <a:t>  - Kamera ANPR (Plat Truk) &amp; Kamera OCR Boks ISO 6346</a:t>
+            </a:r>
+            <a:br/>
+            <a:br/>
+            <a:r>
+              <a:t>• Parameter Masukan (Input):</a:t>
+            </a:r>
+            <a:br/>
+            <a:r>
+              <a:t>  - Gross Weight (dari timbangan otomatis WCS)</a:t>
+            </a:r>
+            <a:br/>
+            <a:r>
+              <a:t>  - Tare Weight (berat kosong truk dari master data ERP)</a:t>
+            </a:r>
+            <a:br/>
+            <a:r>
+              <a:t>  - Net Weight = Gross Weight - Tare Weight</a:t>
+            </a:r>
+            <a:br/>
+            <a:r>
+              <a:t>  - Verified Gross Mass (VGM SOLAS) dari dokumen pengirim</a:t>
+            </a:r>
+            <a:br/>
+            <a:br/>
+            <a:r>
+              <a:t>• Aturan Bisnis (Validation Rules):</a:t>
+            </a:r>
+            <a:br/>
+            <a:r>
+              <a:t>  1. Berat Kotor Total ≤ 34.000 kg (Kepatuhan UU No. 22/2009 Jalan Kelas 1)</a:t>
+            </a:r>
+            <a:br/>
+            <a:r>
+              <a:t>  2. Toleransi Selisih Berat ≤ ± 2.0% vs Manifest VGM SOLAS</a:t>
+            </a:r>
+            <a:br/>
+            <a:r>
+              <a:t>  3. Validasi Check Digit ISO 6346 Modulo 11</a:t>
             </a:r>
           </a:p>
         </p:txBody>
@@ -8871,128 +9579,7 @@
         <p:spPr>
           <a:xfrm>
             <a:off x="6217920" y="1508760"/>
-            <a:ext cx="5212080" cy="2926080"/>
-          </a:xfrm>
-          <a:prstGeom prst="roundRect">
-            <a:avLst/>
-          </a:prstGeom>
-          <a:solidFill>
-            <a:srgbClr val="ECFDF5"/>
-          </a:solidFill>
-          <a:ln w="12700">
-            <a:solidFill>
-              <a:srgbClr val="10B981"/>
-            </a:solidFill>
-          </a:ln>
-        </p:spPr>
-        <p:style>
-          <a:lnRef idx="1">
-            <a:schemeClr val="accent1"/>
-          </a:lnRef>
-          <a:fillRef idx="3">
-            <a:schemeClr val="accent1"/>
-          </a:fillRef>
-          <a:effectRef idx="2">
-            <a:schemeClr val="accent1"/>
-          </a:effectRef>
-          <a:fontRef idx="minor">
-            <a:schemeClr val="lt1"/>
-          </a:fontRef>
-        </p:style>
-        <p:txBody>
-          <a:bodyPr rtlCol="0" anchor="ctr"/>
-          <a:lstStyle/>
-          <a:p>
-            <a:pPr algn="ctr"/>
-          </a:p>
-        </p:txBody>
-      </p:sp>
-      <p:sp>
-        <p:nvSpPr>
-          <p:cNvPr id="8" name="TextBox 7"/>
-          <p:cNvSpPr txBox="1"/>
-          <p:nvPr/>
-        </p:nvSpPr>
-        <p:spPr>
-          <a:xfrm>
-            <a:off x="6400800" y="1645920"/>
-            <a:ext cx="4846320" cy="2651760"/>
-          </a:xfrm>
-          <a:prstGeom prst="rect">
-            <a:avLst/>
-          </a:prstGeom>
-          <a:noFill/>
-        </p:spPr>
-        <p:txBody>
-          <a:bodyPr wrap="square">
-            <a:spAutoFit/>
-          </a:bodyPr>
-          <a:lstStyle/>
-          <a:p>
-            <a:pPr>
-              <a:spcBef>
-                <a:spcPts val="0"/>
-              </a:spcBef>
-              <a:defRPr sz="900" b="1">
-                <a:solidFill>
-                  <a:srgbClr val="10B981"/>
-                </a:solidFill>
-              </a:defRPr>
-            </a:pPr>
-            <a:r>
-              <a:t>FLOW 4: GUDANG CFS INBOUND STRIPPING LCL</a:t>
-            </a:r>
-          </a:p>
-          <a:p>
-            <a:pPr>
-              <a:spcBef>
-                <a:spcPts val="100"/>
-              </a:spcBef>
-              <a:defRPr sz="1200" b="1">
-                <a:solidFill>
-                  <a:srgbClr val="002F5E"/>
-                </a:solidFill>
-              </a:defRPr>
-            </a:pPr>
-            <a:r>
-              <a:t>Decision Barcode GS1 SSCC-18 &amp; ASN Matching</a:t>
-            </a:r>
-          </a:p>
-          <a:p>
-            <a:pPr>
-              <a:spcBef>
-                <a:spcPts val="300"/>
-              </a:spcBef>
-              <a:defRPr sz="819">
-                <a:solidFill>
-                  <a:srgbClr val="1E293B"/>
-                </a:solidFill>
-              </a:defRPr>
-            </a:pPr>
-            <a:r>
-              <a:t>• Decision Point: Barcode GS1 SSCC-18 Valid &amp; Kuantitas ASN Sesuai?</a:t>
-            </a:r>
-            <a:br/>
-            <a:r>
-              <a:t>  - [JIKA YA]: Blind count tally lolos, Forklift bawa palet ke rak bin terarah (Directed Putaway), status PALLET_QC_PASSED.</a:t>
-            </a:r>
-            <a:br/>
-            <a:r>
-              <a:t>  - [JIKA TIDAK (Cacat / Selisih)]: Barcode rusak -&gt; Cetak ulang label GS1 baru via printer barcode; Kargo selisih/cacat -&gt; Status diubah menjadi BLOCKED (Karantina QC) agar tidak keluar gudang sebelum diinvestigasi.</a:t>
-            </a:r>
-          </a:p>
-        </p:txBody>
-      </p:sp>
-      <p:sp>
-        <p:nvSpPr>
-          <p:cNvPr id="9" name="Rounded Rectangle 8"/>
-          <p:cNvSpPr/>
-          <p:nvPr/>
-        </p:nvSpPr>
-        <p:spPr>
-          <a:xfrm>
-            <a:off x="731520" y="4553712"/>
-            <a:ext cx="10698480" cy="1143000"/>
+            <a:ext cx="5212080" cy="4160520"/>
           </a:xfrm>
           <a:prstGeom prst="roundRect">
             <a:avLst/>
@@ -9002,7 +9589,7 @@
           </a:solidFill>
           <a:ln w="12700">
             <a:solidFill>
-              <a:srgbClr val="0170B9"/>
+              <a:srgbClr val="E2E8F0"/>
             </a:solidFill>
           </a:ln>
         </p:spPr>
@@ -9030,14 +9617,14 @@
       </p:sp>
       <p:sp>
         <p:nvSpPr>
-          <p:cNvPr id="10" name="TextBox 9"/>
+          <p:cNvPr id="8" name="TextBox 7"/>
           <p:cNvSpPr txBox="1"/>
           <p:nvPr/>
         </p:nvSpPr>
         <p:spPr>
           <a:xfrm>
-            <a:off x="914400" y="4645152"/>
-            <a:ext cx="10332720" cy="960120"/>
+            <a:off x="6400800" y="1691640"/>
+            <a:ext cx="4846320" cy="3794760"/>
           </a:xfrm>
           <a:prstGeom prst="rect">
             <a:avLst/>
@@ -9051,54 +9638,111 @@
           <a:lstStyle/>
           <a:p>
             <a:pPr>
-              <a:defRPr sz="900" b="1">
+              <a:defRPr sz="1100" b="1">
                 <a:solidFill>
                   <a:srgbClr val="002F5E"/>
                 </a:solidFill>
               </a:defRPr>
             </a:pPr>
             <a:r>
-              <a:t>MENGGUNAKAN APA (ASET LISTRIK, SENSOR IOT, PDA SCANNER &amp; WMS MODUL):</a:t>
+              <a:t>2. ALUR KEPUTUSAN OPERASIONAL (JIKA YA / JIKA TIDAK)</a:t>
             </a:r>
           </a:p>
           <a:p>
             <a:pPr>
               <a:spcBef>
-                <a:spcPts val="200"/>
+                <a:spcPts val="600"/>
               </a:spcBef>
-              <a:defRPr sz="800">
+              <a:defRPr sz="850">
                 <a:solidFill>
                   <a:srgbClr val="1E293B"/>
                 </a:solidFill>
               </a:defRPr>
             </a:pPr>
             <a:r>
-              <a:t>• Fasilitas Reefer: 300 Soket CEE Mennekes 380V/32A IP67, Trafo PLN 1.250 kVA, Genset Cummins 1.250 kVA + Sensor IoT LoRaWAN Dragino LHT65N.</a:t>
-            </a:r>
-            <a:br/>
-            <a:r>
-              <a:t>• Fasilitas CFS: 5 Dock Leveler Hidrolik Rite-Hite (D1-D5), Handheld PDA Zebra TC26 Android (2D Imager), Printer Barcode Zebra ZT411.</a:t>
-            </a:r>
-            <a:br/>
-            <a:r>
-              <a:t>• Armada Angkut CFS: Forklift Elektrik 3 Ton Linde E30.</a:t>
-            </a:r>
-            <a:br/>
-            <a:r>
-              <a:t>• Perangkat Lunak: Modul WMS Cold Chain Monitoring, WMS Inbound Stripping &amp; Directed Putaway Engine.</a:t>
-            </a:r>
-          </a:p>
-        </p:txBody>
-      </p:sp>
-      <p:sp>
-        <p:nvSpPr>
-          <p:cNvPr id="11" name="Rounded Rectangle 10"/>
+              <a:t>✅ JIKA LULUS TIMBANG (Valid &amp; ≤ 34 Ton):</a:t>
+            </a:r>
+            <a:br/>
+            <a:r>
+              <a:t>• Palang barrier otomatis terbuka, lampu hijau aktif.</a:t>
+            </a:r>
+            <a:br/>
+            <a:r>
+              <a:t>• Status database berubah: GATE_IN_APPROVED.</a:t>
+            </a:r>
+            <a:br/>
+            <a:r>
+              <a:t>• Kiosk mencetak Container Movement Slip (CMS) ber-QR Code.</a:t>
+            </a:r>
+            <a:br/>
+            <a:r>
+              <a:t>• Ke mana tujuannya sesuai jenis barangnya:</a:t>
+            </a:r>
+            <a:br/>
+            <a:r>
+              <a:t>  - FCL Kering 40ft/20ft → Meluncur ke Blok Yard A/B/C/D.</a:t>
+            </a:r>
+            <a:br/>
+            <a:r>
+              <a:t>  - Reefer (Dingin) → Menuju Blok E (300 unit colokan 380V).</a:t>
+            </a:r>
+            <a:br/>
+            <a:r>
+              <a:t>  - Kargo Curah LCL → Menuju Gudang CFS Dock D1-D5.</a:t>
+            </a:r>
+            <a:br/>
+            <a:r>
+              <a:t>  - HazMat B3 → Menuju Blok F (Tanggul Isolasi Kimia).</a:t>
+            </a:r>
+            <a:br/>
+            <a:r>
+              <a:t>  - Pabean Jalur Merah → Menuju Hanggar Behandle Bea Cukai.</a:t>
+            </a:r>
+            <a:br/>
+            <a:br/>
+            <a:r>
+              <a:t>❌ JIKA TIDAK LULUS (Overweight &gt; 34 Ton / Selisih &gt; 2%):</a:t>
+            </a:r>
+            <a:br/>
+            <a:r>
+              <a:t>• Palang barrier TETAP TERKUNCI RAPAT (Lock).</a:t>
+            </a:r>
+            <a:br/>
+            <a:r>
+              <a:t>• Lampu merah berkedip &amp; sirine alarm aktif di pos gate.</a:t>
+            </a:r>
+            <a:br/>
+            <a:r>
+              <a:t>• Status database: OVERLOAD_REJECTED / HOLD.</a:t>
+            </a:r>
+            <a:br/>
+            <a:r>
+              <a:t>• Ke mana truk diarahkan?</a:t>
+            </a:r>
+            <a:br/>
+            <a:r>
+              <a:t>  - Truk DILARANG masuk yard (cegah jalan beton amblas).</a:t>
+            </a:r>
+            <a:br/>
+            <a:r>
+              <a:t>  - Masuk REJECT LANE / HOLDING BAY (Area Karantina Timbangan).</a:t>
+            </a:r>
+            <a:br/>
+            <a:r>
+              <a:t>  - Investigasi Supervisor: Rekoreksi dokumen atau U-Turn keluar.</a:t>
+            </a:r>
+          </a:p>
+        </p:txBody>
+      </p:sp>
+      <p:sp>
+        <p:nvSpPr>
+          <p:cNvPr id="9" name="Rounded Rectangle 8"/>
           <p:cNvSpPr/>
           <p:nvPr/>
         </p:nvSpPr>
         <p:spPr>
           <a:xfrm>
-            <a:off x="731520" y="5779008"/>
+            <a:off x="731520" y="5852160"/>
             <a:ext cx="10698480" cy="438912"/>
           </a:xfrm>
           <a:prstGeom prst="roundRect">
@@ -9139,7 +9783,7 @@
               </a:defRPr>
             </a:pPr>
             <a:r>
-              <a:t>👉  [LIVE DEMO]: Buka 'pages/reefer.php' (Monitoring Suhu 300 Plugs) &amp; 'pages/cfs.php' (Scan Barcode GS1 SSCC-18)</a:t>
+              <a:t>👉  [LIVE DEMO]: Buka Halaman Web Gate (pages/gate.php) untuk simulasi timbangan lulus vs overweight.</a:t>
             </a:r>
           </a:p>
         </p:txBody>
@@ -9171,7 +9815,7 @@
         <p:spPr>
           <a:xfrm>
             <a:off x="731520" y="256032"/>
-            <a:ext cx="7498079" cy="1051560"/>
+            <a:ext cx="7772400" cy="1051560"/>
           </a:xfrm>
           <a:prstGeom prst="rect">
             <a:avLst/>
@@ -9207,7 +9851,7 @@
               </a:defRPr>
             </a:pPr>
             <a:r>
-              <a:t>Flow 5 &amp; 6: Kepatuhan Bea Cukai CEISA 4.0 &amp; Kereta Api Rel Siding 600m (ERP + TMS)</a:t>
+              <a:t>Flowchart 3: Alokasi Alat Pengangkat &amp; Stacking Rules 3D (YMS + WCS)</a:t>
             </a:r>
           </a:p>
         </p:txBody>
@@ -9220,8 +9864,8 @@
         </p:nvSpPr>
         <p:spPr>
           <a:xfrm>
-            <a:off x="8321040" y="237744"/>
-            <a:ext cx="3108960" cy="932688"/>
+            <a:off x="8412480" y="237744"/>
+            <a:ext cx="3017520" cy="932688"/>
           </a:xfrm>
           <a:prstGeom prst="roundRect">
             <a:avLst/>
@@ -9276,7 +9920,7 @@
               </a:defRPr>
             </a:pPr>
             <a:r>
-              <a:t>pages/customs.php &amp; pages/yard.php</a:t>
+              <a:t>dashboard.php?page=yard</a:t>
             </a:r>
           </a:p>
           <a:p>
@@ -9291,7 +9935,7 @@
               </a:defRPr>
             </a:pPr>
             <a:r>
-              <a:t>http://localhost/.../pages/customs.php</a:t>
+              <a:t>http://localhost/.../yard.php</a:t>
             </a:r>
           </a:p>
         </p:txBody>
@@ -9326,363 +9970,44 @@
               </a:defRPr>
             </a:pPr>
             <a:r>
-              <a:t>Conclusion Supply Chain Consultant  •  Naufal Andika Heditya &amp; Zulfikar J. Fatah  •  Topik 7: CIDP 35 Ha                    Slide 7 of 12</a:t>
-            </a:r>
-          </a:p>
-        </p:txBody>
-      </p:sp>
-      <p:sp>
-        <p:nvSpPr>
-          <p:cNvPr id="5" name="Rounded Rectangle 4"/>
-          <p:cNvSpPr/>
+              <a:t>Conclusion Supply Chain Consultant  •  Naufal Andika Heditya &amp; Zulfikar J. Fatah  •  Topik 7: CIDP 35 Ha                    Slide 7 of 16</a:t>
+            </a:r>
+          </a:p>
+        </p:txBody>
+      </p:sp>
+      <p:pic>
+        <p:nvPicPr>
+          <p:cNvPr id="5" name="Picture 4" descr="FLOWCHART_PENGANGKATAN_DAN_STACKING_KONTAINER.jpg"/>
+          <p:cNvPicPr>
+            <a:picLocks noChangeAspect="1"/>
+          </p:cNvPicPr>
           <p:nvPr/>
-        </p:nvSpPr>
-        <p:spPr>
-          <a:xfrm>
-            <a:off x="731520" y="1508760"/>
-            <a:ext cx="5212080" cy="2926080"/>
-          </a:xfrm>
-          <a:prstGeom prst="roundRect">
-            <a:avLst/>
-          </a:prstGeom>
-          <a:solidFill>
-            <a:srgbClr val="FFFFFF"/>
-          </a:solidFill>
-          <a:ln w="12700">
-            <a:solidFill>
-              <a:srgbClr val="E2E8F0"/>
-            </a:solidFill>
-          </a:ln>
-        </p:spPr>
-        <p:style>
-          <a:lnRef idx="1">
-            <a:schemeClr val="accent1"/>
-          </a:lnRef>
-          <a:fillRef idx="3">
-            <a:schemeClr val="accent1"/>
-          </a:fillRef>
-          <a:effectRef idx="2">
-            <a:schemeClr val="accent1"/>
-          </a:effectRef>
-          <a:fontRef idx="minor">
-            <a:schemeClr val="lt1"/>
-          </a:fontRef>
-        </p:style>
-        <p:txBody>
-          <a:bodyPr rtlCol="0" anchor="ctr"/>
-          <a:lstStyle/>
-          <a:p>
-            <a:pPr algn="ctr"/>
-          </a:p>
-        </p:txBody>
-      </p:sp>
-      <p:sp>
-        <p:nvSpPr>
-          <p:cNvPr id="6" name="TextBox 5"/>
-          <p:cNvSpPr txBox="1"/>
-          <p:nvPr/>
-        </p:nvSpPr>
-        <p:spPr>
-          <a:xfrm>
-            <a:off x="914400" y="1645920"/>
-            <a:ext cx="4846320" cy="2651760"/>
+        </p:nvPicPr>
+        <p:blipFill>
+          <a:blip r:embed="rId2"/>
+          <a:stretch>
+            <a:fillRect/>
+          </a:stretch>
+        </p:blipFill>
+        <p:spPr>
+          <a:xfrm>
+            <a:off x="731520" y="1417320"/>
+            <a:ext cx="10698480" cy="4343400"/>
           </a:xfrm>
           <a:prstGeom prst="rect">
             <a:avLst/>
           </a:prstGeom>
-          <a:noFill/>
-        </p:spPr>
-        <p:txBody>
-          <a:bodyPr wrap="square">
-            <a:spAutoFit/>
-          </a:bodyPr>
-          <a:lstStyle/>
-          <a:p>
-            <a:pPr>
-              <a:defRPr sz="900" b="1">
-                <a:solidFill>
-                  <a:srgbClr val="0170B9"/>
-                </a:solidFill>
-              </a:defRPr>
-            </a:pPr>
-            <a:r>
-              <a:t>FLOW 5: KEPATUHAN PABEAN CEISA 4.0 DJBC (PMK 190/2022)</a:t>
-            </a:r>
-          </a:p>
-          <a:p>
-            <a:pPr>
-              <a:spcBef>
-                <a:spcPts val="100"/>
-              </a:spcBef>
-              <a:defRPr sz="1200" b="1">
-                <a:solidFill>
-                  <a:srgbClr val="002F5E"/>
-                </a:solidFill>
-              </a:defRPr>
-            </a:pPr>
-            <a:r>
-              <a:t>Decision Profil Risiko: Jalur Hijau vs Jalur Merah</a:t>
-            </a:r>
-          </a:p>
-          <a:p>
-            <a:pPr>
-              <a:spcBef>
-                <a:spcPts val="300"/>
-              </a:spcBef>
-              <a:defRPr sz="819">
-                <a:solidFill>
-                  <a:srgbClr val="1E293B"/>
-                </a:solidFill>
-              </a:defRPr>
-            </a:pPr>
-            <a:r>
-              <a:t>• Decision Point: Profil Risiko Manifes Hijau atau Merah?</a:t>
-            </a:r>
-            <a:br/>
-            <a:r>
-              <a:t>  - [JIKA HIJAU (94,2%)]: Webhook CEISA terbitkan SPPB digital &lt;5 menit -&gt; Status SPPB_CLEARED, kontainer langsung siap rilis.</a:t>
-            </a:r>
-            <a:br/>
-            <a:r>
-              <a:t>  - [JIKA MERAH (5,8%)]: Status dikunci CUSTOMS_HOLD -&gt; Reach Stacker otomatis bawa boks ke Hanggar Behandle Bea Cukai untuk dipindai Portal Gantry X-Ray 6 MeV. Dilarang Gate-Out sebelum inspektur pabean setujui SPPB manual.</a:t>
-            </a:r>
-          </a:p>
-        </p:txBody>
-      </p:sp>
-      <p:sp>
-        <p:nvSpPr>
-          <p:cNvPr id="7" name="Rounded Rectangle 6"/>
+        </p:spPr>
+      </p:pic>
+      <p:sp>
+        <p:nvSpPr>
+          <p:cNvPr id="6" name="Rounded Rectangle 5"/>
           <p:cNvSpPr/>
           <p:nvPr/>
         </p:nvSpPr>
         <p:spPr>
           <a:xfrm>
-            <a:off x="6217920" y="1508760"/>
-            <a:ext cx="5212080" cy="2926080"/>
-          </a:xfrm>
-          <a:prstGeom prst="roundRect">
-            <a:avLst/>
-          </a:prstGeom>
-          <a:solidFill>
-            <a:srgbClr val="EFF6FF"/>
-          </a:solidFill>
-          <a:ln w="12700">
-            <a:solidFill>
-              <a:srgbClr val="0170B9"/>
-            </a:solidFill>
-          </a:ln>
-        </p:spPr>
-        <p:style>
-          <a:lnRef idx="1">
-            <a:schemeClr val="accent1"/>
-          </a:lnRef>
-          <a:fillRef idx="3">
-            <a:schemeClr val="accent1"/>
-          </a:fillRef>
-          <a:effectRef idx="2">
-            <a:schemeClr val="accent1"/>
-          </a:effectRef>
-          <a:fontRef idx="minor">
-            <a:schemeClr val="lt1"/>
-          </a:fontRef>
-        </p:style>
-        <p:txBody>
-          <a:bodyPr rtlCol="0" anchor="ctr"/>
-          <a:lstStyle/>
-          <a:p>
-            <a:pPr algn="ctr"/>
-          </a:p>
-        </p:txBody>
-      </p:sp>
-      <p:sp>
-        <p:nvSpPr>
-          <p:cNvPr id="8" name="TextBox 7"/>
-          <p:cNvSpPr txBox="1"/>
-          <p:nvPr/>
-        </p:nvSpPr>
-        <p:spPr>
-          <a:xfrm>
-            <a:off x="6400800" y="1645920"/>
-            <a:ext cx="4846320" cy="2651760"/>
-          </a:xfrm>
-          <a:prstGeom prst="rect">
-            <a:avLst/>
-          </a:prstGeom>
-          <a:noFill/>
-        </p:spPr>
-        <p:txBody>
-          <a:bodyPr wrap="square">
-            <a:spAutoFit/>
-          </a:bodyPr>
-          <a:lstStyle/>
-          <a:p>
-            <a:pPr>
-              <a:defRPr sz="900" b="1">
-                <a:solidFill>
-                  <a:srgbClr val="0170B9"/>
-                </a:solidFill>
-              </a:defRPr>
-            </a:pPr>
-            <a:r>
-              <a:t>FLOW 6: INTERMODAL KERETA API REL SIDING 600M</a:t>
-            </a:r>
-          </a:p>
-          <a:p>
-            <a:pPr>
-              <a:spcBef>
-                <a:spcPts val="100"/>
-              </a:spcBef>
-              <a:defRPr sz="1200" b="1">
-                <a:solidFill>
-                  <a:srgbClr val="002F5E"/>
-                </a:solidFill>
-              </a:defRPr>
-            </a:pPr>
-            <a:r>
-              <a:t>Decision Integritas Segel Smart GPS E-Seal KA</a:t>
-            </a:r>
-          </a:p>
-          <a:p>
-            <a:pPr>
-              <a:spcBef>
-                <a:spcPts val="300"/>
-              </a:spcBef>
-              <a:defRPr sz="819">
-                <a:solidFill>
-                  <a:srgbClr val="1E293B"/>
-                </a:solidFill>
-              </a:defRPr>
-            </a:pPr>
-            <a:r>
-              <a:t>• Decision Point: Beban Gandar &lt;= 18t &amp; Smart E-Seal Utuh?</a:t>
-            </a:r>
-            <a:br/>
-            <a:r>
-              <a:t>  - [JIKA YA]: RS muat 30 Gerbong Datar (60 TEU), berangkat tepat waktu 90 mnt ke Tanjung Priok, status TRAIN_DISPATCHED_ON_TIME.</a:t>
-            </a:r>
-            <a:br/>
-            <a:r>
-              <a:t>  - [JIKA TIDAK (Kawat Segel Putus / Tamper)]: Satelit GPS kirim peringatan darurat PABEAN_TAMPER_ALERT ke CIDP, boks langsung diisolasi saat tiba, Polsuska &amp; Bea Cukai lakukan penyegelan ulang.</a:t>
-            </a:r>
-          </a:p>
-        </p:txBody>
-      </p:sp>
-      <p:sp>
-        <p:nvSpPr>
-          <p:cNvPr id="9" name="Rounded Rectangle 8"/>
-          <p:cNvSpPr/>
-          <p:nvPr/>
-        </p:nvSpPr>
-        <p:spPr>
-          <a:xfrm>
-            <a:off x="731520" y="4553712"/>
-            <a:ext cx="10698480" cy="1143000"/>
-          </a:xfrm>
-          <a:prstGeom prst="roundRect">
-            <a:avLst/>
-          </a:prstGeom>
-          <a:solidFill>
-            <a:srgbClr val="FFFFFF"/>
-          </a:solidFill>
-          <a:ln w="12700">
-            <a:solidFill>
-              <a:srgbClr val="0170B9"/>
-            </a:solidFill>
-          </a:ln>
-        </p:spPr>
-        <p:style>
-          <a:lnRef idx="1">
-            <a:schemeClr val="accent1"/>
-          </a:lnRef>
-          <a:fillRef idx="3">
-            <a:schemeClr val="accent1"/>
-          </a:fillRef>
-          <a:effectRef idx="2">
-            <a:schemeClr val="accent1"/>
-          </a:effectRef>
-          <a:fontRef idx="minor">
-            <a:schemeClr val="lt1"/>
-          </a:fontRef>
-        </p:style>
-        <p:txBody>
-          <a:bodyPr rtlCol="0" anchor="ctr"/>
-          <a:lstStyle/>
-          <a:p>
-            <a:pPr algn="ctr"/>
-          </a:p>
-        </p:txBody>
-      </p:sp>
-      <p:sp>
-        <p:nvSpPr>
-          <p:cNvPr id="10" name="TextBox 9"/>
-          <p:cNvSpPr txBox="1"/>
-          <p:nvPr/>
-        </p:nvSpPr>
-        <p:spPr>
-          <a:xfrm>
-            <a:off x="914400" y="4645152"/>
-            <a:ext cx="10332720" cy="960120"/>
-          </a:xfrm>
-          <a:prstGeom prst="rect">
-            <a:avLst/>
-          </a:prstGeom>
-          <a:noFill/>
-        </p:spPr>
-        <p:txBody>
-          <a:bodyPr wrap="square">
-            <a:spAutoFit/>
-          </a:bodyPr>
-          <a:lstStyle/>
-          <a:p>
-            <a:pPr>
-              <a:defRPr sz="900" b="1">
-                <a:solidFill>
-                  <a:srgbClr val="002F5E"/>
-                </a:solidFill>
-              </a:defRPr>
-            </a:pPr>
-            <a:r>
-              <a:t>MENGGUNAKAN APA (PORTAL X-RAY, INFRASTRUKTUR REL, E-SEAL &amp; TMS MODUL):</a:t>
-            </a:r>
-          </a:p>
-          <a:p>
-            <a:pPr>
-              <a:spcBef>
-                <a:spcPts val="200"/>
-              </a:spcBef>
-              <a:defRPr sz="800">
-                <a:solidFill>
-                  <a:srgbClr val="1E293B"/>
-                </a:solidFill>
-              </a:defRPr>
-            </a:pPr>
-            <a:r>
-              <a:t>• Mesin Pemindai Pabean: Nuctech FG9056 Portal Gantry X-Ray 6 MeV (Daya tembus 300 mm baja) + Hanggar Behandle Tertutup 1.500 m².</a:t>
-            </a:r>
-            <a:br/>
-            <a:r>
-              <a:t>• Kereta Api: 2 Sepur Simpan Rel R54 600m, Lokomotif CC206 KAI, 30 Gerbong Datar PPCW (Kapasitas 60 TEU).</a:t>
-            </a:r>
-            <a:br/>
-            <a:r>
-              <a:t>• Perangkat Keamanan: Smart GPS E-Seal Satelit LoRa/GSM dengan sensor pemutus kawat kargo.</a:t>
-            </a:r>
-            <a:br/>
-            <a:r>
-              <a:t>• Perangkat Lunak: Modul TMS Rail Freight Dispatcher, 3D Train Load Planner &amp; Webhook REST API Gateway CEISA 4.0 DJBC.</a:t>
-            </a:r>
-          </a:p>
-        </p:txBody>
-      </p:sp>
-      <p:sp>
-        <p:nvSpPr>
-          <p:cNvPr id="11" name="Rounded Rectangle 10"/>
-          <p:cNvSpPr/>
-          <p:nvPr/>
-        </p:nvSpPr>
-        <p:spPr>
-          <a:xfrm>
-            <a:off x="731520" y="5779008"/>
+            <a:off x="731520" y="5852160"/>
             <a:ext cx="10698480" cy="438912"/>
           </a:xfrm>
           <a:prstGeom prst="roundRect">
@@ -9723,7 +10048,7 @@
               </a:defRPr>
             </a:pPr>
             <a:r>
-              <a:t>👉  [LIVE DEMO]: Buka 'pages/customs.php' (Webhook SPPB) &amp; 'dashboard.php' (Simulasi Rangkaian Rel Kereta Api)</a:t>
+              <a:t>👉  Menjawab Notulensi: Kontainer 40ft diangkat RTG 45T, kosong oleh ECH, penempatan Bay Genap &amp; Tier Berat Bawah.</a:t>
             </a:r>
           </a:p>
         </p:txBody>
@@ -9755,7 +10080,7 @@
         <p:spPr>
           <a:xfrm>
             <a:off x="731520" y="256032"/>
-            <a:ext cx="7498079" cy="1051560"/>
+            <a:ext cx="7772400" cy="1051560"/>
           </a:xfrm>
           <a:prstGeom prst="rect">
             <a:avLst/>
@@ -9791,7 +10116,7 @@
               </a:defRPr>
             </a:pPr>
             <a:r>
-              <a:t>Flow 7: Model Pendapatan &amp; Penguncian Gate-Out Zero Revenue Leakage (ERP + YMS)</a:t>
+              <a:t>Business Rule 2: Pengangkatan &amp; Penempatan Kontainer 40ft/20ft (Stacking Rules)</a:t>
             </a:r>
           </a:p>
         </p:txBody>
@@ -9804,8 +10129,8 @@
         </p:nvSpPr>
         <p:spPr>
           <a:xfrm>
-            <a:off x="8321040" y="237744"/>
-            <a:ext cx="3108960" cy="932688"/>
+            <a:off x="8412480" y="237744"/>
+            <a:ext cx="3017520" cy="932688"/>
           </a:xfrm>
           <a:prstGeom prst="roundRect">
             <a:avLst/>
@@ -9860,7 +10185,7 @@
               </a:defRPr>
             </a:pPr>
             <a:r>
-              <a:t>pages/billing.php</a:t>
+              <a:t>dashboard.php?page=yard</a:t>
             </a:r>
           </a:p>
           <a:p>
@@ -9875,7 +10200,7 @@
               </a:defRPr>
             </a:pPr>
             <a:r>
-              <a:t>http://localhost/.../pages/billing.php</a:t>
+              <a:t>http://localhost/.../yard.php</a:t>
             </a:r>
           </a:p>
         </p:txBody>
@@ -9910,7 +10235,7 @@
               </a:defRPr>
             </a:pPr>
             <a:r>
-              <a:t>Conclusion Supply Chain Consultant  •  Naufal Andika Heditya &amp; Zulfikar J. Fatah  •  Topik 7: CIDP 35 Ha                    Slide 8 of 12</a:t>
+              <a:t>Conclusion Supply Chain Consultant  •  Naufal Andika Heditya &amp; Zulfikar J. Fatah  •  Topik 7: CIDP 35 Ha                    Slide 8 of 16</a:t>
             </a:r>
           </a:p>
         </p:txBody>
@@ -9924,7 +10249,7 @@
         <p:spPr>
           <a:xfrm>
             <a:off x="731520" y="1508760"/>
-            <a:ext cx="5212080" cy="2926080"/>
+            <a:ext cx="5212080" cy="4160520"/>
           </a:xfrm>
           <a:prstGeom prst="roundRect">
             <a:avLst/>
@@ -9968,8 +10293,8 @@
         </p:nvSpPr>
         <p:spPr>
           <a:xfrm>
-            <a:off x="914400" y="1645920"/>
-            <a:ext cx="4846320" cy="2651760"/>
+            <a:off x="914400" y="1691640"/>
+            <a:ext cx="4846320" cy="3794760"/>
           </a:xfrm>
           <a:prstGeom prst="rect">
             <a:avLst/>
@@ -9983,72 +10308,84 @@
           <a:lstStyle/>
           <a:p>
             <a:pPr>
-              <a:defRPr sz="900" b="1">
+              <a:defRPr sz="1100" b="1">
                 <a:solidFill>
                   <a:srgbClr val="0170B9"/>
                 </a:solidFill>
               </a:defRPr>
             </a:pPr>
             <a:r>
-              <a:t>7 ALIRAN PENDAPATAN KOMERSIAL (GROSS REVENUE)</a:t>
+              <a:t>1. ALOKASI ALAT PENGANGKAT BERDASARKAN SPESIFIKASI</a:t>
             </a:r>
           </a:p>
           <a:p>
             <a:pPr>
               <a:spcBef>
-                <a:spcPts val="100"/>
+                <a:spcPts val="600"/>
               </a:spcBef>
-              <a:defRPr sz="1200" b="1">
-                <a:solidFill>
-                  <a:srgbClr val="002F5E"/>
-                </a:solidFill>
-              </a:defRPr>
-            </a:pPr>
-            <a:r>
-              <a:t>Target Throughput 150.000 TEU: Rp 76.025.000.000 / Tahun</a:t>
-            </a:r>
-          </a:p>
-          <a:p>
-            <a:pPr>
-              <a:spcBef>
-                <a:spcPts val="300"/>
-              </a:spcBef>
-              <a:defRPr sz="819">
+              <a:defRPr sz="880">
                 <a:solidFill>
                   <a:srgbClr val="1E293B"/>
                 </a:solidFill>
               </a:defRPr>
             </a:pPr>
             <a:r>
-              <a:t>1. Lift-On / Lift-Off (Lo-Lo): Rp 33,75 M (44,4% - 150rb gerakan boks)</a:t>
-            </a:r>
-            <a:br/>
-            <a:r>
-              <a:t>2. Penumpukan Progresif: Rp 10,80 M (14,2% - Denda Inap Hari 4+)</a:t>
-            </a:r>
-            <a:br/>
-            <a:r>
-              <a:t>   - Masa I (1-3 hari) = Rp 0 | Masa II = Rp 45rb | Masa III = Rp 90rb/hari</a:t>
-            </a:r>
-            <a:br/>
-            <a:r>
-              <a:t>3. Bagi Hasil Kereta Api Logistik: Rp 9,00 M (11,8% - 6.000 GD)</a:t>
-            </a:r>
-            <a:br/>
-            <a:r>
-              <a:t>4. Gudang CFS Stuffing/Stripping: Rp 8,10 M (10,7%)</a:t>
-            </a:r>
-            <a:br/>
-            <a:r>
-              <a:t>5. Steker Pendingin Reefer Yard: Rp 6,25 M (8,2%)</a:t>
-            </a:r>
-            <a:br/>
-            <a:r>
-              <a:t>6. Jembatan Timbang VGM SOLAS: Rp 5,50 M (7,2%)</a:t>
-            </a:r>
-            <a:br/>
-            <a:r>
-              <a:t>7. Behandle Karantina Bea Cukai: Rp 2,62 M (3,5%)</a:t>
+              <a:t>• Kontainer 40 Feet Heavy Laden (Muatan Penuh Berat):</a:t>
+            </a:r>
+            <a:br/>
+            <a:r>
+              <a:t>  - Alat Utama: RTG Crane (Rubber Tyred Gantry) 45 Ton.</a:t>
+            </a:r>
+            <a:br/>
+            <a:r>
+              <a:t>    Menjangkau rentang 6+1 baris dan 5+1 tinggi tier.</a:t>
+            </a:r>
+            <a:br/>
+            <a:r>
+              <a:t>  - Alat Sekunder: Reach Stacker 45 Ton (Kalmar / Konecranes).</a:t>
+            </a:r>
+            <a:br/>
+            <a:r>
+              <a:t>  - Operator: RTG/RS Operator bersertifikat SIO Kemnaker via VMT di kabin alat.</a:t>
+            </a:r>
+            <a:br/>
+            <a:br/>
+            <a:r>
+              <a:t>• Kontainer 20 Feet Kosong (Empty Container):</a:t>
+            </a:r>
+            <a:br/>
+            <a:r>
+              <a:t>  - Alat: Empty Container Handler (ECH) 10 Ton.</a:t>
+            </a:r>
+            <a:br/>
+            <a:r>
+              <a:t>  - Operator: ECH Operator berlisensi.</a:t>
+            </a:r>
+            <a:br/>
+            <a:r>
+              <a:t>  - Kecepatan: Mampu menyusun hingga Tier 6-8 dengan cepat.</a:t>
+            </a:r>
+            <a:br/>
+            <a:br/>
+            <a:r>
+              <a:t>• Kargo Curah / Palet di Gudang CFS:</a:t>
+            </a:r>
+            <a:br/>
+            <a:r>
+              <a:t>  - Alat: Forklift 3-5 Ton &amp; Reach Truck CFS.</a:t>
+            </a:r>
+            <a:br/>
+            <a:r>
+              <a:t>  - Operator: CFS Forklift Operator &amp; Tallyman.</a:t>
+            </a:r>
+            <a:br/>
+            <a:br/>
+            <a:r>
+              <a:t>• Kontainer Intermodal di Rel Kereta Api 600M:</a:t>
+            </a:r>
+            <a:br/>
+            <a:r>
+              <a:t>  - Alat: RMG Crane 45 Ton / Reach Stacker Intermodal Leg.</a:t>
             </a:r>
           </a:p>
         </p:txBody>
@@ -10062,128 +10399,7 @@
         <p:spPr>
           <a:xfrm>
             <a:off x="6217920" y="1508760"/>
-            <a:ext cx="5212080" cy="2926080"/>
-          </a:xfrm>
-          <a:prstGeom prst="roundRect">
-            <a:avLst/>
-          </a:prstGeom>
-          <a:solidFill>
-            <a:srgbClr val="ECFDF5"/>
-          </a:solidFill>
-          <a:ln w="12700">
-            <a:solidFill>
-              <a:srgbClr val="10B981"/>
-            </a:solidFill>
-          </a:ln>
-        </p:spPr>
-        <p:style>
-          <a:lnRef idx="1">
-            <a:schemeClr val="accent1"/>
-          </a:lnRef>
-          <a:fillRef idx="3">
-            <a:schemeClr val="accent1"/>
-          </a:fillRef>
-          <a:effectRef idx="2">
-            <a:schemeClr val="accent1"/>
-          </a:effectRef>
-          <a:fontRef idx="minor">
-            <a:schemeClr val="lt1"/>
-          </a:fontRef>
-        </p:style>
-        <p:txBody>
-          <a:bodyPr rtlCol="0" anchor="ctr"/>
-          <a:lstStyle/>
-          <a:p>
-            <a:pPr algn="ctr"/>
-          </a:p>
-        </p:txBody>
-      </p:sp>
-      <p:sp>
-        <p:nvSpPr>
-          <p:cNvPr id="8" name="TextBox 7"/>
-          <p:cNvSpPr txBox="1"/>
-          <p:nvPr/>
-        </p:nvSpPr>
-        <p:spPr>
-          <a:xfrm>
-            <a:off x="6400800" y="1645920"/>
-            <a:ext cx="4846320" cy="2651760"/>
-          </a:xfrm>
-          <a:prstGeom prst="rect">
-            <a:avLst/>
-          </a:prstGeom>
-          <a:noFill/>
-        </p:spPr>
-        <p:txBody>
-          <a:bodyPr wrap="square">
-            <a:spAutoFit/>
-          </a:bodyPr>
-          <a:lstStyle/>
-          <a:p>
-            <a:pPr>
-              <a:spcBef>
-                <a:spcPts val="0"/>
-              </a:spcBef>
-              <a:defRPr sz="900" b="1">
-                <a:solidFill>
-                  <a:srgbClr val="10B981"/>
-                </a:solidFill>
-              </a:defRPr>
-            </a:pPr>
-            <a:r>
-              <a:t>DECISION INTERLOCK GATE-OUT: ZERO REVENUE LEAKAGE</a:t>
-            </a:r>
-          </a:p>
-          <a:p>
-            <a:pPr>
-              <a:spcBef>
-                <a:spcPts val="100"/>
-              </a:spcBef>
-              <a:defRPr sz="1200" b="1">
-                <a:solidFill>
-                  <a:srgbClr val="002F5E"/>
-                </a:solidFill>
-              </a:defRPr>
-            </a:pPr>
-            <a:r>
-              <a:t>Penguncian Palang Gerbang Keluar Otomatis</a:t>
-            </a:r>
-          </a:p>
-          <a:p>
-            <a:pPr>
-              <a:spcBef>
-                <a:spcPts val="300"/>
-              </a:spcBef>
-              <a:defRPr sz="819">
-                <a:solidFill>
-                  <a:srgbClr val="1E293B"/>
-                </a:solidFill>
-              </a:defRPr>
-            </a:pPr>
-            <a:r>
-              <a:t>• Decision Point: Faktur ERP Odoo LUNAS (PAID) &amp; Dokumen SPPB Cleared?</a:t>
-            </a:r>
-            <a:br/>
-            <a:r>
-              <a:t>  - [JIKA YA]: Palang barrier terbuka, kamera ANPR ambil foto e-Exit Pass, status GATE_OUT_COMPLETED, Zero Revenue Leakage terwujud!</a:t>
-            </a:r>
-            <a:br/>
-            <a:r>
-              <a:t>  - [JIKA TIDAK]: Palang TETAP TERKUNCI PERMANEN, Layar VMS tampilkan 'TAGIHAN BELUM LUNAS / TAHAN BEA CUKAI', truk diarahkan ke Holding Lane agar tidak menghambat lalu lintas.</a:t>
-            </a:r>
-          </a:p>
-        </p:txBody>
-      </p:sp>
-      <p:sp>
-        <p:nvSpPr>
-          <p:cNvPr id="9" name="Rounded Rectangle 8"/>
-          <p:cNvSpPr/>
-          <p:nvPr/>
-        </p:nvSpPr>
-        <p:spPr>
-          <a:xfrm>
-            <a:off x="731520" y="4553712"/>
-            <a:ext cx="10698480" cy="1143000"/>
+            <a:ext cx="5212080" cy="4160520"/>
           </a:xfrm>
           <a:prstGeom prst="roundRect">
             <a:avLst/>
@@ -10193,7 +10409,7 @@
           </a:solidFill>
           <a:ln w="12700">
             <a:solidFill>
-              <a:srgbClr val="0170B9"/>
+              <a:srgbClr val="E2E8F0"/>
             </a:solidFill>
           </a:ln>
         </p:spPr>
@@ -10221,14 +10437,14 @@
       </p:sp>
       <p:sp>
         <p:nvSpPr>
-          <p:cNvPr id="10" name="TextBox 9"/>
+          <p:cNvPr id="8" name="TextBox 7"/>
           <p:cNvSpPr txBox="1"/>
           <p:nvPr/>
         </p:nvSpPr>
         <p:spPr>
           <a:xfrm>
-            <a:off x="914400" y="4645152"/>
-            <a:ext cx="10332720" cy="960120"/>
+            <a:off x="6400800" y="1691640"/>
+            <a:ext cx="4846320" cy="3794760"/>
           </a:xfrm>
           <a:prstGeom prst="rect">
             <a:avLst/>
@@ -10242,54 +10458,89 @@
           <a:lstStyle/>
           <a:p>
             <a:pPr>
-              <a:defRPr sz="900" b="1">
+              <a:defRPr sz="1100" b="1">
                 <a:solidFill>
                   <a:srgbClr val="002F5E"/>
                 </a:solidFill>
               </a:defRPr>
             </a:pPr>
             <a:r>
-              <a:t>MENGGUNAKAN APA (PALANG GATE-OUT, SISTEM BILLING &amp; KASIR ODOO):</a:t>
+              <a:t>2. ATURAN PENEMPATAN 3D BAY-ROW-TIER (STACKING RULES)</a:t>
             </a:r>
           </a:p>
           <a:p>
             <a:pPr>
               <a:spcBef>
-                <a:spcPts val="200"/>
+                <a:spcPts val="600"/>
               </a:spcBef>
-              <a:defRPr sz="800">
+              <a:defRPr sz="880">
                 <a:solidFill>
                   <a:srgbClr val="1E293B"/>
                 </a:solidFill>
               </a:defRPr>
             </a:pPr>
             <a:r>
-              <a:t>• Perangkat Keras Gerbang Keluar: Automatic Magnetic Barrier Gate Outbound + Layar Digital VMS (Variable Message Sign) 3-Warna.</a:t>
-            </a:r>
-            <a:br/>
-            <a:r>
-              <a:t>• Vision AI: Kamera ANPR Gate-Out Hikvision + RFID Card Reader.</a:t>
-            </a:r>
-            <a:br/>
-            <a:r>
-              <a:t>• Sistem Akuntansi: ERP Odoo Finance v17 Community Edition (Modul Invoicing, Journal Entries, Bank Reconciliation &amp; Payment Gateway).</a:t>
-            </a:r>
-            <a:br/>
-            <a:r>
-              <a:t>• Integrasi Middleware: Event-Driven Webhook Tariff Engine yang mengunci palang gerbang secara otomatis.</a:t>
-            </a:r>
-          </a:p>
-        </p:txBody>
-      </p:sp>
-      <p:sp>
-        <p:nvSpPr>
-          <p:cNvPr id="11" name="Rounded Rectangle 10"/>
+              <a:t>• Struktur Hierarki Alamat: [Blok] - [Bay] - [Row] - [Tier]</a:t>
+            </a:r>
+            <a:br/>
+            <a:br/>
+            <a:r>
+              <a:t>• Aturan Ukuran 20 Feet vs 40 Feet (Bay Rule):</a:t>
+            </a:r>
+            <a:br/>
+            <a:r>
+              <a:t>  - Bay Ganjil (01, 03, 05, dst.): Khusus 2 kontainer 20 Feet.</a:t>
+            </a:r>
+            <a:br/>
+            <a:r>
+              <a:t>  - Bay Genap (02, 06, 10, dst.): Khusus 1 kontainer 40 Feet.</a:t>
+            </a:r>
+            <a:br/>
+            <a:r>
+              <a:t>  - Larangan: Dilarang menaruh 40ft di atas dua 20ft jika posisi tidak seimbang atau tanpa twistlock pendukung.</a:t>
+            </a:r>
+            <a:br/>
+            <a:br/>
+            <a:r>
+              <a:t>• Aturan Distribusi Berat (Weight Stacking Hierarchy):</a:t>
+            </a:r>
+            <a:br/>
+            <a:r>
+              <a:t>  - Tier 1 &amp; 2 (Paling Bawah): Kontainer Heavy Laden (&gt; 24 Ton) untuk menjaga kestabilan Center of Gravity.</a:t>
+            </a:r>
+            <a:br/>
+            <a:r>
+              <a:t>  - Tier 3 (Tengah): Kontainer Medium Weight (15 - 24 Ton).</a:t>
+            </a:r>
+            <a:br/>
+            <a:r>
+              <a:t>  - Tier 4 &amp; 5 (Paling Atas): Kontainer Ringan (&lt; 15 Ton) atau Kosong. Mencegah keruntuhan akibat tiupan angin.</a:t>
+            </a:r>
+            <a:br/>
+            <a:br/>
+            <a:r>
+              <a:t>• Aturan Zonasi Karakteristik Kargo:</a:t>
+            </a:r>
+            <a:br/>
+            <a:r>
+              <a:t>  - Reefer: Blok E (dekat power plug 380V), maks Tier 3.</a:t>
+            </a:r>
+            <a:br/>
+            <a:r>
+              <a:t>  - HazMat B3: Blok F (jarak aman ≥ 50m, tanggul penampung).</a:t>
+            </a:r>
+          </a:p>
+        </p:txBody>
+      </p:sp>
+      <p:sp>
+        <p:nvSpPr>
+          <p:cNvPr id="9" name="Rounded Rectangle 8"/>
           <p:cNvSpPr/>
           <p:nvPr/>
         </p:nvSpPr>
         <p:spPr>
           <a:xfrm>
-            <a:off x="731520" y="5779008"/>
+            <a:off x="731520" y="5852160"/>
             <a:ext cx="10698480" cy="438912"/>
           </a:xfrm>
           <a:prstGeom prst="roundRect">
@@ -10330,7 +10581,7 @@
               </a:defRPr>
             </a:pPr>
             <a:r>
-              <a:t>👉  [LIVE DEMO]: Buka 'pages/billing.php' -&gt; Simulasi Auto-Invoice Odoo &amp; Penguncian Palang Gate-Out</a:t>
+              <a:t>👉  [LIVE DEMO]: Buka Halaman Web Yard (pages/yard.php) untuk melihat visualisasi denah 3D Bay-Row-Tier.</a:t>
             </a:r>
           </a:p>
         </p:txBody>
@@ -10362,7 +10613,7 @@
         <p:spPr>
           <a:xfrm>
             <a:off x="731520" y="256032"/>
-            <a:ext cx="7498079" cy="1051560"/>
+            <a:ext cx="7772400" cy="1051560"/>
           </a:xfrm>
           <a:prstGeom prst="rect">
             <a:avLst/>
@@ -10398,7 +10649,7 @@
               </a:defRPr>
             </a:pPr>
             <a:r>
-              <a:t>Evaluasi Kelayakan Investasi Finansial: PBP, NPV, IRR &amp; ROI</a:t>
+              <a:t>Fitur WMS Inbound &amp; Inventory Management: CFS &amp; Cold Storage (Bab 2 &amp; 3)</a:t>
             </a:r>
           </a:p>
         </p:txBody>
@@ -10411,8 +10662,8 @@
         </p:nvSpPr>
         <p:spPr>
           <a:xfrm>
-            <a:off x="8321040" y="237744"/>
-            <a:ext cx="3108960" cy="932688"/>
+            <a:off x="8412480" y="237744"/>
+            <a:ext cx="3017520" cy="932688"/>
           </a:xfrm>
           <a:prstGeom prst="roundRect">
             <a:avLst/>
@@ -10467,7 +10718,7 @@
               </a:defRPr>
             </a:pPr>
             <a:r>
-              <a:t>MODEL_FINANSIAL_CIDP.xlsx</a:t>
+              <a:t>dashboard.php?page=cfs</a:t>
             </a:r>
           </a:p>
           <a:p>
@@ -10482,7 +10733,7 @@
               </a:defRPr>
             </a:pPr>
             <a:r>
-              <a:t>Excel Financial Engine (Sheet Cash Flow 10 Thn)</a:t>
+              <a:t>http://localhost/.../cfs.php</a:t>
             </a:r>
           </a:p>
         </p:txBody>
@@ -10517,7 +10768,7 @@
               </a:defRPr>
             </a:pPr>
             <a:r>
-              <a:t>Conclusion Supply Chain Consultant  •  Naufal Andika Heditya &amp; Zulfikar J. Fatah  •  Topik 7: CIDP 35 Ha                    Slide 9 of 12</a:t>
+              <a:t>Conclusion Supply Chain Consultant  •  Naufal Andika Heditya &amp; Zulfikar J. Fatah  •  Topik 7: CIDP 35 Ha                    Slide 9 of 16</a:t>
             </a:r>
           </a:p>
         </p:txBody>
@@ -10531,7 +10782,7 @@
         <p:spPr>
           <a:xfrm>
             <a:off x="731520" y="1508760"/>
-            <a:ext cx="2514600" cy="4114800"/>
+            <a:ext cx="3383280" cy="4160520"/>
           </a:xfrm>
           <a:prstGeom prst="roundRect">
             <a:avLst/>
@@ -10575,8 +10826,8 @@
         </p:nvSpPr>
         <p:spPr>
           <a:xfrm>
-            <a:off x="868680" y="1691640"/>
-            <a:ext cx="2240280" cy="3749040"/>
+            <a:off x="914400" y="1691640"/>
+            <a:ext cx="3017520" cy="3794760"/>
           </a:xfrm>
           <a:prstGeom prst="rect">
             <a:avLst/>
@@ -10590,29 +10841,14 @@
           <a:lstStyle/>
           <a:p>
             <a:pPr>
-              <a:defRPr sz="950" b="1">
+              <a:defRPr sz="1100" b="1">
                 <a:solidFill>
                   <a:srgbClr val="0170B9"/>
                 </a:solidFill>
               </a:defRPr>
             </a:pPr>
             <a:r>
-              <a:t>ARUS KAS &amp; EBITDA</a:t>
-            </a:r>
-          </a:p>
-          <a:p>
-            <a:pPr>
-              <a:spcBef>
-                <a:spcPts val="200"/>
-              </a:spcBef>
-              <a:defRPr sz="1200" b="1">
-                <a:solidFill>
-                  <a:srgbClr val="002F5E"/>
-                </a:solidFill>
-              </a:defRPr>
-            </a:pPr>
-            <a:r>
-              <a:t>Laba Bersih &amp; Arus Kas</a:t>
+              <a:t>1. FITUR WMS INBOUND (BAB 2)</a:t>
             </a:r>
           </a:p>
           <a:p>
@@ -10620,43 +10856,44 @@
               <a:spcBef>
                 <a:spcPts val="600"/>
               </a:spcBef>
-              <a:defRPr sz="850">
+              <a:defRPr sz="880">
                 <a:solidFill>
                   <a:srgbClr val="1E293B"/>
                 </a:solidFill>
               </a:defRPr>
             </a:pPr>
             <a:r>
-              <a:t>• Gross Revenue: Rp 76,02 M</a:t>
-            </a:r>
-            <a:br/>
-            <a:r>
-              <a:t>• Beban OPEX: Rp 24,79 M</a:t>
-            </a:r>
-            <a:br/>
-            <a:r>
-              <a:t>• EBITDA: Rp 51,23 Miliar</a:t>
-            </a:r>
-            <a:br/>
-            <a:r>
-              <a:t>  (Margin EBITDA: 67,4%)</a:t>
-            </a:r>
-            <a:br/>
-            <a:br/>
-            <a:r>
-              <a:t>• Depresiasi (20 Thn): Rp 12,50 M</a:t>
-            </a:r>
-            <a:br/>
-            <a:r>
-              <a:t>• PPh Badan 22%: Rp 8,52 M</a:t>
-            </a:r>
-            <a:br/>
-            <a:r>
-              <a:t>• Laba Bersih EAT: Rp 30,21 M/thn</a:t>
-            </a:r>
-            <a:br/>
-            <a:r>
-              <a:t>• Net Cash Flow: Rp 42,71 M/thn</a:t>
+              <a:t>• 2.1 ASN Matching:</a:t>
+            </a:r>
+            <a:br/>
+            <a:r>
+              <a:t>  Validasi otomatis nomor PO dari ERP. Jika kuantitas fisik &gt; PO, picu status Over-receipt Alert.</a:t>
+            </a:r>
+            <a:br/>
+            <a:r>
+              <a:t>  Dampak: Menolak kelebihan barang tanpa otorisasi pembeli.</a:t>
+            </a:r>
+            <a:br/>
+            <a:br/>
+            <a:r>
+              <a:t>• 2.2 Directed Putaway Engine:</a:t>
+            </a:r>
+            <a:br/>
+            <a:r>
+              <a:t>  Algoritma alokasi rak berdasarkan matriks kriteria: dimensi SKU, kategori HazMat, dan kebutuhan suhu ruang.</a:t>
+            </a:r>
+            <a:br/>
+            <a:r>
+              <a:t>  Dampak: Lokasi simpan optimal sesuai profil muatan.</a:t>
+            </a:r>
+            <a:br/>
+            <a:br/>
+            <a:r>
+              <a:t>• 2.3 QC &amp; Quarantine Status:</a:t>
+            </a:r>
+            <a:br/>
+            <a:r>
+              <a:t>  Otomatis mengubah status stok menjadi Blocked agar tidak teralokasi sebelum lolos inspeksi kualitas.</a:t>
             </a:r>
           </a:p>
         </p:txBody>
@@ -10669,284 +10906,8 @@
         </p:nvSpPr>
         <p:spPr>
           <a:xfrm>
-            <a:off x="3456432" y="1508760"/>
-            <a:ext cx="2514600" cy="4114800"/>
-          </a:xfrm>
-          <a:prstGeom prst="roundRect">
-            <a:avLst/>
-          </a:prstGeom>
-          <a:solidFill>
-            <a:srgbClr val="ECFDF5"/>
-          </a:solidFill>
-          <a:ln w="12700">
-            <a:solidFill>
-              <a:srgbClr val="10B981"/>
-            </a:solidFill>
-          </a:ln>
-        </p:spPr>
-        <p:style>
-          <a:lnRef idx="1">
-            <a:schemeClr val="accent1"/>
-          </a:lnRef>
-          <a:fillRef idx="3">
-            <a:schemeClr val="accent1"/>
-          </a:fillRef>
-          <a:effectRef idx="2">
-            <a:schemeClr val="accent1"/>
-          </a:effectRef>
-          <a:fontRef idx="minor">
-            <a:schemeClr val="lt1"/>
-          </a:fontRef>
-        </p:style>
-        <p:txBody>
-          <a:bodyPr rtlCol="0" anchor="ctr"/>
-          <a:lstStyle/>
-          <a:p>
-            <a:pPr algn="ctr"/>
-          </a:p>
-        </p:txBody>
-      </p:sp>
-      <p:sp>
-        <p:nvSpPr>
-          <p:cNvPr id="8" name="TextBox 7"/>
-          <p:cNvSpPr txBox="1"/>
-          <p:nvPr/>
-        </p:nvSpPr>
-        <p:spPr>
-          <a:xfrm>
-            <a:off x="3593592" y="1691640"/>
-            <a:ext cx="2240280" cy="3749040"/>
-          </a:xfrm>
-          <a:prstGeom prst="rect">
-            <a:avLst/>
-          </a:prstGeom>
-          <a:noFill/>
-        </p:spPr>
-        <p:txBody>
-          <a:bodyPr wrap="square">
-            <a:spAutoFit/>
-          </a:bodyPr>
-          <a:lstStyle/>
-          <a:p>
-            <a:pPr>
-              <a:defRPr sz="950" b="1">
-                <a:solidFill>
-                  <a:srgbClr val="10B981"/>
-                </a:solidFill>
-              </a:defRPr>
-            </a:pPr>
-            <a:r>
-              <a:t>PAYBACK PERIOD (PBP)</a:t>
-            </a:r>
-          </a:p>
-          <a:p>
-            <a:pPr>
-              <a:spcBef>
-                <a:spcPts val="200"/>
-              </a:spcBef>
-              <a:defRPr sz="1200" b="1">
-                <a:solidFill>
-                  <a:srgbClr val="002F5E"/>
-                </a:solidFill>
-              </a:defRPr>
-            </a:pPr>
-            <a:r>
-              <a:t>5.84 Tahun (~5 Thn 10 Bln)</a:t>
-            </a:r>
-          </a:p>
-          <a:p>
-            <a:pPr>
-              <a:spcBef>
-                <a:spcPts val="600"/>
-              </a:spcBef>
-              <a:defRPr sz="850">
-                <a:solidFill>
-                  <a:srgbClr val="1E293B"/>
-                </a:solidFill>
-              </a:defRPr>
-            </a:pPr>
-            <a:r>
-              <a:t>Formula:</a:t>
-            </a:r>
-            <a:br/>
-            <a:r>
-              <a:t>PBP = CAPEX / Net Cash Flow</a:t>
-            </a:r>
-            <a:br/>
-            <a:r>
-              <a:t>PBP = Rp 249,5 M / Rp 42,71 M</a:t>
-            </a:r>
-            <a:br/>
-            <a:r>
-              <a:t>    = 5,84 Tahun</a:t>
-            </a:r>
-            <a:br/>
-            <a:br/>
-            <a:r>
-              <a:t>Interpretasi Bisnis:</a:t>
-            </a:r>
-            <a:br/>
-            <a:r>
-              <a:t>Modal Rp 250 Miliar kembali lunas dalam waktu kurang dari 6 tahun.</a:t>
-            </a:r>
-            <a:br/>
-            <a:br/>
-            <a:r>
-              <a:t>Batas Aman Pelabuhan:</a:t>
-            </a:r>
-            <a:br/>
-            <a:r>
-              <a:t>Standar industri pelabuhan 8 - 10 tahun. CIDP 2 tahun lebih cepat!</a:t>
-            </a:r>
-          </a:p>
-        </p:txBody>
-      </p:sp>
-      <p:sp>
-        <p:nvSpPr>
-          <p:cNvPr id="9" name="Rounded Rectangle 8"/>
-          <p:cNvSpPr/>
-          <p:nvPr/>
-        </p:nvSpPr>
-        <p:spPr>
-          <a:xfrm>
-            <a:off x="6181344" y="1508760"/>
-            <a:ext cx="2514600" cy="4114800"/>
-          </a:xfrm>
-          <a:prstGeom prst="roundRect">
-            <a:avLst/>
-          </a:prstGeom>
-          <a:solidFill>
-            <a:srgbClr val="EFF6FF"/>
-          </a:solidFill>
-          <a:ln w="12700">
-            <a:solidFill>
-              <a:srgbClr val="0170B9"/>
-            </a:solidFill>
-          </a:ln>
-        </p:spPr>
-        <p:style>
-          <a:lnRef idx="1">
-            <a:schemeClr val="accent1"/>
-          </a:lnRef>
-          <a:fillRef idx="3">
-            <a:schemeClr val="accent1"/>
-          </a:fillRef>
-          <a:effectRef idx="2">
-            <a:schemeClr val="accent1"/>
-          </a:effectRef>
-          <a:fontRef idx="minor">
-            <a:schemeClr val="lt1"/>
-          </a:fontRef>
-        </p:style>
-        <p:txBody>
-          <a:bodyPr rtlCol="0" anchor="ctr"/>
-          <a:lstStyle/>
-          <a:p>
-            <a:pPr algn="ctr"/>
-          </a:p>
-        </p:txBody>
-      </p:sp>
-      <p:sp>
-        <p:nvSpPr>
-          <p:cNvPr id="10" name="TextBox 9"/>
-          <p:cNvSpPr txBox="1"/>
-          <p:nvPr/>
-        </p:nvSpPr>
-        <p:spPr>
-          <a:xfrm>
-            <a:off x="6318504" y="1691640"/>
-            <a:ext cx="2240280" cy="3749040"/>
-          </a:xfrm>
-          <a:prstGeom prst="rect">
-            <a:avLst/>
-          </a:prstGeom>
-          <a:noFill/>
-        </p:spPr>
-        <p:txBody>
-          <a:bodyPr wrap="square">
-            <a:spAutoFit/>
-          </a:bodyPr>
-          <a:lstStyle/>
-          <a:p>
-            <a:pPr>
-              <a:defRPr sz="950" b="1">
-                <a:solidFill>
-                  <a:srgbClr val="0170B9"/>
-                </a:solidFill>
-              </a:defRPr>
-            </a:pPr>
-            <a:r>
-              <a:t>NET PRESENT VALUE (NPV)</a:t>
-            </a:r>
-          </a:p>
-          <a:p>
-            <a:pPr>
-              <a:spcBef>
-                <a:spcPts val="200"/>
-              </a:spcBef>
-              <a:defRPr sz="1200" b="1">
-                <a:solidFill>
-                  <a:srgbClr val="002F5E"/>
-                </a:solidFill>
-              </a:defRPr>
-            </a:pPr>
-            <a:r>
-              <a:t>+Rp 22.913.000.000</a:t>
-            </a:r>
-          </a:p>
-          <a:p>
-            <a:pPr>
-              <a:spcBef>
-                <a:spcPts val="600"/>
-              </a:spcBef>
-              <a:defRPr sz="850">
-                <a:solidFill>
-                  <a:srgbClr val="1E293B"/>
-                </a:solidFill>
-              </a:defRPr>
-            </a:pPr>
-            <a:r>
-              <a:t>Parameter Analisis:</a:t>
-            </a:r>
-            <a:br/>
-            <a:r>
-              <a:t>• Horizon: 10 Tahun | WACC: 10%</a:t>
-            </a:r>
-            <a:br/>
-            <a:r>
-              <a:t>• Arus Kas Kumulatif: Rp 262,45 M</a:t>
-            </a:r>
-            <a:br/>
-            <a:r>
-              <a:t>• Nilai Investasi: Rp 249,50 M</a:t>
-            </a:r>
-            <a:br/>
-            <a:br/>
-            <a:r>
-              <a:t>NPV = +Rp 22,91 Miliar (&gt; 0)</a:t>
-            </a:r>
-            <a:br/>
-            <a:br/>
-            <a:r>
-              <a:t>Interpretasi Bisnis:</a:t>
-            </a:r>
-            <a:br/>
-            <a:r>
-              <a:t>Nilai NPV Positif membuktikan secara absolut bahwa proyek dry port FEASIBLE (Sangat Layak) dan memberi nilai tambah bersih.</a:t>
-            </a:r>
-          </a:p>
-        </p:txBody>
-      </p:sp>
-      <p:sp>
-        <p:nvSpPr>
-          <p:cNvPr id="11" name="Rounded Rectangle 10"/>
-          <p:cNvSpPr/>
-          <p:nvPr/>
-        </p:nvSpPr>
-        <p:spPr>
-          <a:xfrm>
-            <a:off x="8906256" y="1508760"/>
-            <a:ext cx="2514600" cy="4114800"/>
+            <a:off x="4389120" y="1508760"/>
+            <a:ext cx="3383280" cy="4160520"/>
           </a:xfrm>
           <a:prstGeom prst="roundRect">
             <a:avLst/>
@@ -10984,14 +10945,14 @@
       </p:sp>
       <p:sp>
         <p:nvSpPr>
-          <p:cNvPr id="12" name="TextBox 11"/>
+          <p:cNvPr id="8" name="TextBox 7"/>
           <p:cNvSpPr txBox="1"/>
           <p:nvPr/>
         </p:nvSpPr>
         <p:spPr>
           <a:xfrm>
-            <a:off x="9043416" y="1691640"/>
-            <a:ext cx="2240280" cy="3749040"/>
+            <a:off x="4572000" y="1691640"/>
+            <a:ext cx="3017520" cy="3794760"/>
           </a:xfrm>
           <a:prstGeom prst="rect">
             <a:avLst/>
@@ -11005,29 +10966,14 @@
           <a:lstStyle/>
           <a:p>
             <a:pPr>
-              <a:defRPr sz="950" b="1">
-                <a:solidFill>
-                  <a:srgbClr val="6366F1"/>
-                </a:solidFill>
-              </a:defRPr>
-            </a:pPr>
-            <a:r>
-              <a:t>IRR &amp; RETURN ON INVESTMENT</a:t>
-            </a:r>
-          </a:p>
-          <a:p>
-            <a:pPr>
-              <a:spcBef>
-                <a:spcPts val="200"/>
-              </a:spcBef>
-              <a:defRPr sz="1200" b="1">
+              <a:defRPr sz="1100" b="1">
                 <a:solidFill>
                   <a:srgbClr val="002F5E"/>
                 </a:solidFill>
               </a:defRPr>
             </a:pPr>
             <a:r>
-              <a:t>IRR: 11.90% | ROI: 140.6%</a:t>
+              <a:t>2. FITUR WMS INVENTORY (BAB 3)</a:t>
             </a:r>
           </a:p>
           <a:p>
@@ -11035,49 +10981,179 @@
               <a:spcBef>
                 <a:spcPts val="600"/>
               </a:spcBef>
-              <a:defRPr sz="850">
+              <a:defRPr sz="880">
                 <a:solidFill>
                   <a:srgbClr val="1E293B"/>
                 </a:solidFill>
               </a:defRPr>
             </a:pPr>
             <a:r>
-              <a:t>• Internal Rate of Return (IRR):</a:t>
-            </a:r>
-            <a:br/>
-            <a:r>
-              <a:t>  IRR 11,90% melampaui Hurdle Rate suku bunga kredit komersial bank (8,50%). Sangat bankable!</a:t>
-            </a:r>
-            <a:br/>
-            <a:br/>
-            <a:r>
-              <a:t>• Return on Investment (10 Thn):</a:t>
-            </a:r>
-            <a:br/>
-            <a:r>
-              <a:t>  Total laba bersih 10 tahun (Rp 350,9 M) / CAPEX (Rp 249,5 M) = 140,6%.</a:t>
-            </a:r>
-            <a:br/>
-            <a:br/>
-            <a:r>
-              <a:t>• Kesimpulan Investor:</a:t>
-            </a:r>
-            <a:br/>
-            <a:r>
-              <a:t>  Kombinasi PBP &lt;6 tahun dan IRR &gt;11% sangat aman bagi perbankan.</a:t>
-            </a:r>
-          </a:p>
-        </p:txBody>
-      </p:sp>
-      <p:sp>
-        <p:nvSpPr>
-          <p:cNvPr id="13" name="Rounded Rectangle 12"/>
+              <a:t>• 3.1 Real-Time Bin Tracking:</a:t>
+            </a:r>
+            <a:br/>
+            <a:r>
+              <a:t>  Pemetaan hierarki Aisle-Rack-Shelf-Bin untuk memastikan keterlacakan (traceability) 100% dari palet hingga SKU individual.</a:t>
+            </a:r>
+            <a:br/>
+            <a:br/>
+            <a:r>
+              <a:t>• 3.2 Automated Stock Rotation (FEFO / FIFO):</a:t>
+            </a:r>
+            <a:br/>
+            <a:r>
+              <a:t>  Mengunci alokasi barang berdasarkan Expiry Date paling dekat (FEFO) saat Pick Task dibuat oleh sistem.</a:t>
+            </a:r>
+            <a:br/>
+            <a:r>
+              <a:t>  Dampak: Menghilangkan risiko kedaluwarsa barang di gudang CFS.</a:t>
+            </a:r>
+            <a:br/>
+            <a:br/>
+            <a:r>
+              <a:t>• 3.3 Cycle Counting Workflow:</a:t>
+            </a:r>
+            <a:br/>
+            <a:r>
+              <a:t>  Perhitungan stok berkala (blind counting) tanpa menghentikan operasional gudang, mencegah kecurangan operator.</a:t>
+            </a:r>
+          </a:p>
+        </p:txBody>
+      </p:sp>
+      <p:sp>
+        <p:nvSpPr>
+          <p:cNvPr id="9" name="Rounded Rectangle 8"/>
           <p:cNvSpPr/>
           <p:nvPr/>
         </p:nvSpPr>
         <p:spPr>
           <a:xfrm>
-            <a:off x="731520" y="5779008"/>
+            <a:off x="8046720" y="1508760"/>
+            <a:ext cx="3383280" cy="4160520"/>
+          </a:xfrm>
+          <a:prstGeom prst="roundRect">
+            <a:avLst/>
+          </a:prstGeom>
+          <a:solidFill>
+            <a:srgbClr val="FFFFFF"/>
+          </a:solidFill>
+          <a:ln w="12700">
+            <a:solidFill>
+              <a:srgbClr val="E2E8F0"/>
+            </a:solidFill>
+          </a:ln>
+        </p:spPr>
+        <p:style>
+          <a:lnRef idx="1">
+            <a:schemeClr val="accent1"/>
+          </a:lnRef>
+          <a:fillRef idx="3">
+            <a:schemeClr val="accent1"/>
+          </a:fillRef>
+          <a:effectRef idx="2">
+            <a:schemeClr val="accent1"/>
+          </a:effectRef>
+          <a:fontRef idx="minor">
+            <a:schemeClr val="lt1"/>
+          </a:fontRef>
+        </p:style>
+        <p:txBody>
+          <a:bodyPr rtlCol="0" anchor="ctr"/>
+          <a:lstStyle/>
+          <a:p>
+            <a:pPr algn="ctr"/>
+          </a:p>
+        </p:txBody>
+      </p:sp>
+      <p:sp>
+        <p:nvSpPr>
+          <p:cNvPr id="10" name="TextBox 9"/>
+          <p:cNvSpPr txBox="1"/>
+          <p:nvPr/>
+        </p:nvSpPr>
+        <p:spPr>
+          <a:xfrm>
+            <a:off x="8229600" y="1691640"/>
+            <a:ext cx="3017520" cy="3794760"/>
+          </a:xfrm>
+          <a:prstGeom prst="rect">
+            <a:avLst/>
+          </a:prstGeom>
+          <a:noFill/>
+        </p:spPr>
+        <p:txBody>
+          <a:bodyPr wrap="square">
+            <a:spAutoFit/>
+          </a:bodyPr>
+          <a:lstStyle/>
+          <a:p>
+            <a:pPr>
+              <a:defRPr sz="1100" b="1">
+                <a:solidFill>
+                  <a:srgbClr val="10B981"/>
+                </a:solidFill>
+              </a:defRPr>
+            </a:pPr>
+            <a:r>
+              <a:t>3. COLD CHAIN &amp; REEFER PLUGS</a:t>
+            </a:r>
+          </a:p>
+          <a:p>
+            <a:pPr>
+              <a:spcBef>
+                <a:spcPts val="600"/>
+              </a:spcBef>
+              <a:defRPr sz="880">
+                <a:solidFill>
+                  <a:srgbClr val="1E293B"/>
+                </a:solidFill>
+              </a:defRPr>
+            </a:pPr>
+            <a:r>
+              <a:t>• Manajemen Suhu Terkendali:</a:t>
+            </a:r>
+            <a:br/>
+            <a:r>
+              <a:t>  Chilled (2°C s/d 8°C) dan Frozen (-18°C).</a:t>
+            </a:r>
+            <a:br/>
+            <a:br/>
+            <a:r>
+              <a:t>• Max Exposure Time (30 Menit):</a:t>
+            </a:r>
+            <a:br/>
+            <a:r>
+              <a:t>  Waktu maksimal kontainer reefer berada di luar colokan pendingin. YMS/WMS menghitung rute prioritas.</a:t>
+            </a:r>
+            <a:br/>
+            <a:br/>
+            <a:r>
+              <a:t>• Telemetri Otomatis &amp; Breach Alert:</a:t>
+            </a:r>
+            <a:br/>
+            <a:r>
+              <a:t>  Sensor digital mengirim suhu per 15 menit. Jika suhu naik melampaui threshold, sirine darurat berbunyi &amp; teknisi genset dikerahkan otomatis.</a:t>
+            </a:r>
+            <a:br/>
+            <a:br/>
+            <a:r>
+              <a:t>• Billing Kelistrikan 380V:</a:t>
+            </a:r>
+            <a:br/>
+            <a:r>
+              <a:t>  Perhitungan jam konsumsi daya presisi ke billing ERP.</a:t>
+            </a:r>
+          </a:p>
+        </p:txBody>
+      </p:sp>
+      <p:sp>
+        <p:nvSpPr>
+          <p:cNvPr id="11" name="Rounded Rectangle 10"/>
+          <p:cNvSpPr/>
+          <p:nvPr/>
+        </p:nvSpPr>
+        <p:spPr>
+          <a:xfrm>
+            <a:off x="731520" y="5852160"/>
             <a:ext cx="10698480" cy="438912"/>
           </a:xfrm>
           <a:prstGeom prst="roundRect">
@@ -11118,7 +11194,7 @@
               </a:defRPr>
             </a:pPr>
             <a:r>
-              <a:t>👉  [MODEL FINANSIAL EXCEL]: Buka Sheet 'Cash Flow 10 Thn' di MODEL_FINANSIAL_DAN_BLUEPRINT_CIDP.xlsx -&gt; Formula NPV &amp; IRR Asli</a:t>
+              <a:t>👉  [LIVE DEMO]: Buka Halaman CFS (pages/cfs.php) &amp; Reefer (pages/reefer.php) untuk menguji ASN &amp; sensor suhu.</a:t>
             </a:r>
           </a:p>
         </p:txBody>
